--- a/docs/TPS用例集设计.pptx
+++ b/docs/TPS用例集设计.pptx
@@ -6178,7 +6178,7 @@
         <p:spPr>
           <a:xfrm>
             <a:off x="566928" y="1591056"/>
-            <a:ext cx="5303520" cy="256032"/>
+            <a:ext cx="4754880" cy="256032"/>
           </a:xfrm>
           <a:prstGeom prst="rect">
             <a:avLst/>
@@ -6218,8 +6218,8 @@
         </p:nvSpPr>
         <p:spPr>
           <a:xfrm>
-            <a:off x="566928" y="1956816"/>
-            <a:ext cx="2103120" cy="402336"/>
+            <a:off x="566928" y="1975104"/>
+            <a:ext cx="2103120" cy="438912"/>
           </a:xfrm>
           <a:prstGeom prst="rect">
             <a:avLst/>
@@ -6277,8 +6277,8 @@
         </p:nvSpPr>
         <p:spPr>
           <a:xfrm>
-            <a:off x="2761488" y="2039112"/>
-            <a:ext cx="3017520" cy="237744"/>
+            <a:off x="2761488" y="2075688"/>
+            <a:ext cx="2468880" cy="237744"/>
           </a:xfrm>
           <a:prstGeom prst="rect">
             <a:avLst/>
@@ -6318,8 +6318,8 @@
         </p:nvSpPr>
         <p:spPr>
           <a:xfrm>
-            <a:off x="566928" y="2468880"/>
-            <a:ext cx="2103120" cy="402336"/>
+            <a:off x="566928" y="2523744"/>
+            <a:ext cx="2103120" cy="438912"/>
           </a:xfrm>
           <a:prstGeom prst="rect">
             <a:avLst/>
@@ -6377,8 +6377,8 @@
         </p:nvSpPr>
         <p:spPr>
           <a:xfrm>
-            <a:off x="2761488" y="2551176"/>
-            <a:ext cx="3017520" cy="237744"/>
+            <a:off x="2761488" y="2624328"/>
+            <a:ext cx="2468880" cy="237744"/>
           </a:xfrm>
           <a:prstGeom prst="rect">
             <a:avLst/>
@@ -6418,8 +6418,8 @@
         </p:nvSpPr>
         <p:spPr>
           <a:xfrm>
-            <a:off x="566928" y="2980944"/>
-            <a:ext cx="2103120" cy="402336"/>
+            <a:off x="566928" y="3072384"/>
+            <a:ext cx="2103120" cy="438912"/>
           </a:xfrm>
           <a:prstGeom prst="rect">
             <a:avLst/>
@@ -6477,8 +6477,8 @@
         </p:nvSpPr>
         <p:spPr>
           <a:xfrm>
-            <a:off x="2944368" y="2980944"/>
-            <a:ext cx="2926080" cy="402336"/>
+            <a:off x="2944368" y="3072384"/>
+            <a:ext cx="2231136" cy="438912"/>
           </a:xfrm>
           <a:prstGeom prst="rect">
             <a:avLst/>
@@ -6538,8 +6538,8 @@
         </p:nvSpPr>
         <p:spPr>
           <a:xfrm>
-            <a:off x="566928" y="3566160"/>
-            <a:ext cx="2011680" cy="438912"/>
+            <a:off x="566928" y="3785615"/>
+            <a:ext cx="1737360" cy="457199"/>
           </a:xfrm>
           <a:prstGeom prst="rect">
             <a:avLst/>
@@ -6558,7 +6558,7 @@
               </a:spcAft>
             </a:pPr>
             <a:r>
-              <a:rPr sz="1250" b="1">
+              <a:rPr sz="1200" b="1">
                 <a:solidFill>
                   <a:srgbClr val="002FA7"/>
                 </a:solidFill>
@@ -6579,8 +6579,8 @@
         </p:nvSpPr>
         <p:spPr>
           <a:xfrm>
-            <a:off x="2670048" y="3566160"/>
-            <a:ext cx="3200399" cy="438912"/>
+            <a:off x="2395728" y="3785615"/>
+            <a:ext cx="2926080" cy="457199"/>
           </a:xfrm>
           <a:prstGeom prst="rect">
             <a:avLst/>
@@ -6599,7 +6599,7 @@
               </a:spcAft>
             </a:pPr>
             <a:r>
-              <a:rPr sz="1250" b="0">
+              <a:rPr sz="1200" b="0">
                 <a:solidFill>
                   <a:srgbClr val="1A1A1A"/>
                 </a:solidFill>
@@ -6620,8 +6620,8 @@
         </p:nvSpPr>
         <p:spPr>
           <a:xfrm>
-            <a:off x="566928" y="3968496"/>
-            <a:ext cx="5303520" cy="6350"/>
+            <a:off x="566928" y="4206240"/>
+            <a:ext cx="4754880" cy="6350"/>
           </a:xfrm>
           <a:prstGeom prst="rect">
             <a:avLst/>
@@ -6664,8 +6664,8 @@
         </p:nvSpPr>
         <p:spPr>
           <a:xfrm>
-            <a:off x="566928" y="4078224"/>
-            <a:ext cx="2011680" cy="438912"/>
+            <a:off x="566928" y="4315968"/>
+            <a:ext cx="1737360" cy="457199"/>
           </a:xfrm>
           <a:prstGeom prst="rect">
             <a:avLst/>
@@ -6684,7 +6684,7 @@
               </a:spcAft>
             </a:pPr>
             <a:r>
-              <a:rPr sz="1250" b="1">
+              <a:rPr sz="1200" b="1">
                 <a:solidFill>
                   <a:srgbClr val="002FA7"/>
                 </a:solidFill>
@@ -6705,8 +6705,8 @@
         </p:nvSpPr>
         <p:spPr>
           <a:xfrm>
-            <a:off x="2670048" y="4078224"/>
-            <a:ext cx="3200399" cy="438912"/>
+            <a:off x="2395728" y="4315968"/>
+            <a:ext cx="2926080" cy="457199"/>
           </a:xfrm>
           <a:prstGeom prst="rect">
             <a:avLst/>
@@ -6725,7 +6725,7 @@
               </a:spcAft>
             </a:pPr>
             <a:r>
-              <a:rPr sz="1250" b="0">
+              <a:rPr sz="1200" b="0">
                 <a:solidFill>
                   <a:srgbClr val="1A1A1A"/>
                 </a:solidFill>
@@ -6746,8 +6746,8 @@
         </p:nvSpPr>
         <p:spPr>
           <a:xfrm>
-            <a:off x="566928" y="4480560"/>
-            <a:ext cx="5303520" cy="6350"/>
+            <a:off x="566928" y="4736592"/>
+            <a:ext cx="4754880" cy="6350"/>
           </a:xfrm>
           <a:prstGeom prst="rect">
             <a:avLst/>
@@ -6790,8 +6790,8 @@
         </p:nvSpPr>
         <p:spPr>
           <a:xfrm>
-            <a:off x="566928" y="4590288"/>
-            <a:ext cx="2011680" cy="438912"/>
+            <a:off x="566928" y="4846320"/>
+            <a:ext cx="1737360" cy="457199"/>
           </a:xfrm>
           <a:prstGeom prst="rect">
             <a:avLst/>
@@ -6810,7 +6810,7 @@
               </a:spcAft>
             </a:pPr>
             <a:r>
-              <a:rPr sz="1250" b="1">
+              <a:rPr sz="1200" b="1">
                 <a:solidFill>
                   <a:srgbClr val="002FA7"/>
                 </a:solidFill>
@@ -6831,8 +6831,8 @@
         </p:nvSpPr>
         <p:spPr>
           <a:xfrm>
-            <a:off x="2670048" y="4590288"/>
-            <a:ext cx="3200399" cy="438912"/>
+            <a:off x="2395728" y="4846320"/>
+            <a:ext cx="2926080" cy="457199"/>
           </a:xfrm>
           <a:prstGeom prst="rect">
             <a:avLst/>
@@ -6851,7 +6851,7 @@
               </a:spcAft>
             </a:pPr>
             <a:r>
-              <a:rPr sz="1250" b="0">
+              <a:rPr sz="1200" b="0">
                 <a:solidFill>
                   <a:srgbClr val="1A1A1A"/>
                 </a:solidFill>
@@ -6872,8 +6872,8 @@
         </p:nvSpPr>
         <p:spPr>
           <a:xfrm>
-            <a:off x="566928" y="4992624"/>
-            <a:ext cx="5303520" cy="6350"/>
+            <a:off x="566928" y="5266944"/>
+            <a:ext cx="4754880" cy="6350"/>
           </a:xfrm>
           <a:prstGeom prst="rect">
             <a:avLst/>
@@ -6916,8 +6916,8 @@
         </p:nvSpPr>
         <p:spPr>
           <a:xfrm>
-            <a:off x="6272784" y="1591056"/>
-            <a:ext cx="5349240" cy="256032"/>
+            <a:off x="566928" y="5614416"/>
+            <a:ext cx="4754880" cy="548640"/>
           </a:xfrm>
           <a:prstGeom prst="rect">
             <a:avLst/>
@@ -6936,66 +6936,7 @@
               </a:spcAft>
             </a:pPr>
             <a:r>
-              <a:rPr sz="1350" b="1">
-                <a:solidFill>
-                  <a:srgbClr val="002FA7"/>
-                </a:solidFill>
-                <a:latin typeface="微软雅黑"/>
-                <a:ea typeface="微软雅黑"/>
-                <a:cs typeface="微软雅黑"/>
-              </a:rPr>
-              <a:t>多路 SN 匹配信号源</a:t>
-            </a:r>
-          </a:p>
-        </p:txBody>
-      </p:sp>
-      <p:sp>
-        <p:nvSpPr>
-          <p:cNvPr id="22" name="Rectangle 21"/>
-          <p:cNvSpPr/>
-          <p:nvPr/>
-        </p:nvSpPr>
-        <p:spPr>
-          <a:xfrm>
-            <a:off x="6272784" y="1956816"/>
-            <a:ext cx="2596896" cy="621792"/>
-          </a:xfrm>
-          <a:prstGeom prst="rect">
-            <a:avLst/>
-          </a:prstGeom>
-          <a:solidFill>
-            <a:srgbClr val="EFEDEA"/>
-          </a:solidFill>
-          <a:ln>
-            <a:noFill/>
-          </a:ln>
-          <a:effectLst/>
-        </p:spPr>
-        <p:style>
-          <a:lnRef idx="1">
-            <a:schemeClr val="accent1"/>
-          </a:lnRef>
-          <a:fillRef idx="3">
-            <a:schemeClr val="accent1"/>
-          </a:fillRef>
-          <a:effectRef idx="2">
-            <a:schemeClr val="accent1"/>
-          </a:effectRef>
-          <a:fontRef idx="minor">
-            <a:schemeClr val="lt1"/>
-          </a:fontRef>
-        </p:style>
-        <p:txBody>
-          <a:bodyPr rtlCol="0" anchor="ctr" wrap="square" tIns="36576" bIns="36576"/>
-          <a:lstStyle/>
-          <a:p>
-            <a:pPr algn="l">
-              <a:spcAft>
-                <a:spcPts val="200"/>
-              </a:spcAft>
-            </a:pPr>
-            <a:r>
-              <a:rPr sz="1200" b="1">
+              <a:rPr sz="1150" b="0">
                 <a:solidFill>
                   <a:srgbClr val="1A1A1A"/>
                 </a:solidFill>
@@ -7003,270 +6944,21 @@
                 <a:ea typeface="微软雅黑"/>
                 <a:cs typeface="微软雅黑"/>
               </a:rPr>
-              <a:t>位号 1</a:t>
-            </a:r>
-          </a:p>
-          <a:p>
-            <a:pPr algn="l">
-              <a:spcAft>
-                <a:spcPts val="0"/>
-              </a:spcAft>
-            </a:pPr>
-            <a:r>
-              <a:rPr sz="1150" b="0">
-                <a:solidFill>
-                  <a:srgbClr val="002FA7"/>
-                </a:solidFill>
-                <a:latin typeface="微软雅黑"/>
-                <a:ea typeface="微软雅黑"/>
-                <a:cs typeface="微软雅黑"/>
-              </a:rPr>
-              <a:t>SIG-A · AWG-CH1</a:t>
-            </a:r>
-          </a:p>
-        </p:txBody>
-      </p:sp>
-      <p:sp>
-        <p:nvSpPr>
-          <p:cNvPr id="23" name="Rectangle 22"/>
-          <p:cNvSpPr/>
-          <p:nvPr/>
-        </p:nvSpPr>
-        <p:spPr>
-          <a:xfrm>
-            <a:off x="9034272" y="1956816"/>
-            <a:ext cx="2596896" cy="621792"/>
-          </a:xfrm>
-          <a:prstGeom prst="rect">
-            <a:avLst/>
-          </a:prstGeom>
-          <a:solidFill>
-            <a:srgbClr val="EFEDEA"/>
-          </a:solidFill>
-          <a:ln>
-            <a:noFill/>
-          </a:ln>
-          <a:effectLst/>
-        </p:spPr>
-        <p:style>
-          <a:lnRef idx="1">
-            <a:schemeClr val="accent1"/>
-          </a:lnRef>
-          <a:fillRef idx="3">
-            <a:schemeClr val="accent1"/>
-          </a:fillRef>
-          <a:effectRef idx="2">
-            <a:schemeClr val="accent1"/>
-          </a:effectRef>
-          <a:fontRef idx="minor">
-            <a:schemeClr val="lt1"/>
-          </a:fontRef>
-        </p:style>
-        <p:txBody>
-          <a:bodyPr rtlCol="0" anchor="ctr" wrap="square" tIns="36576" bIns="36576"/>
-          <a:lstStyle/>
-          <a:p>
-            <a:pPr algn="l">
-              <a:spcAft>
-                <a:spcPts val="200"/>
-              </a:spcAft>
-            </a:pPr>
-            <a:r>
-              <a:rPr sz="1200" b="1">
-                <a:solidFill>
-                  <a:srgbClr val="1A1A1A"/>
-                </a:solidFill>
-                <a:latin typeface="微软雅黑"/>
-                <a:ea typeface="微软雅黑"/>
-                <a:cs typeface="微软雅黑"/>
-              </a:rPr>
-              <a:t>位号 2</a:t>
-            </a:r>
-          </a:p>
-          <a:p>
-            <a:pPr algn="l">
-              <a:spcAft>
-                <a:spcPts val="0"/>
-              </a:spcAft>
-            </a:pPr>
-            <a:r>
-              <a:rPr sz="1150" b="0">
-                <a:solidFill>
-                  <a:srgbClr val="002FA7"/>
-                </a:solidFill>
-                <a:latin typeface="微软雅黑"/>
-                <a:ea typeface="微软雅黑"/>
-                <a:cs typeface="微软雅黑"/>
-              </a:rPr>
-              <a:t>SIG-A · AWG-CH2</a:t>
-            </a:r>
-          </a:p>
-        </p:txBody>
-      </p:sp>
-      <p:sp>
-        <p:nvSpPr>
-          <p:cNvPr id="24" name="Rectangle 23"/>
-          <p:cNvSpPr/>
-          <p:nvPr/>
-        </p:nvSpPr>
-        <p:spPr>
-          <a:xfrm>
-            <a:off x="6272784" y="2670048"/>
-            <a:ext cx="2596896" cy="621792"/>
-          </a:xfrm>
-          <a:prstGeom prst="rect">
-            <a:avLst/>
-          </a:prstGeom>
-          <a:solidFill>
-            <a:srgbClr val="EFEDEA"/>
-          </a:solidFill>
-          <a:ln>
-            <a:noFill/>
-          </a:ln>
-          <a:effectLst/>
-        </p:spPr>
-        <p:style>
-          <a:lnRef idx="1">
-            <a:schemeClr val="accent1"/>
-          </a:lnRef>
-          <a:fillRef idx="3">
-            <a:schemeClr val="accent1"/>
-          </a:fillRef>
-          <a:effectRef idx="2">
-            <a:schemeClr val="accent1"/>
-          </a:effectRef>
-          <a:fontRef idx="minor">
-            <a:schemeClr val="lt1"/>
-          </a:fontRef>
-        </p:style>
-        <p:txBody>
-          <a:bodyPr rtlCol="0" anchor="ctr" wrap="square" tIns="36576" bIns="36576"/>
-          <a:lstStyle/>
-          <a:p>
-            <a:pPr algn="l">
-              <a:spcAft>
-                <a:spcPts val="200"/>
-              </a:spcAft>
-            </a:pPr>
-            <a:r>
-              <a:rPr sz="1200" b="1">
-                <a:solidFill>
-                  <a:srgbClr val="1A1A1A"/>
-                </a:solidFill>
-                <a:latin typeface="微软雅黑"/>
-                <a:ea typeface="微软雅黑"/>
-                <a:cs typeface="微软雅黑"/>
-              </a:rPr>
-              <a:t>位号 3</a:t>
-            </a:r>
-          </a:p>
-          <a:p>
-            <a:pPr algn="l">
-              <a:spcAft>
-                <a:spcPts val="0"/>
-              </a:spcAft>
-            </a:pPr>
-            <a:r>
-              <a:rPr sz="1150" b="0">
-                <a:solidFill>
-                  <a:srgbClr val="002FA7"/>
-                </a:solidFill>
-                <a:latin typeface="微软雅黑"/>
-                <a:ea typeface="微软雅黑"/>
-                <a:cs typeface="微软雅黑"/>
-              </a:rPr>
-              <a:t>SIG-B · AWG-CH1</a:t>
-            </a:r>
-          </a:p>
-        </p:txBody>
-      </p:sp>
-      <p:sp>
-        <p:nvSpPr>
-          <p:cNvPr id="25" name="Rectangle 24"/>
-          <p:cNvSpPr/>
-          <p:nvPr/>
-        </p:nvSpPr>
-        <p:spPr>
-          <a:xfrm>
-            <a:off x="9034272" y="2670048"/>
-            <a:ext cx="2596896" cy="621792"/>
-          </a:xfrm>
-          <a:prstGeom prst="rect">
-            <a:avLst/>
-          </a:prstGeom>
-          <a:solidFill>
-            <a:srgbClr val="EFEDEA"/>
-          </a:solidFill>
-          <a:ln>
-            <a:noFill/>
-          </a:ln>
-          <a:effectLst/>
-        </p:spPr>
-        <p:style>
-          <a:lnRef idx="1">
-            <a:schemeClr val="accent1"/>
-          </a:lnRef>
-          <a:fillRef idx="3">
-            <a:schemeClr val="accent1"/>
-          </a:fillRef>
-          <a:effectRef idx="2">
-            <a:schemeClr val="accent1"/>
-          </a:effectRef>
-          <a:fontRef idx="minor">
-            <a:schemeClr val="lt1"/>
-          </a:fontRef>
-        </p:style>
-        <p:txBody>
-          <a:bodyPr rtlCol="0" anchor="ctr" wrap="square" tIns="36576" bIns="36576"/>
-          <a:lstStyle/>
-          <a:p>
-            <a:pPr algn="l">
-              <a:spcAft>
-                <a:spcPts val="200"/>
-              </a:spcAft>
-            </a:pPr>
-            <a:r>
-              <a:rPr sz="1200" b="1">
-                <a:solidFill>
-                  <a:srgbClr val="1A1A1A"/>
-                </a:solidFill>
-                <a:latin typeface="微软雅黑"/>
-                <a:ea typeface="微软雅黑"/>
-                <a:cs typeface="微软雅黑"/>
-              </a:rPr>
-              <a:t>位号 4</a:t>
-            </a:r>
-          </a:p>
-          <a:p>
-            <a:pPr algn="l">
-              <a:spcAft>
-                <a:spcPts val="0"/>
-              </a:spcAft>
-            </a:pPr>
-            <a:r>
-              <a:rPr sz="1150" b="0">
-                <a:solidFill>
-                  <a:srgbClr val="002FA7"/>
-                </a:solidFill>
-                <a:latin typeface="微软雅黑"/>
-                <a:ea typeface="微软雅黑"/>
-                <a:cs typeface="微软雅黑"/>
-              </a:rPr>
-              <a:t>SIG-B · AWG-CH2</a:t>
-            </a:r>
-          </a:p>
-        </p:txBody>
-      </p:sp>
-      <p:sp>
-        <p:nvSpPr>
-          <p:cNvPr id="26" name="TextBox 25"/>
+              <a:t>白名单规模小时内联在清单里便于评审；件号成百上千时放 resource/，清单只留引用。</a:t>
+            </a:r>
+          </a:p>
+        </p:txBody>
+      </p:sp>
+      <p:sp>
+        <p:nvSpPr>
+          <p:cNvPr id="22" name="TextBox 21"/>
           <p:cNvSpPr txBox="1"/>
           <p:nvPr/>
         </p:nvSpPr>
         <p:spPr>
           <a:xfrm>
-            <a:off x="6272784" y="3566160"/>
-            <a:ext cx="1463040" cy="438912"/>
+            <a:off x="5870448" y="1591056"/>
+            <a:ext cx="5751576" cy="256032"/>
           </a:xfrm>
           <a:prstGeom prst="rect">
             <a:avLst/>
@@ -7285,7 +6977,7 @@
               </a:spcAft>
             </a:pPr>
             <a:r>
-              <a:rPr sz="1250" b="1">
+              <a:rPr sz="1350" b="1">
                 <a:solidFill>
                   <a:srgbClr val="002FA7"/>
                 </a:solidFill>
@@ -7293,21 +6985,45 @@
                 <a:ea typeface="微软雅黑"/>
                 <a:cs typeface="微软雅黑"/>
               </a:rPr>
-              <a:t>count</a:t>
-            </a:r>
-          </a:p>
-        </p:txBody>
-      </p:sp>
-      <p:sp>
-        <p:nvSpPr>
-          <p:cNvPr id="27" name="TextBox 26"/>
+              <a:t>多路 SN 与信号源匹配</a:t>
+            </a:r>
+          </a:p>
+        </p:txBody>
+      </p:sp>
+      <p:pic>
+        <p:nvPicPr>
+          <p:cNvPr id="23" name="Picture 22" descr="tps-slot-source-match.png"/>
+          <p:cNvPicPr>
+            <a:picLocks noChangeAspect="1"/>
+          </p:cNvPicPr>
+          <p:nvPr/>
+        </p:nvPicPr>
+        <p:blipFill>
+          <a:blip r:embed="rId2"/>
+          <a:stretch>
+            <a:fillRect/>
+          </a:stretch>
+        </p:blipFill>
+        <p:spPr>
+          <a:xfrm>
+            <a:off x="5870448" y="1901952"/>
+            <a:ext cx="5751576" cy="3450946"/>
+          </a:xfrm>
+          <a:prstGeom prst="rect">
+            <a:avLst/>
+          </a:prstGeom>
+        </p:spPr>
+      </p:pic>
+      <p:sp>
+        <p:nvSpPr>
+          <p:cNvPr id="24" name="TextBox 23"/>
           <p:cNvSpPr txBox="1"/>
           <p:nvPr/>
         </p:nvSpPr>
         <p:spPr>
           <a:xfrm>
-            <a:off x="7827264" y="3566160"/>
-            <a:ext cx="3794760" cy="438912"/>
+            <a:off x="5870448" y="5669280"/>
+            <a:ext cx="1554480" cy="237744"/>
           </a:xfrm>
           <a:prstGeom prst="rect">
             <a:avLst/>
@@ -7326,7 +7042,48 @@
               </a:spcAft>
             </a:pPr>
             <a:r>
-              <a:rPr sz="1250" b="0">
+              <a:rPr sz="1200" b="1">
+                <a:solidFill>
+                  <a:srgbClr val="002FA7"/>
+                </a:solidFill>
+                <a:latin typeface="微软雅黑"/>
+                <a:ea typeface="微软雅黑"/>
+                <a:cs typeface="微软雅黑"/>
+              </a:rPr>
+              <a:t>count</a:t>
+            </a:r>
+          </a:p>
+        </p:txBody>
+      </p:sp>
+      <p:sp>
+        <p:nvSpPr>
+          <p:cNvPr id="25" name="TextBox 24"/>
+          <p:cNvSpPr txBox="1"/>
+          <p:nvPr/>
+        </p:nvSpPr>
+        <p:spPr>
+          <a:xfrm>
+            <a:off x="7516367" y="5669280"/>
+            <a:ext cx="4105656" cy="237744"/>
+          </a:xfrm>
+          <a:prstGeom prst="rect">
+            <a:avLst/>
+          </a:prstGeom>
+          <a:noFill/>
+        </p:spPr>
+        <p:txBody>
+          <a:bodyPr wrap="square" lIns="0" rIns="0" tIns="0" bIns="0" anchor="t">
+            <a:spAutoFit/>
+          </a:bodyPr>
+          <a:lstStyle/>
+          <a:p>
+            <a:pPr algn="l">
+              <a:spcAft>
+                <a:spcPts val="0"/>
+              </a:spcAft>
+            </a:pPr>
+            <a:r>
+              <a:rPr sz="1200" b="0">
                 <a:solidFill>
                   <a:srgbClr val="1A1A1A"/>
                 </a:solidFill>
@@ -7341,14 +7098,14 @@
       </p:sp>
       <p:sp>
         <p:nvSpPr>
-          <p:cNvPr id="28" name="Rectangle 27"/>
+          <p:cNvPr id="26" name="Rectangle 25"/>
           <p:cNvSpPr/>
           <p:nvPr/>
         </p:nvSpPr>
         <p:spPr>
           <a:xfrm>
-            <a:off x="6272784" y="3968496"/>
-            <a:ext cx="5349240" cy="6350"/>
+            <a:off x="5870448" y="5870448"/>
+            <a:ext cx="5751576" cy="6350"/>
           </a:xfrm>
           <a:prstGeom prst="rect">
             <a:avLst/>
@@ -7385,14 +7142,14 @@
       </p:sp>
       <p:sp>
         <p:nvSpPr>
-          <p:cNvPr id="29" name="TextBox 28"/>
+          <p:cNvPr id="27" name="TextBox 26"/>
           <p:cNvSpPr txBox="1"/>
           <p:nvPr/>
         </p:nvSpPr>
         <p:spPr>
           <a:xfrm>
-            <a:off x="6272784" y="4078224"/>
-            <a:ext cx="1463040" cy="438912"/>
+            <a:off x="5870448" y="5980176"/>
+            <a:ext cx="1554480" cy="237744"/>
           </a:xfrm>
           <a:prstGeom prst="rect">
             <a:avLst/>
@@ -7411,7 +7168,7 @@
               </a:spcAft>
             </a:pPr>
             <a:r>
-              <a:rPr sz="1250" b="1">
+              <a:rPr sz="1200" b="1">
                 <a:solidFill>
                   <a:srgbClr val="002FA7"/>
                 </a:solidFill>
@@ -7426,14 +7183,14 @@
       </p:sp>
       <p:sp>
         <p:nvSpPr>
-          <p:cNvPr id="30" name="TextBox 29"/>
+          <p:cNvPr id="28" name="TextBox 27"/>
           <p:cNvSpPr txBox="1"/>
           <p:nvPr/>
         </p:nvSpPr>
         <p:spPr>
           <a:xfrm>
-            <a:off x="7827264" y="4078224"/>
-            <a:ext cx="3794760" cy="438912"/>
+            <a:off x="7516367" y="5980176"/>
+            <a:ext cx="4105656" cy="237744"/>
           </a:xfrm>
           <a:prstGeom prst="rect">
             <a:avLst/>
@@ -7452,7 +7209,7 @@
               </a:spcAft>
             </a:pPr>
             <a:r>
-              <a:rPr sz="1250" b="0">
+              <a:rPr sz="1200" b="0">
                 <a:solidFill>
                   <a:srgbClr val="1A1A1A"/>
                 </a:solidFill>
@@ -7460,21 +7217,21 @@
                 <a:ea typeface="微软雅黑"/>
                 <a:cs typeface="微软雅黑"/>
               </a:rPr>
-              <a:t>该位号 SN 采集数据所属信号源，判定与记录据此归属</a:t>
-            </a:r>
-          </a:p>
-        </p:txBody>
-      </p:sp>
-      <p:sp>
-        <p:nvSpPr>
-          <p:cNvPr id="31" name="Rectangle 30"/>
+              <a:t>该位号数据所属信号源</a:t>
+            </a:r>
+          </a:p>
+        </p:txBody>
+      </p:sp>
+      <p:sp>
+        <p:nvSpPr>
+          <p:cNvPr id="29" name="Rectangle 28"/>
           <p:cNvSpPr/>
           <p:nvPr/>
         </p:nvSpPr>
         <p:spPr>
           <a:xfrm>
-            <a:off x="6272784" y="4480560"/>
-            <a:ext cx="5349240" cy="6350"/>
+            <a:off x="5870448" y="6181344"/>
+            <a:ext cx="5751576" cy="6350"/>
           </a:xfrm>
           <a:prstGeom prst="rect">
             <a:avLst/>
@@ -7511,14 +7268,14 @@
       </p:sp>
       <p:sp>
         <p:nvSpPr>
-          <p:cNvPr id="32" name="TextBox 31"/>
+          <p:cNvPr id="30" name="TextBox 29"/>
           <p:cNvSpPr txBox="1"/>
           <p:nvPr/>
         </p:nvSpPr>
         <p:spPr>
           <a:xfrm>
-            <a:off x="6272784" y="4590288"/>
-            <a:ext cx="1463040" cy="438912"/>
+            <a:off x="5870448" y="6291072"/>
+            <a:ext cx="1554480" cy="237744"/>
           </a:xfrm>
           <a:prstGeom prst="rect">
             <a:avLst/>
@@ -7537,7 +7294,7 @@
               </a:spcAft>
             </a:pPr>
             <a:r>
-              <a:rPr sz="1250" b="1">
+              <a:rPr sz="1200" b="1">
                 <a:solidFill>
                   <a:srgbClr val="002FA7"/>
                 </a:solidFill>
@@ -7552,14 +7309,14 @@
       </p:sp>
       <p:sp>
         <p:nvSpPr>
-          <p:cNvPr id="33" name="TextBox 32"/>
+          <p:cNvPr id="31" name="TextBox 30"/>
           <p:cNvSpPr txBox="1"/>
           <p:nvPr/>
         </p:nvSpPr>
         <p:spPr>
           <a:xfrm>
-            <a:off x="7827264" y="4590288"/>
-            <a:ext cx="3794760" cy="438912"/>
+            <a:off x="7516367" y="6291072"/>
+            <a:ext cx="4105656" cy="237744"/>
           </a:xfrm>
           <a:prstGeom prst="rect">
             <a:avLst/>
@@ -7578,7 +7335,7 @@
               </a:spcAft>
             </a:pPr>
             <a:r>
-              <a:rPr sz="1250" b="0">
+              <a:rPr sz="1200" b="0">
                 <a:solidFill>
                   <a:srgbClr val="1A1A1A"/>
                 </a:solidFill>
@@ -7586,21 +7343,21 @@
                 <a:ea typeface="微软雅黑"/>
                 <a:cs typeface="微软雅黑"/>
               </a:rPr>
-              <a:t>信号源上的物理输出通道，位号之间不共用同一输出口</a:t>
-            </a:r>
-          </a:p>
-        </p:txBody>
-      </p:sp>
-      <p:sp>
-        <p:nvSpPr>
-          <p:cNvPr id="34" name="Rectangle 33"/>
+              <a:t>信号源上的物理输出口，位号之间不共用</a:t>
+            </a:r>
+          </a:p>
+        </p:txBody>
+      </p:sp>
+      <p:sp>
+        <p:nvSpPr>
+          <p:cNvPr id="32" name="Rectangle 31"/>
           <p:cNvSpPr/>
           <p:nvPr/>
         </p:nvSpPr>
         <p:spPr>
           <a:xfrm>
-            <a:off x="6272784" y="4992624"/>
-            <a:ext cx="5349240" cy="6350"/>
+            <a:off x="5870448" y="6492240"/>
+            <a:ext cx="5751576" cy="6350"/>
           </a:xfrm>
           <a:prstGeom prst="rect">
             <a:avLst/>
@@ -7632,47 +7389,6 @@
           <a:lstStyle/>
           <a:p>
             <a:pPr algn="ctr"/>
-          </a:p>
-        </p:txBody>
-      </p:sp>
-      <p:sp>
-        <p:nvSpPr>
-          <p:cNvPr id="35" name="TextBox 34"/>
-          <p:cNvSpPr txBox="1"/>
-          <p:nvPr/>
-        </p:nvSpPr>
-        <p:spPr>
-          <a:xfrm>
-            <a:off x="566928" y="5779008"/>
-            <a:ext cx="11055096" cy="365760"/>
-          </a:xfrm>
-          <a:prstGeom prst="rect">
-            <a:avLst/>
-          </a:prstGeom>
-          <a:noFill/>
-        </p:spPr>
-        <p:txBody>
-          <a:bodyPr wrap="square" lIns="0" rIns="0" tIns="0" bIns="0" anchor="t">
-            <a:spAutoFit/>
-          </a:bodyPr>
-          <a:lstStyle/>
-          <a:p>
-            <a:pPr algn="l">
-              <a:spcAft>
-                <a:spcPts val="0"/>
-              </a:spcAft>
-            </a:pPr>
-            <a:r>
-              <a:rPr sz="1150" b="0">
-                <a:solidFill>
-                  <a:srgbClr val="1A1A1A"/>
-                </a:solidFill>
-                <a:latin typeface="微软雅黑"/>
-                <a:ea typeface="微软雅黑"/>
-                <a:cs typeface="微软雅黑"/>
-              </a:rPr>
-              <a:t>不声明这层对应关系会出现数据串位：A 位号采到 B 位号信号源的波形；同一信号源被多用是刻意设计（signal_source 相同、source_channel 不同）。</a:t>
-            </a:r>
           </a:p>
         </p:txBody>
       </p:sp>
@@ -9510,7 +9226,7 @@
                 <a:ea typeface="微软雅黑"/>
                 <a:cs typeface="微软雅黑"/>
               </a:rPr>
-              <a:t>cmd_suit · 用例清单与编排</a:t>
+              <a:t>cmd_suit · 用例清单与执行顺序</a:t>
             </a:r>
           </a:p>
         </p:txBody>
@@ -9569,7 +9285,7 @@
                 <a:ea typeface="微软雅黑"/>
                 <a:cs typeface="微软雅黑"/>
               </a:rPr>
-              <a:t>跑哪些用例、什么顺序、失败怎么办；三层：环境初始化 / 测试套 / 环境终止</a:t>
+              <a:t>跑哪些用例、按什么顺序跑；顺序就是书写顺序，人工确认是唯一的控制点</a:t>
             </a:r>
           </a:p>
         </p:txBody>
@@ -9775,7 +9491,7 @@
                 <a:ea typeface="微软雅黑"/>
                 <a:cs typeface="微软雅黑"/>
               </a:rPr>
-              <a:t>cmd_suit  ·  测试套：数组顺序即执行顺序</a:t>
+              <a:t>cmd_suit  ·  测试套：全部测试用例</a:t>
             </a:r>
           </a:p>
         </p:txBody>
@@ -9919,7 +9635,7 @@
                 <a:ea typeface="微软雅黑"/>
                 <a:cs typeface="微软雅黑"/>
               </a:rPr>
-              <a:t>串行（默认）：条目按数组顺序依次执行</a:t>
+              <a:t>执行顺序 = 清单书写顺序</a:t>
             </a:r>
           </a:p>
         </p:txBody>
@@ -10197,8 +9913,8 @@
         </p:nvSpPr>
         <p:spPr>
           <a:xfrm>
-            <a:off x="6272784" y="2359152"/>
-            <a:ext cx="5349240" cy="256032"/>
+            <a:off x="5541264" y="2798064"/>
+            <a:ext cx="310896" cy="256032"/>
           </a:xfrm>
           <a:prstGeom prst="rect">
             <a:avLst/>
@@ -10217,7 +9933,7 @@
               </a:spcAft>
             </a:pPr>
             <a:r>
-              <a:rPr sz="1250" b="1">
+              <a:rPr sz="1200" b="0">
                 <a:solidFill>
                   <a:srgbClr val="1A1A1A"/>
                 </a:solidFill>
@@ -10225,80 +9941,21 @@
                 <a:ea typeface="微软雅黑"/>
                 <a:cs typeface="微软雅黑"/>
               </a:rPr>
-              <a:t>并行 per_sn：该条目在每个位号上各执行一次</a:t>
-            </a:r>
-          </a:p>
-        </p:txBody>
-      </p:sp>
-      <p:sp>
-        <p:nvSpPr>
-          <p:cNvPr id="17" name="Rectangle 16"/>
-          <p:cNvSpPr/>
-          <p:nvPr/>
-        </p:nvSpPr>
-        <p:spPr>
-          <a:xfrm>
-            <a:off x="6272784" y="2706624"/>
-            <a:ext cx="1417320" cy="914400"/>
-          </a:xfrm>
-          <a:prstGeom prst="rect">
-            <a:avLst/>
-          </a:prstGeom>
-          <a:noFill/>
-          <a:ln w="9525">
-            <a:solidFill>
-              <a:srgbClr val="D9D5CF"/>
-            </a:solidFill>
-          </a:ln>
-          <a:effectLst/>
-        </p:spPr>
-        <p:style>
-          <a:lnRef idx="1">
-            <a:schemeClr val="accent1"/>
-          </a:lnRef>
-          <a:fillRef idx="3">
-            <a:schemeClr val="accent1"/>
-          </a:fillRef>
-          <a:effectRef idx="2">
-            <a:schemeClr val="accent1"/>
-          </a:effectRef>
-          <a:fontRef idx="minor">
-            <a:schemeClr val="lt1"/>
-          </a:fontRef>
-        </p:style>
-        <p:txBody>
-          <a:bodyPr rtlCol="0" anchor="ctr" wrap="square" tIns="36576" bIns="36576"/>
-          <a:lstStyle/>
-          <a:p>
-            <a:pPr algn="ctr">
-              <a:spcAft>
-                <a:spcPts val="0"/>
-              </a:spcAft>
-            </a:pPr>
-            <a:r>
-              <a:rPr sz="1150" b="0">
-                <a:solidFill>
-                  <a:srgbClr val="1A1A1A"/>
-                </a:solidFill>
-                <a:latin typeface="微软雅黑"/>
-                <a:ea typeface="微软雅黑"/>
-                <a:cs typeface="微软雅黑"/>
-              </a:rPr>
-              <a:t>用例条目</a:t>
-            </a:r>
-          </a:p>
-        </p:txBody>
-      </p:sp>
-      <p:sp>
-        <p:nvSpPr>
-          <p:cNvPr id="18" name="TextBox 17"/>
+              <a:t>…</a:t>
+            </a:r>
+          </a:p>
+        </p:txBody>
+      </p:sp>
+      <p:sp>
+        <p:nvSpPr>
+          <p:cNvPr id="17" name="TextBox 16"/>
           <p:cNvSpPr txBox="1"/>
           <p:nvPr/>
         </p:nvSpPr>
         <p:spPr>
           <a:xfrm>
-            <a:off x="7772400" y="2706624"/>
-            <a:ext cx="329184" cy="201168"/>
+            <a:off x="566928" y="3236976"/>
+            <a:ext cx="5303520" cy="475488"/>
           </a:xfrm>
           <a:prstGeom prst="rect">
             <a:avLst/>
@@ -10317,66 +9974,7 @@
               </a:spcAft>
             </a:pPr>
             <a:r>
-              <a:rPr sz="1100" b="0">
-                <a:solidFill>
-                  <a:srgbClr val="002FA7"/>
-                </a:solidFill>
-                <a:latin typeface="微软雅黑"/>
-                <a:ea typeface="微软雅黑"/>
-                <a:cs typeface="微软雅黑"/>
-              </a:rPr>
-              <a:t>→</a:t>
-            </a:r>
-          </a:p>
-        </p:txBody>
-      </p:sp>
-      <p:sp>
-        <p:nvSpPr>
-          <p:cNvPr id="19" name="Rectangle 18"/>
-          <p:cNvSpPr/>
-          <p:nvPr/>
-        </p:nvSpPr>
-        <p:spPr>
-          <a:xfrm>
-            <a:off x="8138160" y="2706624"/>
-            <a:ext cx="1691640" cy="201168"/>
-          </a:xfrm>
-          <a:prstGeom prst="rect">
-            <a:avLst/>
-          </a:prstGeom>
-          <a:noFill/>
-          <a:ln w="9525">
-            <a:solidFill>
-              <a:srgbClr val="D9D5CF"/>
-            </a:solidFill>
-          </a:ln>
-          <a:effectLst/>
-        </p:spPr>
-        <p:style>
-          <a:lnRef idx="1">
-            <a:schemeClr val="accent1"/>
-          </a:lnRef>
-          <a:fillRef idx="3">
-            <a:schemeClr val="accent1"/>
-          </a:fillRef>
-          <a:effectRef idx="2">
-            <a:schemeClr val="accent1"/>
-          </a:effectRef>
-          <a:fontRef idx="minor">
-            <a:schemeClr val="lt1"/>
-          </a:fontRef>
-        </p:style>
-        <p:txBody>
-          <a:bodyPr rtlCol="0" anchor="ctr" wrap="square" tIns="36576" bIns="36576"/>
-          <a:lstStyle/>
-          <a:p>
-            <a:pPr algn="ctr">
-              <a:spcAft>
-                <a:spcPts val="0"/>
-              </a:spcAft>
-            </a:pPr>
-            <a:r>
-              <a:rPr sz="1000" b="0">
+              <a:rPr sz="1150" b="0">
                 <a:solidFill>
                   <a:srgbClr val="1A1A1A"/>
                 </a:solidFill>
@@ -10384,78 +9982,21 @@
                 <a:ea typeface="微软雅黑"/>
                 <a:cs typeface="微软雅黑"/>
               </a:rPr>
-              <a:t>位号 1 各跑一遍</a:t>
-            </a:r>
-          </a:p>
-        </p:txBody>
-      </p:sp>
-      <p:sp>
-        <p:nvSpPr>
-          <p:cNvPr id="20" name="Rectangle 19"/>
-          <p:cNvSpPr/>
-          <p:nvPr/>
-        </p:nvSpPr>
-        <p:spPr>
-          <a:xfrm>
-            <a:off x="9966960" y="2706624"/>
-            <a:ext cx="1655064" cy="201168"/>
-          </a:xfrm>
-          <a:prstGeom prst="rect">
-            <a:avLst/>
-          </a:prstGeom>
-          <a:noFill/>
-          <a:ln>
-            <a:noFill/>
-          </a:ln>
-          <a:effectLst/>
-        </p:spPr>
-        <p:style>
-          <a:lnRef idx="1">
-            <a:schemeClr val="accent1"/>
-          </a:lnRef>
-          <a:fillRef idx="3">
-            <a:schemeClr val="accent1"/>
-          </a:fillRef>
-          <a:effectRef idx="2">
-            <a:schemeClr val="accent1"/>
-          </a:effectRef>
-          <a:fontRef idx="minor">
-            <a:schemeClr val="lt1"/>
-          </a:fontRef>
-        </p:style>
-        <p:txBody>
-          <a:bodyPr rtlCol="0" anchor="ctr" wrap="square" tIns="36576" bIns="36576"/>
-          <a:lstStyle/>
-          <a:p>
-            <a:pPr algn="ctr">
-              <a:spcAft>
-                <a:spcPts val="0"/>
-              </a:spcAft>
-            </a:pPr>
-            <a:r>
-              <a:rPr sz="1000" b="0">
-                <a:solidFill>
-                  <a:srgbClr val="1A1A1A"/>
-                </a:solidFill>
-                <a:latin typeface="微软雅黑"/>
-                <a:ea typeface="微软雅黑"/>
-                <a:cs typeface="微软雅黑"/>
-              </a:rPr>
-              <a:t>数据归属位号 1</a:t>
-            </a:r>
-          </a:p>
-        </p:txBody>
-      </p:sp>
-      <p:sp>
-        <p:nvSpPr>
-          <p:cNvPr id="21" name="TextBox 20"/>
+              <a:t>不引入排序、优先级、依赖、条件分支与失败策略：上一条跑完就跑下一条，失败记录后继续，收尾段必定执行。</a:t>
+            </a:r>
+          </a:p>
+        </p:txBody>
+      </p:sp>
+      <p:sp>
+        <p:nvSpPr>
+          <p:cNvPr id="18" name="TextBox 17"/>
           <p:cNvSpPr txBox="1"/>
           <p:nvPr/>
         </p:nvSpPr>
         <p:spPr>
           <a:xfrm>
-            <a:off x="7772400" y="2944368"/>
-            <a:ext cx="329184" cy="201168"/>
+            <a:off x="566928" y="3785615"/>
+            <a:ext cx="1463040" cy="384048"/>
           </a:xfrm>
           <a:prstGeom prst="rect">
             <a:avLst/>
@@ -10474,7 +10015,7 @@
               </a:spcAft>
             </a:pPr>
             <a:r>
-              <a:rPr sz="1100" b="0">
+              <a:rPr sz="1200" b="1">
                 <a:solidFill>
                   <a:srgbClr val="002FA7"/>
                 </a:solidFill>
@@ -10482,137 +10023,21 @@
                 <a:ea typeface="微软雅黑"/>
                 <a:cs typeface="微软雅黑"/>
               </a:rPr>
-              <a:t>→</a:t>
-            </a:r>
-          </a:p>
-        </p:txBody>
-      </p:sp>
-      <p:sp>
-        <p:nvSpPr>
-          <p:cNvPr id="22" name="Rectangle 21"/>
-          <p:cNvSpPr/>
-          <p:nvPr/>
-        </p:nvSpPr>
-        <p:spPr>
-          <a:xfrm>
-            <a:off x="8138160" y="2944368"/>
-            <a:ext cx="1691640" cy="201168"/>
-          </a:xfrm>
-          <a:prstGeom prst="rect">
-            <a:avLst/>
-          </a:prstGeom>
-          <a:noFill/>
-          <a:ln w="9525">
-            <a:solidFill>
-              <a:srgbClr val="D9D5CF"/>
-            </a:solidFill>
-          </a:ln>
-          <a:effectLst/>
-        </p:spPr>
-        <p:style>
-          <a:lnRef idx="1">
-            <a:schemeClr val="accent1"/>
-          </a:lnRef>
-          <a:fillRef idx="3">
-            <a:schemeClr val="accent1"/>
-          </a:fillRef>
-          <a:effectRef idx="2">
-            <a:schemeClr val="accent1"/>
-          </a:effectRef>
-          <a:fontRef idx="minor">
-            <a:schemeClr val="lt1"/>
-          </a:fontRef>
-        </p:style>
-        <p:txBody>
-          <a:bodyPr rtlCol="0" anchor="ctr" wrap="square" tIns="36576" bIns="36576"/>
-          <a:lstStyle/>
-          <a:p>
-            <a:pPr algn="ctr">
-              <a:spcAft>
-                <a:spcPts val="0"/>
-              </a:spcAft>
-            </a:pPr>
-            <a:r>
-              <a:rPr sz="1000" b="0">
-                <a:solidFill>
-                  <a:srgbClr val="1A1A1A"/>
-                </a:solidFill>
-                <a:latin typeface="微软雅黑"/>
-                <a:ea typeface="微软雅黑"/>
-                <a:cs typeface="微软雅黑"/>
-              </a:rPr>
-              <a:t>位号 2 各跑一遍</a:t>
-            </a:r>
-          </a:p>
-        </p:txBody>
-      </p:sp>
-      <p:sp>
-        <p:nvSpPr>
-          <p:cNvPr id="23" name="Rectangle 22"/>
-          <p:cNvSpPr/>
-          <p:nvPr/>
-        </p:nvSpPr>
-        <p:spPr>
-          <a:xfrm>
-            <a:off x="9966960" y="2944368"/>
-            <a:ext cx="1655064" cy="201168"/>
-          </a:xfrm>
-          <a:prstGeom prst="rect">
-            <a:avLst/>
-          </a:prstGeom>
-          <a:noFill/>
-          <a:ln>
-            <a:noFill/>
-          </a:ln>
-          <a:effectLst/>
-        </p:spPr>
-        <p:style>
-          <a:lnRef idx="1">
-            <a:schemeClr val="accent1"/>
-          </a:lnRef>
-          <a:fillRef idx="3">
-            <a:schemeClr val="accent1"/>
-          </a:fillRef>
-          <a:effectRef idx="2">
-            <a:schemeClr val="accent1"/>
-          </a:effectRef>
-          <a:fontRef idx="minor">
-            <a:schemeClr val="lt1"/>
-          </a:fontRef>
-        </p:style>
-        <p:txBody>
-          <a:bodyPr rtlCol="0" anchor="ctr" wrap="square" tIns="36576" bIns="36576"/>
-          <a:lstStyle/>
-          <a:p>
-            <a:pPr algn="ctr">
-              <a:spcAft>
-                <a:spcPts val="0"/>
-              </a:spcAft>
-            </a:pPr>
-            <a:r>
-              <a:rPr sz="1000" b="0">
-                <a:solidFill>
-                  <a:srgbClr val="1A1A1A"/>
-                </a:solidFill>
-                <a:latin typeface="微软雅黑"/>
-                <a:ea typeface="微软雅黑"/>
-                <a:cs typeface="微软雅黑"/>
-              </a:rPr>
-              <a:t>数据归属位号 2</a:t>
-            </a:r>
-          </a:p>
-        </p:txBody>
-      </p:sp>
-      <p:sp>
-        <p:nvSpPr>
-          <p:cNvPr id="24" name="TextBox 23"/>
+              <a:t>id · case</a:t>
+            </a:r>
+          </a:p>
+        </p:txBody>
+      </p:sp>
+      <p:sp>
+        <p:nvSpPr>
+          <p:cNvPr id="19" name="TextBox 18"/>
           <p:cNvSpPr txBox="1"/>
           <p:nvPr/>
         </p:nvSpPr>
         <p:spPr>
           <a:xfrm>
-            <a:off x="7772400" y="3182112"/>
-            <a:ext cx="329184" cy="201168"/>
+            <a:off x="2121408" y="3785615"/>
+            <a:ext cx="3749039" cy="384048"/>
           </a:xfrm>
           <a:prstGeom prst="rect">
             <a:avLst/>
@@ -10631,383 +10056,28 @@
               </a:spcAft>
             </a:pPr>
             <a:r>
-              <a:rPr sz="1100" b="0">
-                <a:solidFill>
-                  <a:srgbClr val="002FA7"/>
-                </a:solidFill>
-                <a:latin typeface="微软雅黑"/>
-                <a:ea typeface="微软雅黑"/>
-                <a:cs typeface="微软雅黑"/>
-              </a:rPr>
-              <a:t>→</a:t>
-            </a:r>
-          </a:p>
-        </p:txBody>
-      </p:sp>
-      <p:sp>
-        <p:nvSpPr>
-          <p:cNvPr id="25" name="Rectangle 24"/>
+              <a:rPr sz="1200" b="0">
+                <a:solidFill>
+                  <a:srgbClr val="1A1A1A"/>
+                </a:solidFill>
+                <a:latin typeface="微软雅黑"/>
+                <a:ea typeface="微软雅黑"/>
+                <a:cs typeface="微软雅黑"/>
+              </a:rPr>
+              <a:t>条目标识 + module::function 用例引用（必需）</a:t>
+            </a:r>
+          </a:p>
+        </p:txBody>
+      </p:sp>
+      <p:sp>
+        <p:nvSpPr>
+          <p:cNvPr id="20" name="Rectangle 19"/>
           <p:cNvSpPr/>
           <p:nvPr/>
         </p:nvSpPr>
         <p:spPr>
           <a:xfrm>
-            <a:off x="8138160" y="3182112"/>
-            <a:ext cx="1691640" cy="201168"/>
-          </a:xfrm>
-          <a:prstGeom prst="rect">
-            <a:avLst/>
-          </a:prstGeom>
-          <a:noFill/>
-          <a:ln w="9525">
-            <a:solidFill>
-              <a:srgbClr val="D9D5CF"/>
-            </a:solidFill>
-          </a:ln>
-          <a:effectLst/>
-        </p:spPr>
-        <p:style>
-          <a:lnRef idx="1">
-            <a:schemeClr val="accent1"/>
-          </a:lnRef>
-          <a:fillRef idx="3">
-            <a:schemeClr val="accent1"/>
-          </a:fillRef>
-          <a:effectRef idx="2">
-            <a:schemeClr val="accent1"/>
-          </a:effectRef>
-          <a:fontRef idx="minor">
-            <a:schemeClr val="lt1"/>
-          </a:fontRef>
-        </p:style>
-        <p:txBody>
-          <a:bodyPr rtlCol="0" anchor="ctr" wrap="square" tIns="36576" bIns="36576"/>
-          <a:lstStyle/>
-          <a:p>
-            <a:pPr algn="ctr">
-              <a:spcAft>
-                <a:spcPts val="0"/>
-              </a:spcAft>
-            </a:pPr>
-            <a:r>
-              <a:rPr sz="1000" b="0">
-                <a:solidFill>
-                  <a:srgbClr val="1A1A1A"/>
-                </a:solidFill>
-                <a:latin typeface="微软雅黑"/>
-                <a:ea typeface="微软雅黑"/>
-                <a:cs typeface="微软雅黑"/>
-              </a:rPr>
-              <a:t>位号 3 各跑一遍</a:t>
-            </a:r>
-          </a:p>
-        </p:txBody>
-      </p:sp>
-      <p:sp>
-        <p:nvSpPr>
-          <p:cNvPr id="26" name="Rectangle 25"/>
-          <p:cNvSpPr/>
-          <p:nvPr/>
-        </p:nvSpPr>
-        <p:spPr>
-          <a:xfrm>
-            <a:off x="9966960" y="3182112"/>
-            <a:ext cx="1655064" cy="201168"/>
-          </a:xfrm>
-          <a:prstGeom prst="rect">
-            <a:avLst/>
-          </a:prstGeom>
-          <a:noFill/>
-          <a:ln>
-            <a:noFill/>
-          </a:ln>
-          <a:effectLst/>
-        </p:spPr>
-        <p:style>
-          <a:lnRef idx="1">
-            <a:schemeClr val="accent1"/>
-          </a:lnRef>
-          <a:fillRef idx="3">
-            <a:schemeClr val="accent1"/>
-          </a:fillRef>
-          <a:effectRef idx="2">
-            <a:schemeClr val="accent1"/>
-          </a:effectRef>
-          <a:fontRef idx="minor">
-            <a:schemeClr val="lt1"/>
-          </a:fontRef>
-        </p:style>
-        <p:txBody>
-          <a:bodyPr rtlCol="0" anchor="ctr" wrap="square" tIns="36576" bIns="36576"/>
-          <a:lstStyle/>
-          <a:p>
-            <a:pPr algn="ctr">
-              <a:spcAft>
-                <a:spcPts val="0"/>
-              </a:spcAft>
-            </a:pPr>
-            <a:r>
-              <a:rPr sz="1000" b="0">
-                <a:solidFill>
-                  <a:srgbClr val="1A1A1A"/>
-                </a:solidFill>
-                <a:latin typeface="微软雅黑"/>
-                <a:ea typeface="微软雅黑"/>
-                <a:cs typeface="微软雅黑"/>
-              </a:rPr>
-              <a:t>数据归属位号 3</a:t>
-            </a:r>
-          </a:p>
-        </p:txBody>
-      </p:sp>
-      <p:sp>
-        <p:nvSpPr>
-          <p:cNvPr id="27" name="TextBox 26"/>
-          <p:cNvSpPr txBox="1"/>
-          <p:nvPr/>
-        </p:nvSpPr>
-        <p:spPr>
-          <a:xfrm>
-            <a:off x="7772400" y="3419856"/>
-            <a:ext cx="329184" cy="201168"/>
-          </a:xfrm>
-          <a:prstGeom prst="rect">
-            <a:avLst/>
-          </a:prstGeom>
-          <a:noFill/>
-        </p:spPr>
-        <p:txBody>
-          <a:bodyPr wrap="square" lIns="0" rIns="0" tIns="0" bIns="0" anchor="t">
-            <a:spAutoFit/>
-          </a:bodyPr>
-          <a:lstStyle/>
-          <a:p>
-            <a:pPr algn="l">
-              <a:spcAft>
-                <a:spcPts val="0"/>
-              </a:spcAft>
-            </a:pPr>
-            <a:r>
-              <a:rPr sz="1100" b="0">
-                <a:solidFill>
-                  <a:srgbClr val="002FA7"/>
-                </a:solidFill>
-                <a:latin typeface="微软雅黑"/>
-                <a:ea typeface="微软雅黑"/>
-                <a:cs typeface="微软雅黑"/>
-              </a:rPr>
-              <a:t>→</a:t>
-            </a:r>
-          </a:p>
-        </p:txBody>
-      </p:sp>
-      <p:sp>
-        <p:nvSpPr>
-          <p:cNvPr id="28" name="Rectangle 27"/>
-          <p:cNvSpPr/>
-          <p:nvPr/>
-        </p:nvSpPr>
-        <p:spPr>
-          <a:xfrm>
-            <a:off x="8138160" y="3419856"/>
-            <a:ext cx="1691640" cy="201168"/>
-          </a:xfrm>
-          <a:prstGeom prst="rect">
-            <a:avLst/>
-          </a:prstGeom>
-          <a:noFill/>
-          <a:ln w="9525">
-            <a:solidFill>
-              <a:srgbClr val="D9D5CF"/>
-            </a:solidFill>
-          </a:ln>
-          <a:effectLst/>
-        </p:spPr>
-        <p:style>
-          <a:lnRef idx="1">
-            <a:schemeClr val="accent1"/>
-          </a:lnRef>
-          <a:fillRef idx="3">
-            <a:schemeClr val="accent1"/>
-          </a:fillRef>
-          <a:effectRef idx="2">
-            <a:schemeClr val="accent1"/>
-          </a:effectRef>
-          <a:fontRef idx="minor">
-            <a:schemeClr val="lt1"/>
-          </a:fontRef>
-        </p:style>
-        <p:txBody>
-          <a:bodyPr rtlCol="0" anchor="ctr" wrap="square" tIns="36576" bIns="36576"/>
-          <a:lstStyle/>
-          <a:p>
-            <a:pPr algn="ctr">
-              <a:spcAft>
-                <a:spcPts val="0"/>
-              </a:spcAft>
-            </a:pPr>
-            <a:r>
-              <a:rPr sz="1000" b="0">
-                <a:solidFill>
-                  <a:srgbClr val="1A1A1A"/>
-                </a:solidFill>
-                <a:latin typeface="微软雅黑"/>
-                <a:ea typeface="微软雅黑"/>
-                <a:cs typeface="微软雅黑"/>
-              </a:rPr>
-              <a:t>位号 4 各跑一遍</a:t>
-            </a:r>
-          </a:p>
-        </p:txBody>
-      </p:sp>
-      <p:sp>
-        <p:nvSpPr>
-          <p:cNvPr id="29" name="Rectangle 28"/>
-          <p:cNvSpPr/>
-          <p:nvPr/>
-        </p:nvSpPr>
-        <p:spPr>
-          <a:xfrm>
-            <a:off x="9966960" y="3419856"/>
-            <a:ext cx="1655064" cy="201168"/>
-          </a:xfrm>
-          <a:prstGeom prst="rect">
-            <a:avLst/>
-          </a:prstGeom>
-          <a:noFill/>
-          <a:ln>
-            <a:noFill/>
-          </a:ln>
-          <a:effectLst/>
-        </p:spPr>
-        <p:style>
-          <a:lnRef idx="1">
-            <a:schemeClr val="accent1"/>
-          </a:lnRef>
-          <a:fillRef idx="3">
-            <a:schemeClr val="accent1"/>
-          </a:fillRef>
-          <a:effectRef idx="2">
-            <a:schemeClr val="accent1"/>
-          </a:effectRef>
-          <a:fontRef idx="minor">
-            <a:schemeClr val="lt1"/>
-          </a:fontRef>
-        </p:style>
-        <p:txBody>
-          <a:bodyPr rtlCol="0" anchor="ctr" wrap="square" tIns="36576" bIns="36576"/>
-          <a:lstStyle/>
-          <a:p>
-            <a:pPr algn="ctr">
-              <a:spcAft>
-                <a:spcPts val="0"/>
-              </a:spcAft>
-            </a:pPr>
-            <a:r>
-              <a:rPr sz="1000" b="0">
-                <a:solidFill>
-                  <a:srgbClr val="1A1A1A"/>
-                </a:solidFill>
-                <a:latin typeface="微软雅黑"/>
-                <a:ea typeface="微软雅黑"/>
-                <a:cs typeface="微软雅黑"/>
-              </a:rPr>
-              <a:t>数据归属位号 4</a:t>
-            </a:r>
-          </a:p>
-        </p:txBody>
-      </p:sp>
-      <p:sp>
-        <p:nvSpPr>
-          <p:cNvPr id="30" name="TextBox 29"/>
-          <p:cNvSpPr txBox="1"/>
-          <p:nvPr/>
-        </p:nvSpPr>
-        <p:spPr>
-          <a:xfrm>
-            <a:off x="566928" y="3785615"/>
-            <a:ext cx="1463040" cy="420624"/>
-          </a:xfrm>
-          <a:prstGeom prst="rect">
-            <a:avLst/>
-          </a:prstGeom>
-          <a:noFill/>
-        </p:spPr>
-        <p:txBody>
-          <a:bodyPr wrap="square" lIns="0" rIns="0" tIns="0" bIns="0" anchor="t">
-            <a:spAutoFit/>
-          </a:bodyPr>
-          <a:lstStyle/>
-          <a:p>
-            <a:pPr algn="l">
-              <a:spcAft>
-                <a:spcPts val="0"/>
-              </a:spcAft>
-            </a:pPr>
-            <a:r>
-              <a:rPr sz="1250" b="1">
-                <a:solidFill>
-                  <a:srgbClr val="002FA7"/>
-                </a:solidFill>
-                <a:latin typeface="微软雅黑"/>
-                <a:ea typeface="微软雅黑"/>
-                <a:cs typeface="微软雅黑"/>
-              </a:rPr>
-              <a:t>id · case</a:t>
-            </a:r>
-          </a:p>
-        </p:txBody>
-      </p:sp>
-      <p:sp>
-        <p:nvSpPr>
-          <p:cNvPr id="31" name="TextBox 30"/>
-          <p:cNvSpPr txBox="1"/>
-          <p:nvPr/>
-        </p:nvSpPr>
-        <p:spPr>
-          <a:xfrm>
-            <a:off x="2121408" y="3785615"/>
-            <a:ext cx="3749039" cy="420624"/>
-          </a:xfrm>
-          <a:prstGeom prst="rect">
-            <a:avLst/>
-          </a:prstGeom>
-          <a:noFill/>
-        </p:spPr>
-        <p:txBody>
-          <a:bodyPr wrap="square" lIns="0" rIns="0" tIns="0" bIns="0" anchor="t">
-            <a:spAutoFit/>
-          </a:bodyPr>
-          <a:lstStyle/>
-          <a:p>
-            <a:pPr algn="l">
-              <a:spcAft>
-                <a:spcPts val="0"/>
-              </a:spcAft>
-            </a:pPr>
-            <a:r>
-              <a:rPr sz="1250" b="0">
-                <a:solidFill>
-                  <a:srgbClr val="1A1A1A"/>
-                </a:solidFill>
-                <a:latin typeface="微软雅黑"/>
-                <a:ea typeface="微软雅黑"/>
-                <a:cs typeface="微软雅黑"/>
-              </a:rPr>
-              <a:t>条目标识 + module::function 用例引用（必需）</a:t>
-            </a:r>
-          </a:p>
-        </p:txBody>
-      </p:sp>
-      <p:sp>
-        <p:nvSpPr>
-          <p:cNvPr id="32" name="Rectangle 31"/>
-          <p:cNvSpPr/>
-          <p:nvPr/>
-        </p:nvSpPr>
-        <p:spPr>
-          <a:xfrm>
-            <a:off x="566928" y="4169663"/>
+            <a:off x="566928" y="4133087"/>
             <a:ext cx="5303520" cy="6350"/>
           </a:xfrm>
           <a:prstGeom prst="rect">
@@ -11045,14 +10115,14 @@
       </p:sp>
       <p:sp>
         <p:nvSpPr>
-          <p:cNvPr id="33" name="TextBox 32"/>
+          <p:cNvPr id="21" name="TextBox 20"/>
           <p:cNvSpPr txBox="1"/>
           <p:nvPr/>
         </p:nvSpPr>
         <p:spPr>
           <a:xfrm>
-            <a:off x="566928" y="4279392"/>
-            <a:ext cx="1463040" cy="420624"/>
+            <a:off x="566928" y="4242816"/>
+            <a:ext cx="1463040" cy="384048"/>
           </a:xfrm>
           <a:prstGeom prst="rect">
             <a:avLst/>
@@ -11071,7 +10141,7 @@
               </a:spcAft>
             </a:pPr>
             <a:r>
-              <a:rPr sz="1250" b="1">
+              <a:rPr sz="1200" b="1">
                 <a:solidFill>
                   <a:srgbClr val="002FA7"/>
                 </a:solidFill>
@@ -11079,21 +10149,21 @@
                 <a:ea typeface="微软雅黑"/>
                 <a:cs typeface="微软雅黑"/>
               </a:rPr>
-              <a:t>exec</a:t>
-            </a:r>
-          </a:p>
-        </p:txBody>
-      </p:sp>
-      <p:sp>
-        <p:nvSpPr>
-          <p:cNvPr id="34" name="TextBox 33"/>
+              <a:t>type</a:t>
+            </a:r>
+          </a:p>
+        </p:txBody>
+      </p:sp>
+      <p:sp>
+        <p:nvSpPr>
+          <p:cNvPr id="22" name="TextBox 21"/>
           <p:cNvSpPr txBox="1"/>
           <p:nvPr/>
         </p:nvSpPr>
         <p:spPr>
           <a:xfrm>
-            <a:off x="2121408" y="4279392"/>
-            <a:ext cx="3749039" cy="420624"/>
+            <a:off x="2121408" y="4242816"/>
+            <a:ext cx="3749039" cy="384048"/>
           </a:xfrm>
           <a:prstGeom prst="rect">
             <a:avLst/>
@@ -11112,7 +10182,7 @@
               </a:spcAft>
             </a:pPr>
             <a:r>
-              <a:rPr sz="1250" b="0">
+              <a:rPr sz="1200" b="0">
                 <a:solidFill>
                   <a:srgbClr val="1A1A1A"/>
                 </a:solidFill>
@@ -11120,20 +10190,20 @@
                 <a:ea typeface="微软雅黑"/>
                 <a:cs typeface="微软雅黑"/>
               </a:rPr>
-              <a:t>timeout_s · retry · on_fail</a:t>
-            </a:r>
-          </a:p>
-        </p:txBody>
-      </p:sp>
-      <p:sp>
-        <p:nvSpPr>
-          <p:cNvPr id="35" name="Rectangle 34"/>
+              <a:t>条目类型：缺省普通自动用例；manual = 人工确认</a:t>
+            </a:r>
+          </a:p>
+        </p:txBody>
+      </p:sp>
+      <p:sp>
+        <p:nvSpPr>
+          <p:cNvPr id="23" name="Rectangle 22"/>
           <p:cNvSpPr/>
           <p:nvPr/>
         </p:nvSpPr>
         <p:spPr>
           <a:xfrm>
-            <a:off x="566928" y="4663440"/>
+            <a:off x="566928" y="4590288"/>
             <a:ext cx="5303520" cy="6350"/>
           </a:xfrm>
           <a:prstGeom prst="rect">
@@ -11171,14 +10241,14 @@
       </p:sp>
       <p:sp>
         <p:nvSpPr>
-          <p:cNvPr id="36" name="TextBox 35"/>
+          <p:cNvPr id="24" name="TextBox 23"/>
           <p:cNvSpPr txBox="1"/>
           <p:nvPr/>
         </p:nvSpPr>
         <p:spPr>
           <a:xfrm>
-            <a:off x="566928" y="4773168"/>
-            <a:ext cx="1463040" cy="420624"/>
+            <a:off x="566928" y="4700016"/>
+            <a:ext cx="1463040" cy="384048"/>
           </a:xfrm>
           <a:prstGeom prst="rect">
             <a:avLst/>
@@ -11197,7 +10267,7 @@
               </a:spcAft>
             </a:pPr>
             <a:r>
-              <a:rPr sz="1250" b="1">
+              <a:rPr sz="1200" b="1">
                 <a:solidFill>
                   <a:srgbClr val="002FA7"/>
                 </a:solidFill>
@@ -11205,21 +10275,21 @@
                 <a:ea typeface="微软雅黑"/>
                 <a:cs typeface="微软雅黑"/>
               </a:rPr>
-              <a:t>parallel</a:t>
-            </a:r>
-          </a:p>
-        </p:txBody>
-      </p:sp>
-      <p:sp>
-        <p:nvSpPr>
-          <p:cNvPr id="37" name="TextBox 36"/>
+              <a:t>resource</a:t>
+            </a:r>
+          </a:p>
+        </p:txBody>
+      </p:sp>
+      <p:sp>
+        <p:nvSpPr>
+          <p:cNvPr id="25" name="TextBox 24"/>
           <p:cNvSpPr txBox="1"/>
           <p:nvPr/>
         </p:nvSpPr>
         <p:spPr>
           <a:xfrm>
-            <a:off x="2121408" y="4773168"/>
-            <a:ext cx="3749039" cy="420624"/>
+            <a:off x="2121408" y="4700016"/>
+            <a:ext cx="3749039" cy="384048"/>
           </a:xfrm>
           <a:prstGeom prst="rect">
             <a:avLst/>
@@ -11238,7 +10308,7 @@
               </a:spcAft>
             </a:pPr>
             <a:r>
-              <a:rPr sz="1250" b="0">
+              <a:rPr sz="1200" b="0">
                 <a:solidFill>
                   <a:srgbClr val="1A1A1A"/>
                 </a:solidFill>
@@ -11246,20 +10316,20 @@
                 <a:ea typeface="微软雅黑"/>
                 <a:cs typeface="微软雅黑"/>
               </a:rPr>
-              <a:t>serial（默认）/ per_sn / shared</a:t>
-            </a:r>
-          </a:p>
-        </p:txBody>
-      </p:sp>
-      <p:sp>
-        <p:nvSpPr>
-          <p:cNvPr id="38" name="Rectangle 37"/>
+              <a:t>type=manual 时必填：resource/ 下的名称</a:t>
+            </a:r>
+          </a:p>
+        </p:txBody>
+      </p:sp>
+      <p:sp>
+        <p:nvSpPr>
+          <p:cNvPr id="26" name="Rectangle 25"/>
           <p:cNvSpPr/>
           <p:nvPr/>
         </p:nvSpPr>
         <p:spPr>
           <a:xfrm>
-            <a:off x="566928" y="5157216"/>
+            <a:off x="566928" y="5047488"/>
             <a:ext cx="5303520" cy="6350"/>
           </a:xfrm>
           <a:prstGeom prst="rect">
@@ -11297,14 +10367,14 @@
       </p:sp>
       <p:sp>
         <p:nvSpPr>
-          <p:cNvPr id="39" name="TextBox 38"/>
+          <p:cNvPr id="27" name="TextBox 26"/>
           <p:cNvSpPr txBox="1"/>
           <p:nvPr/>
         </p:nvSpPr>
         <p:spPr>
           <a:xfrm>
-            <a:off x="566928" y="5266944"/>
-            <a:ext cx="1463040" cy="420624"/>
+            <a:off x="566928" y="5157216"/>
+            <a:ext cx="1463040" cy="384048"/>
           </a:xfrm>
           <a:prstGeom prst="rect">
             <a:avLst/>
@@ -11323,7 +10393,7 @@
               </a:spcAft>
             </a:pPr>
             <a:r>
-              <a:rPr sz="1250" b="1">
+              <a:rPr sz="1200" b="1">
                 <a:solidFill>
                   <a:srgbClr val="002FA7"/>
                 </a:solidFill>
@@ -11331,21 +10401,21 @@
                 <a:ea typeface="微软雅黑"/>
                 <a:cs typeface="微软雅黑"/>
               </a:rPr>
-              <a:t>skip_when</a:t>
-            </a:r>
-          </a:p>
-        </p:txBody>
-      </p:sp>
-      <p:sp>
-        <p:nvSpPr>
-          <p:cNvPr id="40" name="TextBox 39"/>
+              <a:t>parallel</a:t>
+            </a:r>
+          </a:p>
+        </p:txBody>
+      </p:sp>
+      <p:sp>
+        <p:nvSpPr>
+          <p:cNvPr id="28" name="TextBox 27"/>
           <p:cNvSpPr txBox="1"/>
           <p:nvPr/>
         </p:nvSpPr>
         <p:spPr>
           <a:xfrm>
-            <a:off x="2121408" y="5266944"/>
-            <a:ext cx="3749039" cy="420624"/>
+            <a:off x="2121408" y="5157216"/>
+            <a:ext cx="3749039" cy="384048"/>
           </a:xfrm>
           <a:prstGeom prst="rect">
             <a:avLst/>
@@ -11364,7 +10434,7 @@
               </a:spcAft>
             </a:pPr>
             <a:r>
-              <a:rPr sz="1250" b="0">
+              <a:rPr sz="1200" b="0">
                 <a:solidFill>
                   <a:srgbClr val="1A1A1A"/>
                 </a:solidFill>
@@ -11372,20 +10442,20 @@
                 <a:ea typeface="微软雅黑"/>
                 <a:cs typeface="微软雅黑"/>
               </a:rPr>
-              <a:t>条件跳过（如设备缺失），跳过而非失败</a:t>
-            </a:r>
-          </a:p>
-        </p:txBody>
-      </p:sp>
-      <p:sp>
-        <p:nvSpPr>
-          <p:cNvPr id="41" name="Rectangle 40"/>
+              <a:t>作用域：serial（默认）/ per_sn / shared</a:t>
+            </a:r>
+          </a:p>
+        </p:txBody>
+      </p:sp>
+      <p:sp>
+        <p:nvSpPr>
+          <p:cNvPr id="29" name="Rectangle 28"/>
           <p:cNvSpPr/>
           <p:nvPr/>
         </p:nvSpPr>
         <p:spPr>
           <a:xfrm>
-            <a:off x="566928" y="5650992"/>
+            <a:off x="566928" y="5504688"/>
             <a:ext cx="5303520" cy="6350"/>
           </a:xfrm>
           <a:prstGeom prst="rect">
@@ -11423,14 +10493,14 @@
       </p:sp>
       <p:sp>
         <p:nvSpPr>
-          <p:cNvPr id="42" name="TextBox 41"/>
+          <p:cNvPr id="30" name="TextBox 29"/>
           <p:cNvSpPr txBox="1"/>
           <p:nvPr/>
         </p:nvSpPr>
         <p:spPr>
           <a:xfrm>
-            <a:off x="566928" y="5760720"/>
-            <a:ext cx="1463040" cy="420624"/>
+            <a:off x="566928" y="5614416"/>
+            <a:ext cx="1463040" cy="384048"/>
           </a:xfrm>
           <a:prstGeom prst="rect">
             <a:avLst/>
@@ -11449,7 +10519,7 @@
               </a:spcAft>
             </a:pPr>
             <a:r>
-              <a:rPr sz="1250" b="1">
+              <a:rPr sz="1200" b="1">
                 <a:solidFill>
                   <a:srgbClr val="002FA7"/>
                 </a:solidFill>
@@ -11457,21 +10527,21 @@
                 <a:ea typeface="微软雅黑"/>
                 <a:cs typeface="微软雅黑"/>
               </a:rPr>
-              <a:t>always_run</a:t>
-            </a:r>
-          </a:p>
-        </p:txBody>
-      </p:sp>
-      <p:sp>
-        <p:nvSpPr>
-          <p:cNvPr id="43" name="TextBox 42"/>
+              <a:t>exec.timeout_s</a:t>
+            </a:r>
+          </a:p>
+        </p:txBody>
+      </p:sp>
+      <p:sp>
+        <p:nvSpPr>
+          <p:cNvPr id="31" name="TextBox 30"/>
           <p:cNvSpPr txBox="1"/>
           <p:nvPr/>
         </p:nvSpPr>
         <p:spPr>
           <a:xfrm>
-            <a:off x="2121408" y="5760720"/>
-            <a:ext cx="3749039" cy="420624"/>
+            <a:off x="2121408" y="5614416"/>
+            <a:ext cx="3749039" cy="384048"/>
           </a:xfrm>
           <a:prstGeom prst="rect">
             <a:avLst/>
@@ -11490,7 +10560,7 @@
               </a:spcAft>
             </a:pPr>
             <a:r>
-              <a:rPr sz="1250" b="0">
+              <a:rPr sz="1200" b="0">
                 <a:solidFill>
                   <a:srgbClr val="1A1A1A"/>
                 </a:solidFill>
@@ -11498,20 +10568,20 @@
                 <a:ea typeface="微软雅黑"/>
                 <a:cs typeface="微软雅黑"/>
               </a:rPr>
-              <a:t>仅 teardown：为 true 时失败也必须执行</a:t>
-            </a:r>
-          </a:p>
-        </p:txBody>
-      </p:sp>
-      <p:sp>
-        <p:nvSpPr>
-          <p:cNvPr id="44" name="Rectangle 43"/>
+              <a:t>单条超时秒数，防卡死</a:t>
+            </a:r>
+          </a:p>
+        </p:txBody>
+      </p:sp>
+      <p:sp>
+        <p:nvSpPr>
+          <p:cNvPr id="32" name="Rectangle 31"/>
           <p:cNvSpPr/>
           <p:nvPr/>
         </p:nvSpPr>
         <p:spPr>
           <a:xfrm>
-            <a:off x="566928" y="6144768"/>
+            <a:off x="566928" y="5961888"/>
             <a:ext cx="5303520" cy="6350"/>
           </a:xfrm>
           <a:prstGeom prst="rect">
@@ -11549,14 +10619,181 @@
       </p:sp>
       <p:sp>
         <p:nvSpPr>
-          <p:cNvPr id="45" name="Rectangle 44"/>
+          <p:cNvPr id="33" name="TextBox 32"/>
+          <p:cNvSpPr txBox="1"/>
+          <p:nvPr/>
+        </p:nvSpPr>
+        <p:spPr>
+          <a:xfrm>
+            <a:off x="566928" y="6071616"/>
+            <a:ext cx="1463040" cy="384048"/>
+          </a:xfrm>
+          <a:prstGeom prst="rect">
+            <a:avLst/>
+          </a:prstGeom>
+          <a:noFill/>
+        </p:spPr>
+        <p:txBody>
+          <a:bodyPr wrap="square" lIns="0" rIns="0" tIns="0" bIns="0" anchor="t">
+            <a:spAutoFit/>
+          </a:bodyPr>
+          <a:lstStyle/>
+          <a:p>
+            <a:pPr algn="l">
+              <a:spcAft>
+                <a:spcPts val="0"/>
+              </a:spcAft>
+            </a:pPr>
+            <a:r>
+              <a:rPr sz="1200" b="1">
+                <a:solidFill>
+                  <a:srgbClr val="002FA7"/>
+                </a:solidFill>
+                <a:latin typeface="微软雅黑"/>
+                <a:ea typeface="微软雅黑"/>
+                <a:cs typeface="微软雅黑"/>
+              </a:rPr>
+              <a:t>不写入</a:t>
+            </a:r>
+          </a:p>
+        </p:txBody>
+      </p:sp>
+      <p:sp>
+        <p:nvSpPr>
+          <p:cNvPr id="34" name="TextBox 33"/>
+          <p:cNvSpPr txBox="1"/>
+          <p:nvPr/>
+        </p:nvSpPr>
+        <p:spPr>
+          <a:xfrm>
+            <a:off x="2121408" y="6071616"/>
+            <a:ext cx="3749039" cy="384048"/>
+          </a:xfrm>
+          <a:prstGeom prst="rect">
+            <a:avLst/>
+          </a:prstGeom>
+          <a:noFill/>
+        </p:spPr>
+        <p:txBody>
+          <a:bodyPr wrap="square" lIns="0" rIns="0" tIns="0" bIns="0" anchor="t">
+            <a:spAutoFit/>
+          </a:bodyPr>
+          <a:lstStyle/>
+          <a:p>
+            <a:pPr algn="l">
+              <a:spcAft>
+                <a:spcPts val="0"/>
+              </a:spcAft>
+            </a:pPr>
+            <a:r>
+              <a:rPr sz="1200" b="0">
+                <a:solidFill>
+                  <a:srgbClr val="1A1A1A"/>
+                </a:solidFill>
+                <a:latin typeface="微软雅黑"/>
+                <a:ea typeface="微软雅黑"/>
+                <a:cs typeface="微软雅黑"/>
+              </a:rPr>
+              <a:t>排序、依赖、条件跳过、失败处置、重试——不属清单</a:t>
+            </a:r>
+          </a:p>
+        </p:txBody>
+      </p:sp>
+      <p:sp>
+        <p:nvSpPr>
+          <p:cNvPr id="35" name="Rectangle 34"/>
           <p:cNvSpPr/>
           <p:nvPr/>
         </p:nvSpPr>
         <p:spPr>
           <a:xfrm>
-            <a:off x="6272784" y="3785615"/>
-            <a:ext cx="5349240" cy="1920240"/>
+            <a:off x="566928" y="6419088"/>
+            <a:ext cx="5303520" cy="6350"/>
+          </a:xfrm>
+          <a:prstGeom prst="rect">
+            <a:avLst/>
+          </a:prstGeom>
+          <a:solidFill>
+            <a:srgbClr val="D9D5CF"/>
+          </a:solidFill>
+          <a:ln>
+            <a:noFill/>
+          </a:ln>
+          <a:effectLst/>
+        </p:spPr>
+        <p:style>
+          <a:lnRef idx="1">
+            <a:schemeClr val="accent1"/>
+          </a:lnRef>
+          <a:fillRef idx="3">
+            <a:schemeClr val="accent1"/>
+          </a:fillRef>
+          <a:effectRef idx="2">
+            <a:schemeClr val="accent1"/>
+          </a:effectRef>
+          <a:fontRef idx="minor">
+            <a:schemeClr val="lt1"/>
+          </a:fontRef>
+        </p:style>
+        <p:txBody>
+          <a:bodyPr rtlCol="0" anchor="ctr"/>
+          <a:lstStyle/>
+          <a:p>
+            <a:pPr algn="ctr"/>
+          </a:p>
+        </p:txBody>
+      </p:sp>
+      <p:sp>
+        <p:nvSpPr>
+          <p:cNvPr id="36" name="TextBox 35"/>
+          <p:cNvSpPr txBox="1"/>
+          <p:nvPr/>
+        </p:nvSpPr>
+        <p:spPr>
+          <a:xfrm>
+            <a:off x="6272784" y="2359152"/>
+            <a:ext cx="5349240" cy="256032"/>
+          </a:xfrm>
+          <a:prstGeom prst="rect">
+            <a:avLst/>
+          </a:prstGeom>
+          <a:noFill/>
+        </p:spPr>
+        <p:txBody>
+          <a:bodyPr wrap="square" lIns="0" rIns="0" tIns="0" bIns="0" anchor="t">
+            <a:spAutoFit/>
+          </a:bodyPr>
+          <a:lstStyle/>
+          <a:p>
+            <a:pPr algn="l">
+              <a:spcAft>
+                <a:spcPts val="0"/>
+              </a:spcAft>
+            </a:pPr>
+            <a:r>
+              <a:rPr sz="1250" b="1">
+                <a:solidFill>
+                  <a:srgbClr val="1A1A1A"/>
+                </a:solidFill>
+                <a:latin typeface="微软雅黑"/>
+                <a:ea typeface="微软雅黑"/>
+                <a:cs typeface="微软雅黑"/>
+              </a:rPr>
+              <a:t>人工确认：清单里唯一的控制点</a:t>
+            </a:r>
+          </a:p>
+        </p:txBody>
+      </p:sp>
+      <p:sp>
+        <p:nvSpPr>
+          <p:cNvPr id="37" name="Rectangle 36"/>
+          <p:cNvSpPr/>
+          <p:nvPr/>
+        </p:nvSpPr>
+        <p:spPr>
+          <a:xfrm>
+            <a:off x="6272784" y="2706624"/>
+            <a:ext cx="5349240" cy="530352"/>
           </a:xfrm>
           <a:prstGeom prst="rect">
             <a:avLst/>
@@ -11589,11 +10826,70 @@
           <a:p>
             <a:pPr algn="l">
               <a:spcAft>
-                <a:spcPts val="600"/>
-              </a:spcAft>
-            </a:pPr>
-            <a:r>
-              <a:rPr sz="1350" b="1">
+                <a:spcPts val="200"/>
+              </a:spcAft>
+            </a:pPr>
+            <a:r>
+              <a:rPr sz="1050" b="0">
+                <a:solidFill>
+                  <a:srgbClr val="1A1A1A"/>
+                </a:solidFill>
+                <a:latin typeface="微软雅黑"/>
+                <a:ea typeface="微软雅黑"/>
+                <a:cs typeface="微软雅黑"/>
+              </a:rPr>
+              <a:t>{ "id": "M-01", "case": "testcase.manual::appearance_check",</a:t>
+            </a:r>
+          </a:p>
+          <a:p>
+            <a:pPr algn="l">
+              <a:spcAft>
+                <a:spcPts val="0"/>
+              </a:spcAft>
+            </a:pPr>
+            <a:r>
+              <a:rPr sz="1050" b="0">
+                <a:solidFill>
+                  <a:srgbClr val="1A1A1A"/>
+                </a:solidFill>
+                <a:latin typeface="微软雅黑"/>
+                <a:ea typeface="微软雅黑"/>
+                <a:cs typeface="微软雅黑"/>
+              </a:rPr>
+              <a:t>  "type": "manual", "resource": "appearance_check" }</a:t>
+            </a:r>
+          </a:p>
+        </p:txBody>
+      </p:sp>
+      <p:sp>
+        <p:nvSpPr>
+          <p:cNvPr id="38" name="TextBox 37"/>
+          <p:cNvSpPr txBox="1"/>
+          <p:nvPr/>
+        </p:nvSpPr>
+        <p:spPr>
+          <a:xfrm>
+            <a:off x="8714232" y="3273552"/>
+            <a:ext cx="457200" cy="219456"/>
+          </a:xfrm>
+          <a:prstGeom prst="rect">
+            <a:avLst/>
+          </a:prstGeom>
+          <a:noFill/>
+        </p:spPr>
+        <p:txBody>
+          <a:bodyPr wrap="square" lIns="0" rIns="0" tIns="0" bIns="0" anchor="t">
+            <a:spAutoFit/>
+          </a:bodyPr>
+          <a:lstStyle/>
+          <a:p>
+            <a:pPr algn="ctr">
+              <a:spcAft>
+                <a:spcPts val="0"/>
+              </a:spcAft>
+            </a:pPr>
+            <a:r>
+              <a:rPr sz="1200" b="0">
                 <a:solidFill>
                   <a:srgbClr val="002FA7"/>
                 </a:solidFill>
@@ -11601,17 +10897,76 @@
                 <a:ea typeface="微软雅黑"/>
                 <a:cs typeface="微软雅黑"/>
               </a:rPr>
-              <a:t>manual · 人工确认子用例</a:t>
-            </a:r>
-          </a:p>
+              <a:t>↓</a:t>
+            </a:r>
+          </a:p>
+        </p:txBody>
+      </p:sp>
+      <p:sp>
+        <p:nvSpPr>
+          <p:cNvPr id="39" name="Rectangle 38"/>
+          <p:cNvSpPr/>
+          <p:nvPr/>
+        </p:nvSpPr>
+        <p:spPr>
+          <a:xfrm>
+            <a:off x="6272784" y="3547872"/>
+            <a:ext cx="5349240" cy="914400"/>
+          </a:xfrm>
+          <a:prstGeom prst="rect">
+            <a:avLst/>
+          </a:prstGeom>
+          <a:solidFill>
+            <a:srgbClr val="EAF0F9"/>
+          </a:solidFill>
+          <a:ln>
+            <a:noFill/>
+          </a:ln>
+          <a:effectLst/>
+        </p:spPr>
+        <p:style>
+          <a:lnRef idx="1">
+            <a:schemeClr val="accent1"/>
+          </a:lnRef>
+          <a:fillRef idx="3">
+            <a:schemeClr val="accent1"/>
+          </a:fillRef>
+          <a:effectRef idx="2">
+            <a:schemeClr val="accent1"/>
+          </a:effectRef>
+          <a:fontRef idx="minor">
+            <a:schemeClr val="lt1"/>
+          </a:fontRef>
+        </p:style>
+        <p:txBody>
+          <a:bodyPr rtlCol="0" anchor="ctr" wrap="square" tIns="36576" bIns="36576"/>
+          <a:lstStyle/>
           <a:p>
             <a:pPr algn="l">
               <a:spcAft>
-                <a:spcPts val="600"/>
-              </a:spcAft>
-            </a:pPr>
-            <a:r>
-              <a:rPr sz="1350" b="0">
+                <a:spcPts val="400"/>
+              </a:spcAft>
+            </a:pPr>
+            <a:r>
+              <a:rPr sz="1200" b="1">
+                <a:solidFill>
+                  <a:srgbClr val="002FA7"/>
+                </a:solidFill>
+                <a:latin typeface="微软雅黑"/>
+                <a:ea typeface="微软雅黑"/>
+                <a:cs typeface="微软雅黑"/>
+              </a:rPr>
+              <a:t>运行时弹窗</a:t>
+            </a:r>
+          </a:p>
+          <a:p>
+            <a:pPr algn="l">
+              <a:spcAft>
+                <a:spcPts val="200"/>
+              </a:spcAft>
+            </a:pPr>
+            <a:r>
+              <a:rPr sz="1150" b="0">
                 <a:solidFill>
                   <a:srgbClr val="1A1A1A"/>
                 </a:solidFill>
@@ -11619,16 +10974,95 @@
                 <a:ea typeface="微软雅黑"/>
                 <a:cs typeface="微软雅黑"/>
               </a:rPr>
-              <a:t>需要操作员判断的步骤（外观检查、装夹确认、人工上下料）以人工确认子用例表达：运行时弹出确认窗口，操作员确认后继续，超时按 timeout_s 处置。</a:t>
+              <a:t>文案：resource/appearance_check.md</a:t>
             </a:r>
           </a:p>
           <a:p>
             <a:pPr algn="l">
               <a:spcAft>
+                <a:spcPts val="0"/>
+              </a:spcAft>
+            </a:pPr>
+            <a:r>
+              <a:rPr sz="1150" b="0">
+                <a:solidFill>
+                  <a:srgbClr val="1A1A1A"/>
+                </a:solidFill>
+                <a:latin typeface="微软雅黑"/>
+                <a:ea typeface="微软雅黑"/>
+                <a:cs typeface="微软雅黑"/>
+              </a:rPr>
+              <a:t>图片：resource/appearance_check.png（同名即取）</a:t>
+            </a:r>
+          </a:p>
+        </p:txBody>
+      </p:sp>
+      <p:sp>
+        <p:nvSpPr>
+          <p:cNvPr id="40" name="Rectangle 39"/>
+          <p:cNvSpPr/>
+          <p:nvPr/>
+        </p:nvSpPr>
+        <p:spPr>
+          <a:xfrm>
+            <a:off x="6272784" y="4608576"/>
+            <a:ext cx="2560320" cy="603504"/>
+          </a:xfrm>
+          <a:prstGeom prst="rect">
+            <a:avLst/>
+          </a:prstGeom>
+          <a:solidFill>
+            <a:srgbClr val="EAF0F9"/>
+          </a:solidFill>
+          <a:ln w="9525">
+            <a:solidFill>
+              <a:srgbClr val="002FA7"/>
+            </a:solidFill>
+          </a:ln>
+          <a:effectLst/>
+        </p:spPr>
+        <p:style>
+          <a:lnRef idx="1">
+            <a:schemeClr val="accent1"/>
+          </a:lnRef>
+          <a:fillRef idx="3">
+            <a:schemeClr val="accent1"/>
+          </a:fillRef>
+          <a:effectRef idx="2">
+            <a:schemeClr val="accent1"/>
+          </a:effectRef>
+          <a:fontRef idx="minor">
+            <a:schemeClr val="lt1"/>
+          </a:fontRef>
+        </p:style>
+        <p:txBody>
+          <a:bodyPr rtlCol="0" anchor="ctr" wrap="square" tIns="36576" bIns="36576"/>
+          <a:lstStyle/>
+          <a:p>
+            <a:pPr algn="ctr">
+              <a:spcAft>
                 <a:spcPts val="200"/>
               </a:spcAft>
             </a:pPr>
             <a:r>
+              <a:rPr sz="1200" b="1">
+                <a:solidFill>
+                  <a:srgbClr val="1A1A1A"/>
+                </a:solidFill>
+                <a:latin typeface="微软雅黑"/>
+                <a:ea typeface="微软雅黑"/>
+                <a:cs typeface="微软雅黑"/>
+              </a:rPr>
+              <a:t>继续下一步 next</a:t>
+            </a:r>
+          </a:p>
+          <a:p>
+            <a:pPr algn="ctr">
+              <a:spcAft>
+                <a:spcPts val="0"/>
+              </a:spcAft>
+            </a:pPr>
+            <a:r>
               <a:rPr sz="1100" b="0">
                 <a:solidFill>
                   <a:srgbClr val="1A1A1A"/>
@@ -11637,17 +11071,119 @@
                 <a:ea typeface="微软雅黑"/>
                 <a:cs typeface="微软雅黑"/>
               </a:rPr>
-              <a:t>{ "id": "M-01", "case": "testcase.manual::appearance_check",</a:t>
-            </a:r>
-          </a:p>
+              <a:t>执行清单里的下一条</a:t>
+            </a:r>
+          </a:p>
+        </p:txBody>
+      </p:sp>
+      <p:sp>
+        <p:nvSpPr>
+          <p:cNvPr id="41" name="Rectangle 40"/>
+          <p:cNvSpPr/>
+          <p:nvPr/>
+        </p:nvSpPr>
+        <p:spPr>
+          <a:xfrm>
+            <a:off x="9061704" y="4608576"/>
+            <a:ext cx="2560320" cy="603504"/>
+          </a:xfrm>
+          <a:prstGeom prst="rect">
+            <a:avLst/>
+          </a:prstGeom>
+          <a:solidFill>
+            <a:srgbClr val="EAF0F9"/>
+          </a:solidFill>
+          <a:ln w="9525">
+            <a:solidFill>
+              <a:srgbClr val="002FA7"/>
+            </a:solidFill>
+          </a:ln>
+          <a:effectLst/>
+        </p:spPr>
+        <p:style>
+          <a:lnRef idx="1">
+            <a:schemeClr val="accent1"/>
+          </a:lnRef>
+          <a:fillRef idx="3">
+            <a:schemeClr val="accent1"/>
+          </a:fillRef>
+          <a:effectRef idx="2">
+            <a:schemeClr val="accent1"/>
+          </a:effectRef>
+          <a:fontRef idx="minor">
+            <a:schemeClr val="lt1"/>
+          </a:fontRef>
+        </p:style>
+        <p:txBody>
+          <a:bodyPr rtlCol="0" anchor="ctr" wrap="square" tIns="36576" bIns="36576"/>
+          <a:lstStyle/>
+          <a:p>
+            <a:pPr algn="ctr">
+              <a:spcAft>
+                <a:spcPts val="200"/>
+              </a:spcAft>
+            </a:pPr>
+            <a:r>
+              <a:rPr sz="1200" b="1">
+                <a:solidFill>
+                  <a:srgbClr val="1A1A1A"/>
+                </a:solidFill>
+                <a:latin typeface="微软雅黑"/>
+                <a:ea typeface="微软雅黑"/>
+                <a:cs typeface="微软雅黑"/>
+              </a:rPr>
+              <a:t>中止 abort</a:t>
+            </a:r>
+          </a:p>
+          <a:p>
+            <a:pPr algn="ctr">
+              <a:spcAft>
+                <a:spcPts val="0"/>
+              </a:spcAft>
+            </a:pPr>
+            <a:r>
+              <a:rPr sz="1100" b="0">
+                <a:solidFill>
+                  <a:srgbClr val="1A1A1A"/>
+                </a:solidFill>
+                <a:latin typeface="微软雅黑"/>
+                <a:ea typeface="微软雅黑"/>
+                <a:cs typeface="微软雅黑"/>
+              </a:rPr>
+              <a:t>停止本轮，转收尾与报告</a:t>
+            </a:r>
+          </a:p>
+        </p:txBody>
+      </p:sp>
+      <p:sp>
+        <p:nvSpPr>
+          <p:cNvPr id="42" name="TextBox 41"/>
+          <p:cNvSpPr txBox="1"/>
+          <p:nvPr/>
+        </p:nvSpPr>
+        <p:spPr>
+          <a:xfrm>
+            <a:off x="6272784" y="5358384"/>
+            <a:ext cx="5349240" cy="566928"/>
+          </a:xfrm>
+          <a:prstGeom prst="rect">
+            <a:avLst/>
+          </a:prstGeom>
+          <a:noFill/>
+        </p:spPr>
+        <p:txBody>
+          <a:bodyPr wrap="square" lIns="0" rIns="0" tIns="0" bIns="0" anchor="t">
+            <a:spAutoFit/>
+          </a:bodyPr>
+          <a:lstStyle/>
           <a:p>
             <a:pPr algn="l">
               <a:spcAft>
-                <a:spcPts val="200"/>
-              </a:spcAft>
-            </a:pPr>
-            <a:r>
-              <a:rPr sz="1100" b="0">
+                <a:spcPts val="0"/>
+              </a:spcAft>
+            </a:pPr>
+            <a:r>
+              <a:rPr sz="1150" b="0">
                 <a:solidFill>
                   <a:srgbClr val="1A1A1A"/>
                 </a:solidFill>
@@ -11655,43 +11191,7 @@
                 <a:ea typeface="微软雅黑"/>
                 <a:cs typeface="微软雅黑"/>
               </a:rPr>
-              <a:t>  "manual": { "message": "确认外壳无划伤后继续",</a:t>
-            </a:r>
-          </a:p>
-          <a:p>
-            <a:pPr algn="l">
-              <a:spcAft>
-                <a:spcPts val="600"/>
-              </a:spcAft>
-            </a:pPr>
-            <a:r>
-              <a:rPr sz="1100" b="0">
-                <a:solidFill>
-                  <a:srgbClr val="1A1A1A"/>
-                </a:solidFill>
-                <a:latin typeface="微软雅黑"/>
-                <a:ea typeface="微软雅黑"/>
-                <a:cs typeface="微软雅黑"/>
-              </a:rPr>
-              <a:t>              "expect": "操作员确认", "timeout_s": 300 } }</a:t>
-            </a:r>
-          </a:p>
-          <a:p>
-            <a:pPr algn="l">
-              <a:spcAft>
-                <a:spcPts val="0"/>
-              </a:spcAft>
-            </a:pPr>
-            <a:r>
-              <a:rPr sz="1100" b="0">
-                <a:solidFill>
-                  <a:srgbClr val="1A1A1A"/>
-                </a:solidFill>
-                <a:latin typeface="微软雅黑"/>
-                <a:ea typeface="微软雅黑"/>
-                <a:cs typeface="微软雅黑"/>
-              </a:rPr>
-              <a:t>自动用例中途需要确认时，也可在用例内调用判定上下文的确认接口插入等待点。</a:t>
+              <a:t>需要操作员判断的步骤（外观检查、装夹确认、人工上下料）都用这一种类型表达；弹窗内容不写进清单，由用例按名称从 resource/ 取，改文案与示意图不动清单。</a:t>
             </a:r>
           </a:p>
         </p:txBody>
@@ -13221,7 +12721,7 @@
                           <a:ea typeface="微软雅黑"/>
                           <a:cs typeface="微软雅黑"/>
                         </a:rPr>
-                        <a:t>串行执行环境初始化；失败按 on_fail 处置</a:t>
+                        <a:t>按书写顺序执行环境初始化</a:t>
                       </a:r>
                     </a:p>
                   </a:txBody>
@@ -13283,7 +12783,7 @@
                           <a:ea typeface="微软雅黑"/>
                           <a:cs typeface="微软雅黑"/>
                         </a:rPr>
-                        <a:t>用例序列展开：串行 · per_sn 并行 · manual 弹窗确认</a:t>
+                        <a:t>按书写顺序逐条执行；per_sn 条目逐位号展开；manual 条目弹窗等 next / abort</a:t>
                       </a:r>
                     </a:p>
                   </a:txBody>
@@ -13345,7 +12845,7 @@
                           <a:ea typeface="微软雅黑"/>
                           <a:cs typeface="微软雅黑"/>
                         </a:rPr>
-                        <a:t>always_run 条目必跑；汇总判定明细并生成 HTML 报告</a:t>
+                        <a:t>收尾段必定执行；汇总判定明细并生成 HTML 报告</a:t>
                       </a:r>
                     </a:p>
                   </a:txBody>

--- a/docs/TPS用例集设计.pptx
+++ b/docs/TPS用例集设计.pptx
@@ -10838,7 +10838,7 @@
                 <a:ea typeface="微软雅黑"/>
                 <a:cs typeface="微软雅黑"/>
               </a:rPr>
-              <a:t>{ "id": "M-01", "case": "testcase.manual::appearance_check",</a:t>
+              <a:t>{ "id": "M-01", "type": "manual",</a:t>
             </a:r>
           </a:p>
           <a:p>
@@ -10856,7 +10856,7 @@
                 <a:ea typeface="微软雅黑"/>
                 <a:cs typeface="微软雅黑"/>
               </a:rPr>
-              <a:t>  "type": "manual", "resource": "appearance_check" }</a:t>
+              <a:t>  "name": "装夹确认", "resource": "appearance_check.md" }</a:t>
             </a:r>
           </a:p>
         </p:txBody>

--- a/docs/TPS用例集设计.pptx
+++ b/docs/TPS用例集设计.pptx
@@ -3105,8 +3105,8 @@
         </p:nvSpPr>
         <p:spPr>
           <a:xfrm>
-            <a:off x="566928" y="932688"/>
-            <a:ext cx="11055096" cy="411480"/>
+            <a:off x="566928" y="914400"/>
+            <a:ext cx="11055096" cy="512064"/>
           </a:xfrm>
           <a:prstGeom prst="rect">
             <a:avLst/>
@@ -3125,7 +3125,7 @@
               </a:spcAft>
             </a:pPr>
             <a:r>
-              <a:rPr sz="2400" b="1">
+              <a:rPr sz="2600" b="1">
                 <a:solidFill>
                   <a:srgbClr val="9B1C1C"/>
                 </a:solidFill>
@@ -3160,20 +3160,6 @@
           </a:ln>
           <a:effectLst/>
         </p:spPr>
-        <p:style>
-          <a:lnRef idx="1">
-            <a:schemeClr val="accent1"/>
-          </a:lnRef>
-          <a:fillRef idx="3">
-            <a:schemeClr val="accent1"/>
-          </a:fillRef>
-          <a:effectRef idx="2">
-            <a:schemeClr val="accent1"/>
-          </a:effectRef>
-          <a:fontRef idx="minor">
-            <a:schemeClr val="lt1"/>
-          </a:fontRef>
-        </p:style>
         <p:txBody>
           <a:bodyPr rtlCol="0" anchor="ctr" wrap="square" tIns="36576" bIns="36576"/>
           <a:lstStyle/>
@@ -3219,20 +3205,6 @@
           </a:ln>
           <a:effectLst/>
         </p:spPr>
-        <p:style>
-          <a:lnRef idx="1">
-            <a:schemeClr val="accent1"/>
-          </a:lnRef>
-          <a:fillRef idx="3">
-            <a:schemeClr val="accent1"/>
-          </a:fillRef>
-          <a:effectRef idx="2">
-            <a:schemeClr val="accent1"/>
-          </a:effectRef>
-          <a:fontRef idx="minor">
-            <a:schemeClr val="lt1"/>
-          </a:fontRef>
-        </p:style>
         <p:txBody>
           <a:bodyPr rtlCol="0" anchor="ctr" wrap="square" tIns="36576" bIns="36576"/>
           <a:lstStyle/>
@@ -3278,20 +3250,6 @@
           </a:ln>
           <a:effectLst/>
         </p:spPr>
-        <p:style>
-          <a:lnRef idx="1">
-            <a:schemeClr val="accent1"/>
-          </a:lnRef>
-          <a:fillRef idx="3">
-            <a:schemeClr val="accent1"/>
-          </a:fillRef>
-          <a:effectRef idx="2">
-            <a:schemeClr val="accent1"/>
-          </a:effectRef>
-          <a:fontRef idx="minor">
-            <a:schemeClr val="lt1"/>
-          </a:fontRef>
-        </p:style>
         <p:txBody>
           <a:bodyPr rtlCol="0" anchor="ctr" wrap="square" tIns="36576" bIns="36576"/>
           <a:lstStyle/>
@@ -3337,20 +3295,6 @@
           </a:ln>
           <a:effectLst/>
         </p:spPr>
-        <p:style>
-          <a:lnRef idx="1">
-            <a:schemeClr val="accent1"/>
-          </a:lnRef>
-          <a:fillRef idx="3">
-            <a:schemeClr val="accent1"/>
-          </a:fillRef>
-          <a:effectRef idx="2">
-            <a:schemeClr val="accent1"/>
-          </a:effectRef>
-          <a:fontRef idx="minor">
-            <a:schemeClr val="lt1"/>
-          </a:fontRef>
-        </p:style>
         <p:txBody>
           <a:bodyPr rtlCol="0" anchor="ctr" wrap="square" tIns="36576" bIns="36576"/>
           <a:lstStyle/>
@@ -3396,20 +3340,6 @@
           </a:ln>
           <a:effectLst/>
         </p:spPr>
-        <p:style>
-          <a:lnRef idx="1">
-            <a:schemeClr val="accent1"/>
-          </a:lnRef>
-          <a:fillRef idx="3">
-            <a:schemeClr val="accent1"/>
-          </a:fillRef>
-          <a:effectRef idx="2">
-            <a:schemeClr val="accent1"/>
-          </a:effectRef>
-          <a:fontRef idx="minor">
-            <a:schemeClr val="lt1"/>
-          </a:fontRef>
-        </p:style>
         <p:txBody>
           <a:bodyPr rtlCol="0" anchor="ctr" wrap="square" tIns="36576" bIns="36576"/>
           <a:lstStyle/>
@@ -3455,20 +3385,6 @@
           </a:ln>
           <a:effectLst/>
         </p:spPr>
-        <p:style>
-          <a:lnRef idx="1">
-            <a:schemeClr val="accent1"/>
-          </a:lnRef>
-          <a:fillRef idx="3">
-            <a:schemeClr val="accent1"/>
-          </a:fillRef>
-          <a:effectRef idx="2">
-            <a:schemeClr val="accent1"/>
-          </a:effectRef>
-          <a:fontRef idx="minor">
-            <a:schemeClr val="lt1"/>
-          </a:fontRef>
-        </p:style>
         <p:txBody>
           <a:bodyPr rtlCol="0" anchor="ctr" wrap="square" tIns="36576" bIns="36576"/>
           <a:lstStyle/>
@@ -3514,20 +3430,6 @@
           </a:ln>
           <a:effectLst/>
         </p:spPr>
-        <p:style>
-          <a:lnRef idx="1">
-            <a:schemeClr val="accent1"/>
-          </a:lnRef>
-          <a:fillRef idx="3">
-            <a:schemeClr val="accent1"/>
-          </a:fillRef>
-          <a:effectRef idx="2">
-            <a:schemeClr val="accent1"/>
-          </a:effectRef>
-          <a:fontRef idx="minor">
-            <a:schemeClr val="lt1"/>
-          </a:fontRef>
-        </p:style>
         <p:txBody>
           <a:bodyPr rtlCol="0" anchor="ctr" wrap="square" tIns="36576" bIns="36576"/>
           <a:lstStyle/>
@@ -3640,20 +3542,6 @@
           </a:ln>
           <a:effectLst/>
         </p:spPr>
-        <p:style>
-          <a:lnRef idx="1">
-            <a:schemeClr val="accent1"/>
-          </a:lnRef>
-          <a:fillRef idx="3">
-            <a:schemeClr val="accent1"/>
-          </a:fillRef>
-          <a:effectRef idx="2">
-            <a:schemeClr val="accent1"/>
-          </a:effectRef>
-          <a:fontRef idx="minor">
-            <a:schemeClr val="lt1"/>
-          </a:fontRef>
-        </p:style>
         <p:txBody>
           <a:bodyPr rtlCol="0" anchor="ctr" wrap="square" tIns="36576" bIns="36576"/>
           <a:lstStyle/>
@@ -3766,20 +3654,6 @@
           </a:ln>
           <a:effectLst/>
         </p:spPr>
-        <p:style>
-          <a:lnRef idx="1">
-            <a:schemeClr val="accent1"/>
-          </a:lnRef>
-          <a:fillRef idx="3">
-            <a:schemeClr val="accent1"/>
-          </a:fillRef>
-          <a:effectRef idx="2">
-            <a:schemeClr val="accent1"/>
-          </a:effectRef>
-          <a:fontRef idx="minor">
-            <a:schemeClr val="lt1"/>
-          </a:fontRef>
-        </p:style>
         <p:txBody>
           <a:bodyPr rtlCol="0" anchor="ctr" wrap="square" tIns="36576" bIns="36576"/>
           <a:lstStyle/>
@@ -3866,91 +3740,6 @@
                 <a:cs typeface="微软雅黑"/>
               </a:rPr>
               <a:t>评审对象是清单（数据），维护对象是 testcase/ 中的用例实现（代码）</a:t>
-            </a:r>
-          </a:p>
-        </p:txBody>
-      </p:sp>
-      <p:sp>
-        <p:nvSpPr>
-          <p:cNvPr id="18" name="Rectangle 17"/>
-          <p:cNvSpPr/>
-          <p:nvPr/>
-        </p:nvSpPr>
-        <p:spPr>
-          <a:xfrm>
-            <a:off x="566928" y="5193792"/>
-            <a:ext cx="11055096" cy="9525"/>
-          </a:xfrm>
-          <a:prstGeom prst="rect">
-            <a:avLst/>
-          </a:prstGeom>
-          <a:solidFill>
-            <a:srgbClr val="D9D5CF"/>
-          </a:solidFill>
-          <a:ln>
-            <a:noFill/>
-          </a:ln>
-          <a:effectLst/>
-        </p:spPr>
-        <p:style>
-          <a:lnRef idx="1">
-            <a:schemeClr val="accent1"/>
-          </a:lnRef>
-          <a:fillRef idx="3">
-            <a:schemeClr val="accent1"/>
-          </a:fillRef>
-          <a:effectRef idx="2">
-            <a:schemeClr val="accent1"/>
-          </a:effectRef>
-          <a:fontRef idx="minor">
-            <a:schemeClr val="lt1"/>
-          </a:fontRef>
-        </p:style>
-        <p:txBody>
-          <a:bodyPr rtlCol="0" anchor="ctr"/>
-          <a:lstStyle/>
-          <a:p>
-            <a:pPr algn="ctr"/>
-          </a:p>
-        </p:txBody>
-      </p:sp>
-      <p:sp>
-        <p:nvSpPr>
-          <p:cNvPr id="19" name="TextBox 18"/>
-          <p:cNvSpPr txBox="1"/>
-          <p:nvPr/>
-        </p:nvSpPr>
-        <p:spPr>
-          <a:xfrm>
-            <a:off x="566928" y="5358384"/>
-            <a:ext cx="11055096" cy="292608"/>
-          </a:xfrm>
-          <a:prstGeom prst="rect">
-            <a:avLst/>
-          </a:prstGeom>
-          <a:noFill/>
-        </p:spPr>
-        <p:txBody>
-          <a:bodyPr wrap="square" lIns="0" rIns="0" tIns="0" bIns="0" anchor="t">
-            <a:spAutoFit/>
-          </a:bodyPr>
-          <a:lstStyle/>
-          <a:p>
-            <a:pPr algn="l">
-              <a:spcAft>
-                <a:spcPts val="0"/>
-              </a:spcAft>
-            </a:pPr>
-            <a:r>
-              <a:rPr sz="1150" b="0">
-                <a:solidFill>
-                  <a:srgbClr val="1A1A1A"/>
-                </a:solidFill>
-                <a:latin typeface="微软雅黑"/>
-                <a:ea typeface="微软雅黑"/>
-                <a:cs typeface="微软雅黑"/>
-              </a:rPr>
-              <a:t>结构版本：五键 · 包结构：tps.json + testcase/ + resource/ + wheel/ · 2026-10-07</a:t>
             </a:r>
           </a:p>
         </p:txBody>
@@ -3981,8 +3770,8 @@
         </p:nvSpPr>
         <p:spPr>
           <a:xfrm>
-            <a:off x="566928" y="420624"/>
-            <a:ext cx="11055096" cy="274320"/>
+            <a:off x="566928" y="384048"/>
+            <a:ext cx="11055096" cy="365760"/>
           </a:xfrm>
           <a:prstGeom prst="rect">
             <a:avLst/>
@@ -4001,7 +3790,7 @@
               </a:spcAft>
             </a:pPr>
             <a:r>
-              <a:rPr sz="1600" b="1">
+              <a:rPr sz="1800" b="1">
                 <a:solidFill>
                   <a:srgbClr val="9B1C1C"/>
                 </a:solidFill>
@@ -4036,20 +3825,6 @@
           </a:ln>
           <a:effectLst/>
         </p:spPr>
-        <p:style>
-          <a:lnRef idx="1">
-            <a:schemeClr val="accent1"/>
-          </a:lnRef>
-          <a:fillRef idx="3">
-            <a:schemeClr val="accent1"/>
-          </a:fillRef>
-          <a:effectRef idx="2">
-            <a:schemeClr val="accent1"/>
-          </a:effectRef>
-          <a:fontRef idx="minor">
-            <a:schemeClr val="lt1"/>
-          </a:fontRef>
-        </p:style>
         <p:txBody>
           <a:bodyPr rtlCol="0" anchor="ctr" wrap="square" tIns="36576" bIns="36576"/>
           <a:lstStyle/>
@@ -4095,20 +3870,6 @@
           </a:ln>
           <a:effectLst/>
         </p:spPr>
-        <p:style>
-          <a:lnRef idx="1">
-            <a:schemeClr val="accent1"/>
-          </a:lnRef>
-          <a:fillRef idx="3">
-            <a:schemeClr val="accent1"/>
-          </a:fillRef>
-          <a:effectRef idx="2">
-            <a:schemeClr val="accent1"/>
-          </a:effectRef>
-          <a:fontRef idx="minor">
-            <a:schemeClr val="lt1"/>
-          </a:fontRef>
-        </p:style>
         <p:txBody>
           <a:bodyPr rtlCol="0" anchor="ctr"/>
           <a:lstStyle/>
@@ -4139,20 +3900,6 @@
           </a:ln>
           <a:effectLst/>
         </p:spPr>
-        <p:style>
-          <a:lnRef idx="1">
-            <a:schemeClr val="accent1"/>
-          </a:lnRef>
-          <a:fillRef idx="3">
-            <a:schemeClr val="accent1"/>
-          </a:fillRef>
-          <a:effectRef idx="2">
-            <a:schemeClr val="accent1"/>
-          </a:effectRef>
-          <a:fontRef idx="minor">
-            <a:schemeClr val="lt1"/>
-          </a:fontRef>
-        </p:style>
         <p:txBody>
           <a:bodyPr rtlCol="0" anchor="ctr" wrap="square" lIns="54864" rIns="54864" tIns="36576" bIns="36576"/>
           <a:lstStyle/>
@@ -4216,20 +3963,6 @@
           </a:ln>
           <a:effectLst/>
         </p:spPr>
-        <p:style>
-          <a:lnRef idx="1">
-            <a:schemeClr val="accent1"/>
-          </a:lnRef>
-          <a:fillRef idx="3">
-            <a:schemeClr val="accent1"/>
-          </a:fillRef>
-          <a:effectRef idx="2">
-            <a:schemeClr val="accent1"/>
-          </a:effectRef>
-          <a:fontRef idx="minor">
-            <a:schemeClr val="lt1"/>
-          </a:fontRef>
-        </p:style>
         <p:txBody>
           <a:bodyPr rtlCol="0" anchor="ctr"/>
           <a:lstStyle/>
@@ -4260,20 +3993,6 @@
           </a:ln>
           <a:effectLst/>
         </p:spPr>
-        <p:style>
-          <a:lnRef idx="1">
-            <a:schemeClr val="accent1"/>
-          </a:lnRef>
-          <a:fillRef idx="3">
-            <a:schemeClr val="accent1"/>
-          </a:fillRef>
-          <a:effectRef idx="2">
-            <a:schemeClr val="accent1"/>
-          </a:effectRef>
-          <a:fontRef idx="minor">
-            <a:schemeClr val="lt1"/>
-          </a:fontRef>
-        </p:style>
         <p:txBody>
           <a:bodyPr rtlCol="0" anchor="ctr" wrap="square" lIns="54864" rIns="54864" tIns="36576" bIns="36576"/>
           <a:lstStyle/>
@@ -4337,20 +4056,6 @@
           </a:ln>
           <a:effectLst/>
         </p:spPr>
-        <p:style>
-          <a:lnRef idx="1">
-            <a:schemeClr val="accent1"/>
-          </a:lnRef>
-          <a:fillRef idx="3">
-            <a:schemeClr val="accent1"/>
-          </a:fillRef>
-          <a:effectRef idx="2">
-            <a:schemeClr val="accent1"/>
-          </a:effectRef>
-          <a:fontRef idx="minor">
-            <a:schemeClr val="lt1"/>
-          </a:fontRef>
-        </p:style>
         <p:txBody>
           <a:bodyPr rtlCol="0" anchor="ctr"/>
           <a:lstStyle/>
@@ -4381,20 +4086,6 @@
           </a:ln>
           <a:effectLst/>
         </p:spPr>
-        <p:style>
-          <a:lnRef idx="1">
-            <a:schemeClr val="accent1"/>
-          </a:lnRef>
-          <a:fillRef idx="3">
-            <a:schemeClr val="accent1"/>
-          </a:fillRef>
-          <a:effectRef idx="2">
-            <a:schemeClr val="accent1"/>
-          </a:effectRef>
-          <a:fontRef idx="minor">
-            <a:schemeClr val="lt1"/>
-          </a:fontRef>
-        </p:style>
         <p:txBody>
           <a:bodyPr rtlCol="0" anchor="ctr" wrap="square" lIns="54864" rIns="54864" tIns="36576" bIns="36576"/>
           <a:lstStyle/>
@@ -4458,20 +4149,6 @@
           </a:ln>
           <a:effectLst/>
         </p:spPr>
-        <p:style>
-          <a:lnRef idx="1">
-            <a:schemeClr val="accent1"/>
-          </a:lnRef>
-          <a:fillRef idx="3">
-            <a:schemeClr val="accent1"/>
-          </a:fillRef>
-          <a:effectRef idx="2">
-            <a:schemeClr val="accent1"/>
-          </a:effectRef>
-          <a:fontRef idx="minor">
-            <a:schemeClr val="lt1"/>
-          </a:fontRef>
-        </p:style>
         <p:txBody>
           <a:bodyPr rtlCol="0" anchor="ctr"/>
           <a:lstStyle/>
@@ -4502,20 +4179,6 @@
           </a:ln>
           <a:effectLst/>
         </p:spPr>
-        <p:style>
-          <a:lnRef idx="1">
-            <a:schemeClr val="accent1"/>
-          </a:lnRef>
-          <a:fillRef idx="3">
-            <a:schemeClr val="accent1"/>
-          </a:fillRef>
-          <a:effectRef idx="2">
-            <a:schemeClr val="accent1"/>
-          </a:effectRef>
-          <a:fontRef idx="minor">
-            <a:schemeClr val="lt1"/>
-          </a:fontRef>
-        </p:style>
         <p:txBody>
           <a:bodyPr rtlCol="0" anchor="ctr" wrap="square" lIns="54864" rIns="54864" tIns="36576" bIns="36576"/>
           <a:lstStyle/>
@@ -4579,20 +4242,6 @@
           </a:ln>
           <a:effectLst/>
         </p:spPr>
-        <p:style>
-          <a:lnRef idx="1">
-            <a:schemeClr val="accent1"/>
-          </a:lnRef>
-          <a:fillRef idx="3">
-            <a:schemeClr val="accent1"/>
-          </a:fillRef>
-          <a:effectRef idx="2">
-            <a:schemeClr val="accent1"/>
-          </a:effectRef>
-          <a:fontRef idx="minor">
-            <a:schemeClr val="lt1"/>
-          </a:fontRef>
-        </p:style>
         <p:txBody>
           <a:bodyPr rtlCol="0" anchor="ctr"/>
           <a:lstStyle/>
@@ -4623,20 +4272,6 @@
           </a:ln>
           <a:effectLst/>
         </p:spPr>
-        <p:style>
-          <a:lnRef idx="1">
-            <a:schemeClr val="accent1"/>
-          </a:lnRef>
-          <a:fillRef idx="3">
-            <a:schemeClr val="accent1"/>
-          </a:fillRef>
-          <a:effectRef idx="2">
-            <a:schemeClr val="accent1"/>
-          </a:effectRef>
-          <a:fontRef idx="minor">
-            <a:schemeClr val="lt1"/>
-          </a:fontRef>
-        </p:style>
         <p:txBody>
           <a:bodyPr rtlCol="0" anchor="ctr" wrap="square" lIns="54864" rIns="54864" tIns="36576" bIns="36576"/>
           <a:lstStyle/>
@@ -4700,20 +4335,6 @@
           </a:ln>
           <a:effectLst/>
         </p:spPr>
-        <p:style>
-          <a:lnRef idx="1">
-            <a:schemeClr val="accent1"/>
-          </a:lnRef>
-          <a:fillRef idx="3">
-            <a:schemeClr val="accent1"/>
-          </a:fillRef>
-          <a:effectRef idx="2">
-            <a:schemeClr val="accent1"/>
-          </a:effectRef>
-          <a:fontRef idx="minor">
-            <a:schemeClr val="lt1"/>
-          </a:fontRef>
-        </p:style>
         <p:txBody>
           <a:bodyPr rtlCol="0" anchor="ctr"/>
           <a:lstStyle/>
@@ -4744,20 +4365,6 @@
           </a:ln>
           <a:effectLst/>
         </p:spPr>
-        <p:style>
-          <a:lnRef idx="1">
-            <a:schemeClr val="accent1"/>
-          </a:lnRef>
-          <a:fillRef idx="3">
-            <a:schemeClr val="accent1"/>
-          </a:fillRef>
-          <a:effectRef idx="2">
-            <a:schemeClr val="accent1"/>
-          </a:effectRef>
-          <a:fontRef idx="minor">
-            <a:schemeClr val="lt1"/>
-          </a:fontRef>
-        </p:style>
         <p:txBody>
           <a:bodyPr rtlCol="0" anchor="ctr" wrap="square" lIns="54864" rIns="54864" tIns="36576" bIns="36576"/>
           <a:lstStyle/>
@@ -4821,20 +4428,6 @@
           </a:ln>
           <a:effectLst/>
         </p:spPr>
-        <p:style>
-          <a:lnRef idx="1">
-            <a:schemeClr val="accent1"/>
-          </a:lnRef>
-          <a:fillRef idx="3">
-            <a:schemeClr val="accent1"/>
-          </a:fillRef>
-          <a:effectRef idx="2">
-            <a:schemeClr val="accent1"/>
-          </a:effectRef>
-          <a:fontRef idx="minor">
-            <a:schemeClr val="lt1"/>
-          </a:fontRef>
-        </p:style>
         <p:txBody>
           <a:bodyPr rtlCol="0" anchor="ctr"/>
           <a:lstStyle/>
@@ -4865,20 +4458,6 @@
           </a:ln>
           <a:effectLst/>
         </p:spPr>
-        <p:style>
-          <a:lnRef idx="1">
-            <a:schemeClr val="accent1"/>
-          </a:lnRef>
-          <a:fillRef idx="3">
-            <a:schemeClr val="accent1"/>
-          </a:fillRef>
-          <a:effectRef idx="2">
-            <a:schemeClr val="accent1"/>
-          </a:effectRef>
-          <a:fontRef idx="minor">
-            <a:schemeClr val="lt1"/>
-          </a:fontRef>
-        </p:style>
         <p:txBody>
           <a:bodyPr rtlCol="0" anchor="ctr" wrap="square" lIns="54864" rIns="54864" tIns="36576" bIns="36576"/>
           <a:lstStyle/>
@@ -4942,20 +4521,6 @@
           </a:ln>
           <a:effectLst/>
         </p:spPr>
-        <p:style>
-          <a:lnRef idx="1">
-            <a:schemeClr val="accent1"/>
-          </a:lnRef>
-          <a:fillRef idx="3">
-            <a:schemeClr val="accent1"/>
-          </a:fillRef>
-          <a:effectRef idx="2">
-            <a:schemeClr val="accent1"/>
-          </a:effectRef>
-          <a:fontRef idx="minor">
-            <a:schemeClr val="lt1"/>
-          </a:fontRef>
-        </p:style>
         <p:txBody>
           <a:bodyPr rtlCol="0" anchor="ctr"/>
           <a:lstStyle/>
@@ -4986,20 +4551,6 @@
           </a:ln>
           <a:effectLst/>
         </p:spPr>
-        <p:style>
-          <a:lnRef idx="1">
-            <a:schemeClr val="accent1"/>
-          </a:lnRef>
-          <a:fillRef idx="3">
-            <a:schemeClr val="accent1"/>
-          </a:fillRef>
-          <a:effectRef idx="2">
-            <a:schemeClr val="accent1"/>
-          </a:effectRef>
-          <a:fontRef idx="minor">
-            <a:schemeClr val="lt1"/>
-          </a:fontRef>
-        </p:style>
         <p:txBody>
           <a:bodyPr rtlCol="0" anchor="ctr" wrap="square" lIns="54864" rIns="54864" tIns="36576" bIns="36576"/>
           <a:lstStyle/>
@@ -5264,7 +4815,7 @@
                           <a:ea typeface="微软雅黑"/>
                           <a:cs typeface="微软雅黑"/>
                         </a:rPr>
-                        <a:t>adaptation.sn · channels</a:t>
+                        <a:t>adaptation.sn · multi_up</a:t>
                       </a:r>
                     </a:p>
                   </a:txBody>
@@ -5294,7 +4845,7 @@
                           <a:ea typeface="微软雅黑"/>
                           <a:cs typeface="微软雅黑"/>
                         </a:rPr>
-                        <a:t>SN 形态校验；位号与信号源绑定，判定结果归属到正确的 SN</a:t>
+                        <a:t>SN 形态校验；扫到的 SN 与槽位绑定，少扫记为空位，判定结果归属到正确的 SN</a:t>
                       </a:r>
                     </a:p>
                   </a:txBody>
@@ -5542,7 +5093,7 @@
                           <a:ea typeface="微软雅黑"/>
                           <a:cs typeface="微软雅黑"/>
                         </a:rPr>
-                        <a:t>按书写顺序逐条执行；per_sn 逐位号展开；manual 条目弹窗确认；step 条目跑完等 next</a:t>
+                        <a:t>按书写顺序逐条执行；per_sn 逐槽位展开（空位跳过）；manual 条目弹窗确认；step 条目跑完等 next</a:t>
                       </a:r>
                     </a:p>
                   </a:txBody>
@@ -5651,8 +5202,8 @@
         </p:nvSpPr>
         <p:spPr>
           <a:xfrm>
-            <a:off x="566928" y="420624"/>
-            <a:ext cx="11055096" cy="274320"/>
+            <a:off x="566928" y="384048"/>
+            <a:ext cx="11055096" cy="365760"/>
           </a:xfrm>
           <a:prstGeom prst="rect">
             <a:avLst/>
@@ -5671,7 +5222,7 @@
               </a:spcAft>
             </a:pPr>
             <a:r>
-              <a:rPr sz="1600" b="1">
+              <a:rPr sz="1800" b="1">
                 <a:solidFill>
                   <a:srgbClr val="9B1C1C"/>
                 </a:solidFill>
@@ -5706,20 +5257,6 @@
           </a:ln>
           <a:effectLst/>
         </p:spPr>
-        <p:style>
-          <a:lnRef idx="1">
-            <a:schemeClr val="accent1"/>
-          </a:lnRef>
-          <a:fillRef idx="3">
-            <a:schemeClr val="accent1"/>
-          </a:fillRef>
-          <a:effectRef idx="2">
-            <a:schemeClr val="accent1"/>
-          </a:effectRef>
-          <a:fontRef idx="minor">
-            <a:schemeClr val="lt1"/>
-          </a:fontRef>
-        </p:style>
         <p:txBody>
           <a:bodyPr rtlCol="0" anchor="ctr" wrap="square" tIns="36576" bIns="36576"/>
           <a:lstStyle/>
@@ -5765,20 +5302,6 @@
           </a:ln>
           <a:effectLst/>
         </p:spPr>
-        <p:style>
-          <a:lnRef idx="1">
-            <a:schemeClr val="accent1"/>
-          </a:lnRef>
-          <a:fillRef idx="3">
-            <a:schemeClr val="accent1"/>
-          </a:fillRef>
-          <a:effectRef idx="2">
-            <a:schemeClr val="accent1"/>
-          </a:effectRef>
-          <a:fontRef idx="minor">
-            <a:schemeClr val="lt1"/>
-          </a:fontRef>
-        </p:style>
         <p:txBody>
           <a:bodyPr rtlCol="0" anchor="ctr"/>
           <a:lstStyle/>
@@ -5809,20 +5332,6 @@
           </a:ln>
           <a:effectLst/>
         </p:spPr>
-        <p:style>
-          <a:lnRef idx="1">
-            <a:schemeClr val="accent1"/>
-          </a:lnRef>
-          <a:fillRef idx="3">
-            <a:schemeClr val="accent1"/>
-          </a:fillRef>
-          <a:effectRef idx="2">
-            <a:schemeClr val="accent1"/>
-          </a:effectRef>
-          <a:fontRef idx="minor">
-            <a:schemeClr val="lt1"/>
-          </a:fontRef>
-        </p:style>
         <p:txBody>
           <a:bodyPr rtlCol="0" anchor="ctr" wrap="square" tIns="36576" bIns="36576"/>
           <a:lstStyle/>
@@ -6307,8 +5816,8 @@
         </p:nvSpPr>
         <p:spPr>
           <a:xfrm>
-            <a:off x="566928" y="420624"/>
-            <a:ext cx="11055096" cy="274320"/>
+            <a:off x="566928" y="384048"/>
+            <a:ext cx="11055096" cy="365760"/>
           </a:xfrm>
           <a:prstGeom prst="rect">
             <a:avLst/>
@@ -6327,7 +5836,7 @@
               </a:spcAft>
             </a:pPr>
             <a:r>
-              <a:rPr sz="1600" b="1">
+              <a:rPr sz="1800" b="1">
                 <a:solidFill>
                   <a:srgbClr val="9B1C1C"/>
                 </a:solidFill>
@@ -6362,20 +5871,6 @@
           </a:ln>
           <a:effectLst/>
         </p:spPr>
-        <p:style>
-          <a:lnRef idx="1">
-            <a:schemeClr val="accent1"/>
-          </a:lnRef>
-          <a:fillRef idx="3">
-            <a:schemeClr val="accent1"/>
-          </a:fillRef>
-          <a:effectRef idx="2">
-            <a:schemeClr val="accent1"/>
-          </a:effectRef>
-          <a:fontRef idx="minor">
-            <a:schemeClr val="lt1"/>
-          </a:fontRef>
-        </p:style>
         <p:txBody>
           <a:bodyPr rtlCol="0" anchor="ctr" wrap="square" tIns="36576" bIns="36576"/>
           <a:lstStyle/>
@@ -6421,20 +5916,6 @@
           </a:ln>
           <a:effectLst/>
         </p:spPr>
-        <p:style>
-          <a:lnRef idx="1">
-            <a:schemeClr val="accent1"/>
-          </a:lnRef>
-          <a:fillRef idx="3">
-            <a:schemeClr val="accent1"/>
-          </a:fillRef>
-          <a:effectRef idx="2">
-            <a:schemeClr val="accent1"/>
-          </a:effectRef>
-          <a:fontRef idx="minor">
-            <a:schemeClr val="lt1"/>
-          </a:fontRef>
-        </p:style>
         <p:txBody>
           <a:bodyPr rtlCol="0" anchor="ctr"/>
           <a:lstStyle/>
@@ -6493,8 +5974,8 @@
         </p:nvSpPr>
         <p:spPr>
           <a:xfrm>
-            <a:off x="566928" y="420624"/>
-            <a:ext cx="11055096" cy="274320"/>
+            <a:off x="566928" y="384048"/>
+            <a:ext cx="11055096" cy="365760"/>
           </a:xfrm>
           <a:prstGeom prst="rect">
             <a:avLst/>
@@ -6513,7 +5994,7 @@
               </a:spcAft>
             </a:pPr>
             <a:r>
-              <a:rPr sz="1600" b="1">
+              <a:rPr sz="1800" b="1">
                 <a:solidFill>
                   <a:srgbClr val="9B1C1C"/>
                 </a:solidFill>
@@ -6548,20 +6029,6 @@
           </a:ln>
           <a:effectLst/>
         </p:spPr>
-        <p:style>
-          <a:lnRef idx="1">
-            <a:schemeClr val="accent1"/>
-          </a:lnRef>
-          <a:fillRef idx="3">
-            <a:schemeClr val="accent1"/>
-          </a:fillRef>
-          <a:effectRef idx="2">
-            <a:schemeClr val="accent1"/>
-          </a:effectRef>
-          <a:fontRef idx="minor">
-            <a:schemeClr val="lt1"/>
-          </a:fontRef>
-        </p:style>
         <p:txBody>
           <a:bodyPr rtlCol="0" anchor="ctr" wrap="square" tIns="36576" bIns="36576"/>
           <a:lstStyle/>
@@ -6607,20 +6074,6 @@
           </a:ln>
           <a:effectLst/>
         </p:spPr>
-        <p:style>
-          <a:lnRef idx="1">
-            <a:schemeClr val="accent1"/>
-          </a:lnRef>
-          <a:fillRef idx="3">
-            <a:schemeClr val="accent1"/>
-          </a:fillRef>
-          <a:effectRef idx="2">
-            <a:schemeClr val="accent1"/>
-          </a:effectRef>
-          <a:fontRef idx="minor">
-            <a:schemeClr val="lt1"/>
-          </a:fontRef>
-        </p:style>
         <p:txBody>
           <a:bodyPr rtlCol="0" anchor="ctr"/>
           <a:lstStyle/>
@@ -6713,14 +6166,137 @@
       </p:sp>
       <p:sp>
         <p:nvSpPr>
-          <p:cNvPr id="7" name="Rectangle 6"/>
+          <p:cNvPr id="7" name="TextBox 6"/>
+          <p:cNvSpPr txBox="1"/>
+          <p:nvPr/>
+        </p:nvSpPr>
+        <p:spPr>
+          <a:xfrm>
+            <a:off x="566928" y="2816352"/>
+            <a:ext cx="2926080" cy="256032"/>
+          </a:xfrm>
+          <a:prstGeom prst="rect">
+            <a:avLst/>
+          </a:prstGeom>
+          <a:noFill/>
+        </p:spPr>
+        <p:txBody>
+          <a:bodyPr wrap="square" lIns="0" rIns="0" tIns="0" bIns="0" anchor="t">
+            <a:spAutoFit/>
+          </a:bodyPr>
+          <a:lstStyle/>
+          <a:p>
+            <a:pPr algn="l">
+              <a:spcAft>
+                <a:spcPts val="0"/>
+              </a:spcAft>
+            </a:pPr>
+            <a:r>
+              <a:rPr sz="1100" b="1">
+                <a:solidFill>
+                  <a:srgbClr val="002FA7"/>
+                </a:solidFill>
+                <a:latin typeface="微软雅黑"/>
+                <a:ea typeface="微软雅黑"/>
+                <a:cs typeface="微软雅黑"/>
+              </a:rPr>
+              <a:t>版本号三段含义（从左到右）</a:t>
+            </a:r>
+          </a:p>
+        </p:txBody>
+      </p:sp>
+      <p:sp>
+        <p:nvSpPr>
+          <p:cNvPr id="8" name="TextBox 7"/>
+          <p:cNvSpPr txBox="1"/>
+          <p:nvPr/>
+        </p:nvSpPr>
+        <p:spPr>
+          <a:xfrm>
+            <a:off x="566928" y="3163824"/>
+            <a:ext cx="676656" cy="420624"/>
+          </a:xfrm>
+          <a:prstGeom prst="rect">
+            <a:avLst/>
+          </a:prstGeom>
+          <a:noFill/>
+        </p:spPr>
+        <p:txBody>
+          <a:bodyPr wrap="square" lIns="0" rIns="0" tIns="0" bIns="0" anchor="t">
+            <a:spAutoFit/>
+          </a:bodyPr>
+          <a:lstStyle/>
+          <a:p>
+            <a:pPr algn="l">
+              <a:spcAft>
+                <a:spcPts val="0"/>
+              </a:spcAft>
+            </a:pPr>
+            <a:r>
+              <a:rPr sz="1050" b="1">
+                <a:solidFill>
+                  <a:srgbClr val="002FA7"/>
+                </a:solidFill>
+                <a:latin typeface="微软雅黑"/>
+                <a:ea typeface="微软雅黑"/>
+                <a:cs typeface="微软雅黑"/>
+              </a:rPr>
+              <a:t>V1.0.0</a:t>
+            </a:r>
+          </a:p>
+        </p:txBody>
+      </p:sp>
+      <p:sp>
+        <p:nvSpPr>
+          <p:cNvPr id="9" name="TextBox 8"/>
+          <p:cNvSpPr txBox="1"/>
+          <p:nvPr/>
+        </p:nvSpPr>
+        <p:spPr>
+          <a:xfrm>
+            <a:off x="1335024" y="3163824"/>
+            <a:ext cx="2157984" cy="420624"/>
+          </a:xfrm>
+          <a:prstGeom prst="rect">
+            <a:avLst/>
+          </a:prstGeom>
+          <a:noFill/>
+        </p:spPr>
+        <p:txBody>
+          <a:bodyPr wrap="square" lIns="0" rIns="0" tIns="0" bIns="0" anchor="t">
+            <a:spAutoFit/>
+          </a:bodyPr>
+          <a:lstStyle/>
+          <a:p>
+            <a:pPr algn="l">
+              <a:spcAft>
+                <a:spcPts val="0"/>
+              </a:spcAft>
+            </a:pPr>
+            <a:r>
+              <a:rPr sz="1050" b="0">
+                <a:solidFill>
+                  <a:srgbClr val="1A1A1A"/>
+                </a:solidFill>
+                <a:latin typeface="微软雅黑"/>
+                <a:ea typeface="微软雅黑"/>
+                <a:cs typeface="微软雅黑"/>
+              </a:rPr>
+              <a:t>1 = 项目号</a:t>
+            </a:r>
+          </a:p>
+        </p:txBody>
+      </p:sp>
+      <p:sp>
+        <p:nvSpPr>
+          <p:cNvPr id="10" name="Rectangle 9"/>
           <p:cNvSpPr/>
           <p:nvPr/>
         </p:nvSpPr>
         <p:spPr>
           <a:xfrm>
-            <a:off x="3584448" y="1682496"/>
-            <a:ext cx="12801" cy="4064000"/>
+            <a:off x="566928" y="3547872"/>
+            <a:ext cx="2926080" cy="6350"/>
           </a:xfrm>
           <a:prstGeom prst="rect">
             <a:avLst/>
@@ -6733,20 +6309,6 @@
           </a:ln>
           <a:effectLst/>
         </p:spPr>
-        <p:style>
-          <a:lnRef idx="1">
-            <a:schemeClr val="accent1"/>
-          </a:lnRef>
-          <a:fillRef idx="3">
-            <a:schemeClr val="accent1"/>
-          </a:fillRef>
-          <a:effectRef idx="2">
-            <a:schemeClr val="accent1"/>
-          </a:effectRef>
-          <a:fontRef idx="minor">
-            <a:schemeClr val="lt1"/>
-          </a:fontRef>
-        </p:style>
         <p:txBody>
           <a:bodyPr rtlCol="0" anchor="ctr"/>
           <a:lstStyle/>
@@ -6757,14 +6319,14 @@
       </p:sp>
       <p:sp>
         <p:nvSpPr>
-          <p:cNvPr id="8" name="TextBox 7"/>
+          <p:cNvPr id="11" name="TextBox 10"/>
           <p:cNvSpPr txBox="1"/>
           <p:nvPr/>
         </p:nvSpPr>
         <p:spPr>
           <a:xfrm>
-            <a:off x="3968496" y="1682496"/>
-            <a:ext cx="1920240" cy="384048"/>
+            <a:off x="566928" y="3657600"/>
+            <a:ext cx="676656" cy="420624"/>
           </a:xfrm>
           <a:prstGeom prst="rect">
             <a:avLst/>
@@ -6783,7 +6345,7 @@
               </a:spcAft>
             </a:pPr>
             <a:r>
-              <a:rPr sz="1350" b="1">
+              <a:rPr sz="1050" b="1">
                 <a:solidFill>
                   <a:srgbClr val="002FA7"/>
                 </a:solidFill>
@@ -6791,21 +6353,21 @@
                 <a:ea typeface="微软雅黑"/>
                 <a:cs typeface="微软雅黑"/>
               </a:rPr>
-              <a:t>version</a:t>
-            </a:r>
-          </a:p>
-        </p:txBody>
-      </p:sp>
-      <p:sp>
-        <p:nvSpPr>
-          <p:cNvPr id="9" name="TextBox 8"/>
+              <a:t>V0.1.0</a:t>
+            </a:r>
+          </a:p>
+        </p:txBody>
+      </p:sp>
+      <p:sp>
+        <p:nvSpPr>
+          <p:cNvPr id="12" name="TextBox 11"/>
           <p:cNvSpPr txBox="1"/>
           <p:nvPr/>
         </p:nvSpPr>
         <p:spPr>
           <a:xfrm>
-            <a:off x="5980175" y="1682496"/>
-            <a:ext cx="5641848" cy="384048"/>
+            <a:off x="1335024" y="3657600"/>
+            <a:ext cx="2157984" cy="420624"/>
           </a:xfrm>
           <a:prstGeom prst="rect">
             <a:avLst/>
@@ -6824,7 +6386,7 @@
               </a:spcAft>
             </a:pPr>
             <a:r>
-              <a:rPr sz="1350" b="0">
+              <a:rPr sz="1050" b="0">
                 <a:solidFill>
                   <a:srgbClr val="1A1A1A"/>
                 </a:solidFill>
@@ -6832,21 +6394,21 @@
                 <a:ea typeface="微软雅黑"/>
                 <a:cs typeface="微软雅黑"/>
               </a:rPr>
-              <a:t>基线版本号，报告据此追溯判据版本</a:t>
-            </a:r>
-          </a:p>
-        </p:txBody>
-      </p:sp>
-      <p:sp>
-        <p:nvSpPr>
-          <p:cNvPr id="10" name="Rectangle 9"/>
+              <a:t>1 = 不可兼容更改的版本号增加</a:t>
+            </a:r>
+          </a:p>
+        </p:txBody>
+      </p:sp>
+      <p:sp>
+        <p:nvSpPr>
+          <p:cNvPr id="13" name="Rectangle 12"/>
           <p:cNvSpPr/>
           <p:nvPr/>
         </p:nvSpPr>
         <p:spPr>
           <a:xfrm>
-            <a:off x="3968496" y="2029967"/>
-            <a:ext cx="7653527" cy="6350"/>
+            <a:off x="566928" y="4041648"/>
+            <a:ext cx="2926080" cy="6350"/>
           </a:xfrm>
           <a:prstGeom prst="rect">
             <a:avLst/>
@@ -6859,20 +6421,6 @@
           </a:ln>
           <a:effectLst/>
         </p:spPr>
-        <p:style>
-          <a:lnRef idx="1">
-            <a:schemeClr val="accent1"/>
-          </a:lnRef>
-          <a:fillRef idx="3">
-            <a:schemeClr val="accent1"/>
-          </a:fillRef>
-          <a:effectRef idx="2">
-            <a:schemeClr val="accent1"/>
-          </a:effectRef>
-          <a:fontRef idx="minor">
-            <a:schemeClr val="lt1"/>
-          </a:fontRef>
-        </p:style>
         <p:txBody>
           <a:bodyPr rtlCol="0" anchor="ctr"/>
           <a:lstStyle/>
@@ -6883,14 +6431,14 @@
       </p:sp>
       <p:sp>
         <p:nvSpPr>
-          <p:cNvPr id="11" name="TextBox 10"/>
+          <p:cNvPr id="14" name="TextBox 13"/>
           <p:cNvSpPr txBox="1"/>
           <p:nvPr/>
         </p:nvSpPr>
         <p:spPr>
           <a:xfrm>
-            <a:off x="3968496" y="2139696"/>
-            <a:ext cx="1920240" cy="384048"/>
+            <a:off x="566928" y="4151376"/>
+            <a:ext cx="676656" cy="420624"/>
           </a:xfrm>
           <a:prstGeom prst="rect">
             <a:avLst/>
@@ -6909,7 +6457,7 @@
               </a:spcAft>
             </a:pPr>
             <a:r>
-              <a:rPr sz="1350" b="1">
+              <a:rPr sz="1050" b="1">
                 <a:solidFill>
                   <a:srgbClr val="002FA7"/>
                 </a:solidFill>
@@ -6917,21 +6465,21 @@
                 <a:ea typeface="微软雅黑"/>
                 <a:cs typeface="微软雅黑"/>
               </a:rPr>
-              <a:t>status</a:t>
-            </a:r>
-          </a:p>
-        </p:txBody>
-      </p:sp>
-      <p:sp>
-        <p:nvSpPr>
-          <p:cNvPr id="12" name="TextBox 11"/>
+              <a:t>V0.0.1</a:t>
+            </a:r>
+          </a:p>
+        </p:txBody>
+      </p:sp>
+      <p:sp>
+        <p:nvSpPr>
+          <p:cNvPr id="15" name="TextBox 14"/>
           <p:cNvSpPr txBox="1"/>
           <p:nvPr/>
         </p:nvSpPr>
         <p:spPr>
           <a:xfrm>
-            <a:off x="5980175" y="2139696"/>
-            <a:ext cx="5641848" cy="384048"/>
+            <a:off x="1335024" y="4151376"/>
+            <a:ext cx="2157984" cy="420624"/>
           </a:xfrm>
           <a:prstGeom prst="rect">
             <a:avLst/>
@@ -6950,7 +6498,7 @@
               </a:spcAft>
             </a:pPr>
             <a:r>
-              <a:rPr sz="1350" b="0">
+              <a:rPr sz="1050" b="0">
                 <a:solidFill>
                   <a:srgbClr val="1A1A1A"/>
                 </a:solidFill>
@@ -6958,21 +6506,21 @@
                 <a:ea typeface="微软雅黑"/>
                 <a:cs typeface="微软雅黑"/>
               </a:rPr>
-              <a:t>draft / review / released</a:t>
-            </a:r>
-          </a:p>
-        </p:txBody>
-      </p:sp>
-      <p:sp>
-        <p:nvSpPr>
-          <p:cNvPr id="13" name="Rectangle 12"/>
+              <a:t>1 = 可兼容更改的版本号增加</a:t>
+            </a:r>
+          </a:p>
+        </p:txBody>
+      </p:sp>
+      <p:sp>
+        <p:nvSpPr>
+          <p:cNvPr id="16" name="Rectangle 15"/>
           <p:cNvSpPr/>
           <p:nvPr/>
         </p:nvSpPr>
         <p:spPr>
           <a:xfrm>
-            <a:off x="3968496" y="2487168"/>
-            <a:ext cx="7653527" cy="6350"/>
+            <a:off x="566928" y="4535424"/>
+            <a:ext cx="2926080" cy="6350"/>
           </a:xfrm>
           <a:prstGeom prst="rect">
             <a:avLst/>
@@ -6985,20 +6533,6 @@
           </a:ln>
           <a:effectLst/>
         </p:spPr>
-        <p:style>
-          <a:lnRef idx="1">
-            <a:schemeClr val="accent1"/>
-          </a:lnRef>
-          <a:fillRef idx="3">
-            <a:schemeClr val="accent1"/>
-          </a:fillRef>
-          <a:effectRef idx="2">
-            <a:schemeClr val="accent1"/>
-          </a:effectRef>
-          <a:fontRef idx="minor">
-            <a:schemeClr val="lt1"/>
-          </a:fontRef>
-        </p:style>
         <p:txBody>
           <a:bodyPr rtlCol="0" anchor="ctr"/>
           <a:lstStyle/>
@@ -7009,14 +6543,14 @@
       </p:sp>
       <p:sp>
         <p:nvSpPr>
-          <p:cNvPr id="14" name="TextBox 13"/>
+          <p:cNvPr id="17" name="TextBox 16"/>
           <p:cNvSpPr txBox="1"/>
           <p:nvPr/>
         </p:nvSpPr>
         <p:spPr>
           <a:xfrm>
-            <a:off x="3968496" y="2596896"/>
-            <a:ext cx="1920240" cy="384048"/>
+            <a:off x="566928" y="4645152"/>
+            <a:ext cx="676656" cy="420624"/>
           </a:xfrm>
           <a:prstGeom prst="rect">
             <a:avLst/>
@@ -7035,7 +6569,7 @@
               </a:spcAft>
             </a:pPr>
             <a:r>
-              <a:rPr sz="1350" b="1">
+              <a:rPr sz="1050" b="1">
                 <a:solidFill>
                   <a:srgbClr val="002FA7"/>
                 </a:solidFill>
@@ -7043,21 +6577,21 @@
                 <a:ea typeface="微软雅黑"/>
                 <a:cs typeface="微软雅黑"/>
               </a:rPr>
-              <a:t>author</a:t>
-            </a:r>
-          </a:p>
-        </p:txBody>
-      </p:sp>
-      <p:sp>
-        <p:nvSpPr>
-          <p:cNvPr id="15" name="TextBox 14"/>
+              <a:t>每段上限</a:t>
+            </a:r>
+          </a:p>
+        </p:txBody>
+      </p:sp>
+      <p:sp>
+        <p:nvSpPr>
+          <p:cNvPr id="18" name="TextBox 17"/>
           <p:cNvSpPr txBox="1"/>
           <p:nvPr/>
         </p:nvSpPr>
         <p:spPr>
           <a:xfrm>
-            <a:off x="5980175" y="2596896"/>
-            <a:ext cx="5641848" cy="384048"/>
+            <a:off x="1335024" y="4645152"/>
+            <a:ext cx="2157984" cy="420624"/>
           </a:xfrm>
           <a:prstGeom prst="rect">
             <a:avLst/>
@@ -7076,7 +6610,7 @@
               </a:spcAft>
             </a:pPr>
             <a:r>
-              <a:rPr sz="1350" b="0">
+              <a:rPr sz="1050" b="0">
                 <a:solidFill>
                   <a:srgbClr val="1A1A1A"/>
                 </a:solidFill>
@@ -7084,21 +6618,21 @@
                 <a:ea typeface="微软雅黑"/>
                 <a:cs typeface="微软雅黑"/>
               </a:rPr>
-              <a:t>责任人，判据谁定的</a:t>
-            </a:r>
-          </a:p>
-        </p:txBody>
-      </p:sp>
-      <p:sp>
-        <p:nvSpPr>
-          <p:cNvPr id="16" name="Rectangle 15"/>
+              <a:t>999（各段独立，0–999）</a:t>
+            </a:r>
+          </a:p>
+        </p:txBody>
+      </p:sp>
+      <p:sp>
+        <p:nvSpPr>
+          <p:cNvPr id="19" name="Rectangle 18"/>
           <p:cNvSpPr/>
           <p:nvPr/>
         </p:nvSpPr>
         <p:spPr>
           <a:xfrm>
-            <a:off x="3968496" y="2944368"/>
-            <a:ext cx="7653527" cy="6350"/>
+            <a:off x="566928" y="5029200"/>
+            <a:ext cx="2926080" cy="6350"/>
           </a:xfrm>
           <a:prstGeom prst="rect">
             <a:avLst/>
@@ -7111,20 +6645,6 @@
           </a:ln>
           <a:effectLst/>
         </p:spPr>
-        <p:style>
-          <a:lnRef idx="1">
-            <a:schemeClr val="accent1"/>
-          </a:lnRef>
-          <a:fillRef idx="3">
-            <a:schemeClr val="accent1"/>
-          </a:fillRef>
-          <a:effectRef idx="2">
-            <a:schemeClr val="accent1"/>
-          </a:effectRef>
-          <a:fontRef idx="minor">
-            <a:schemeClr val="lt1"/>
-          </a:fontRef>
-        </p:style>
         <p:txBody>
           <a:bodyPr rtlCol="0" anchor="ctr"/>
           <a:lstStyle/>
@@ -7135,96 +6655,14 @@
       </p:sp>
       <p:sp>
         <p:nvSpPr>
-          <p:cNvPr id="17" name="TextBox 16"/>
-          <p:cNvSpPr txBox="1"/>
-          <p:nvPr/>
-        </p:nvSpPr>
-        <p:spPr>
-          <a:xfrm>
-            <a:off x="3968496" y="3054096"/>
-            <a:ext cx="1920240" cy="384048"/>
-          </a:xfrm>
-          <a:prstGeom prst="rect">
-            <a:avLst/>
-          </a:prstGeom>
-          <a:noFill/>
-        </p:spPr>
-        <p:txBody>
-          <a:bodyPr wrap="square" lIns="0" rIns="0" tIns="0" bIns="0" anchor="t">
-            <a:spAutoFit/>
-          </a:bodyPr>
-          <a:lstStyle/>
-          <a:p>
-            <a:pPr algn="l">
-              <a:spcAft>
-                <a:spcPts val="0"/>
-              </a:spcAft>
-            </a:pPr>
-            <a:r>
-              <a:rPr sz="1350" b="1">
-                <a:solidFill>
-                  <a:srgbClr val="002FA7"/>
-                </a:solidFill>
-                <a:latin typeface="微软雅黑"/>
-                <a:ea typeface="微软雅黑"/>
-                <a:cs typeface="微软雅黑"/>
-              </a:rPr>
-              <a:t>created_at</a:t>
-            </a:r>
-          </a:p>
-        </p:txBody>
-      </p:sp>
-      <p:sp>
-        <p:nvSpPr>
-          <p:cNvPr id="18" name="TextBox 17"/>
-          <p:cNvSpPr txBox="1"/>
-          <p:nvPr/>
-        </p:nvSpPr>
-        <p:spPr>
-          <a:xfrm>
-            <a:off x="5980175" y="3054096"/>
-            <a:ext cx="5641848" cy="384048"/>
-          </a:xfrm>
-          <a:prstGeom prst="rect">
-            <a:avLst/>
-          </a:prstGeom>
-          <a:noFill/>
-        </p:spPr>
-        <p:txBody>
-          <a:bodyPr wrap="square" lIns="0" rIns="0" tIns="0" bIns="0" anchor="t">
-            <a:spAutoFit/>
-          </a:bodyPr>
-          <a:lstStyle/>
-          <a:p>
-            <a:pPr algn="l">
-              <a:spcAft>
-                <a:spcPts val="0"/>
-              </a:spcAft>
-            </a:pPr>
-            <a:r>
-              <a:rPr sz="1350" b="0">
-                <a:solidFill>
-                  <a:srgbClr val="1A1A1A"/>
-                </a:solidFill>
-                <a:latin typeface="微软雅黑"/>
-                <a:ea typeface="微软雅黑"/>
-                <a:cs typeface="微软雅黑"/>
-              </a:rPr>
-              <a:t>基线建立日期（YYYY-MM-DD）</a:t>
-            </a:r>
-          </a:p>
-        </p:txBody>
-      </p:sp>
-      <p:sp>
-        <p:nvSpPr>
-          <p:cNvPr id="19" name="Rectangle 18"/>
+          <p:cNvPr id="20" name="Rectangle 19"/>
           <p:cNvSpPr/>
           <p:nvPr/>
         </p:nvSpPr>
         <p:spPr>
           <a:xfrm>
-            <a:off x="3968496" y="3401568"/>
-            <a:ext cx="7653527" cy="6350"/>
+            <a:off x="3584448" y="1682496"/>
+            <a:ext cx="12801" cy="4064000"/>
           </a:xfrm>
           <a:prstGeom prst="rect">
             <a:avLst/>
@@ -7237,20 +6675,6 @@
           </a:ln>
           <a:effectLst/>
         </p:spPr>
-        <p:style>
-          <a:lnRef idx="1">
-            <a:schemeClr val="accent1"/>
-          </a:lnRef>
-          <a:fillRef idx="3">
-            <a:schemeClr val="accent1"/>
-          </a:fillRef>
-          <a:effectRef idx="2">
-            <a:schemeClr val="accent1"/>
-          </a:effectRef>
-          <a:fontRef idx="minor">
-            <a:schemeClr val="lt1"/>
-          </a:fontRef>
-        </p:style>
         <p:txBody>
           <a:bodyPr rtlCol="0" anchor="ctr"/>
           <a:lstStyle/>
@@ -7261,13 +6685,13 @@
       </p:sp>
       <p:sp>
         <p:nvSpPr>
-          <p:cNvPr id="20" name="TextBox 19"/>
+          <p:cNvPr id="21" name="TextBox 20"/>
           <p:cNvSpPr txBox="1"/>
           <p:nvPr/>
         </p:nvSpPr>
         <p:spPr>
           <a:xfrm>
-            <a:off x="3968496" y="3511296"/>
+            <a:off x="3968496" y="1682496"/>
             <a:ext cx="1920240" cy="384048"/>
           </a:xfrm>
           <a:prstGeom prst="rect">
@@ -7295,20 +6719,20 @@
                 <a:ea typeface="微软雅黑"/>
                 <a:cs typeface="微软雅黑"/>
               </a:rPr>
-              <a:t>id</a:t>
-            </a:r>
-          </a:p>
-        </p:txBody>
-      </p:sp>
-      <p:sp>
-        <p:nvSpPr>
-          <p:cNvPr id="21" name="TextBox 20"/>
+              <a:t>version</a:t>
+            </a:r>
+          </a:p>
+        </p:txBody>
+      </p:sp>
+      <p:sp>
+        <p:nvSpPr>
+          <p:cNvPr id="22" name="TextBox 21"/>
           <p:cNvSpPr txBox="1"/>
           <p:nvPr/>
         </p:nvSpPr>
         <p:spPr>
           <a:xfrm>
-            <a:off x="5980175" y="3511296"/>
+            <a:off x="5980175" y="1682496"/>
             <a:ext cx="5641848" cy="384048"/>
           </a:xfrm>
           <a:prstGeom prst="rect">
@@ -7336,20 +6760,20 @@
                 <a:ea typeface="微软雅黑"/>
                 <a:cs typeface="微软雅黑"/>
               </a:rPr>
-              <a:t>基线编号：运行、报告、记录引用它的稳定键</a:t>
-            </a:r>
-          </a:p>
-        </p:txBody>
-      </p:sp>
-      <p:sp>
-        <p:nvSpPr>
-          <p:cNvPr id="22" name="Rectangle 21"/>
+              <a:t>基线版本号，报告据此追溯判据版本</a:t>
+            </a:r>
+          </a:p>
+        </p:txBody>
+      </p:sp>
+      <p:sp>
+        <p:nvSpPr>
+          <p:cNvPr id="23" name="Rectangle 22"/>
           <p:cNvSpPr/>
           <p:nvPr/>
         </p:nvSpPr>
         <p:spPr>
           <a:xfrm>
-            <a:off x="3968496" y="3858768"/>
+            <a:off x="3968496" y="2029967"/>
             <a:ext cx="7653527" cy="6350"/>
           </a:xfrm>
           <a:prstGeom prst="rect">
@@ -7363,20 +6787,6 @@
           </a:ln>
           <a:effectLst/>
         </p:spPr>
-        <p:style>
-          <a:lnRef idx="1">
-            <a:schemeClr val="accent1"/>
-          </a:lnRef>
-          <a:fillRef idx="3">
-            <a:schemeClr val="accent1"/>
-          </a:fillRef>
-          <a:effectRef idx="2">
-            <a:schemeClr val="accent1"/>
-          </a:effectRef>
-          <a:fontRef idx="minor">
-            <a:schemeClr val="lt1"/>
-          </a:fontRef>
-        </p:style>
         <p:txBody>
           <a:bodyPr rtlCol="0" anchor="ctr"/>
           <a:lstStyle/>
@@ -7387,13 +6797,13 @@
       </p:sp>
       <p:sp>
         <p:nvSpPr>
-          <p:cNvPr id="23" name="TextBox 22"/>
+          <p:cNvPr id="24" name="TextBox 23"/>
           <p:cNvSpPr txBox="1"/>
           <p:nvPr/>
         </p:nvSpPr>
         <p:spPr>
           <a:xfrm>
-            <a:off x="3968496" y="3968496"/>
+            <a:off x="3968496" y="2139696"/>
             <a:ext cx="1920240" cy="384048"/>
           </a:xfrm>
           <a:prstGeom prst="rect">
@@ -7421,20 +6831,20 @@
                 <a:ea typeface="微软雅黑"/>
                 <a:cs typeface="微软雅黑"/>
               </a:rPr>
-              <a:t>name</a:t>
-            </a:r>
-          </a:p>
-        </p:txBody>
-      </p:sp>
-      <p:sp>
-        <p:nvSpPr>
-          <p:cNvPr id="24" name="TextBox 23"/>
+              <a:t>status</a:t>
+            </a:r>
+          </a:p>
+        </p:txBody>
+      </p:sp>
+      <p:sp>
+        <p:nvSpPr>
+          <p:cNvPr id="25" name="TextBox 24"/>
           <p:cNvSpPr txBox="1"/>
           <p:nvPr/>
         </p:nvSpPr>
         <p:spPr>
           <a:xfrm>
-            <a:off x="5980175" y="3968496"/>
+            <a:off x="5980175" y="2139696"/>
             <a:ext cx="5641848" cy="384048"/>
           </a:xfrm>
           <a:prstGeom prst="rect">
@@ -7462,20 +6872,20 @@
                 <a:ea typeface="微软雅黑"/>
                 <a:cs typeface="微软雅黑"/>
               </a:rPr>
-              <a:t>基线名称：报告标题与列表展示用</a:t>
-            </a:r>
-          </a:p>
-        </p:txBody>
-      </p:sp>
-      <p:sp>
-        <p:nvSpPr>
-          <p:cNvPr id="25" name="Rectangle 24"/>
+              <a:t>draft / review / released</a:t>
+            </a:r>
+          </a:p>
+        </p:txBody>
+      </p:sp>
+      <p:sp>
+        <p:nvSpPr>
+          <p:cNvPr id="26" name="Rectangle 25"/>
           <p:cNvSpPr/>
           <p:nvPr/>
         </p:nvSpPr>
         <p:spPr>
           <a:xfrm>
-            <a:off x="3968496" y="4315968"/>
+            <a:off x="3968496" y="2487168"/>
             <a:ext cx="7653527" cy="6350"/>
           </a:xfrm>
           <a:prstGeom prst="rect">
@@ -7489,20 +6899,6 @@
           </a:ln>
           <a:effectLst/>
         </p:spPr>
-        <p:style>
-          <a:lnRef idx="1">
-            <a:schemeClr val="accent1"/>
-          </a:lnRef>
-          <a:fillRef idx="3">
-            <a:schemeClr val="accent1"/>
-          </a:fillRef>
-          <a:effectRef idx="2">
-            <a:schemeClr val="accent1"/>
-          </a:effectRef>
-          <a:fontRef idx="minor">
-            <a:schemeClr val="lt1"/>
-          </a:fontRef>
-        </p:style>
         <p:txBody>
           <a:bodyPr rtlCol="0" anchor="ctr"/>
           <a:lstStyle/>
@@ -7513,13 +6909,13 @@
       </p:sp>
       <p:sp>
         <p:nvSpPr>
-          <p:cNvPr id="26" name="TextBox 25"/>
+          <p:cNvPr id="27" name="TextBox 26"/>
           <p:cNvSpPr txBox="1"/>
           <p:nvPr/>
         </p:nvSpPr>
         <p:spPr>
           <a:xfrm>
-            <a:off x="3968496" y="4425696"/>
+            <a:off x="3968496" y="2596896"/>
             <a:ext cx="1920240" cy="384048"/>
           </a:xfrm>
           <a:prstGeom prst="rect">
@@ -7547,20 +6943,20 @@
                 <a:ea typeface="微软雅黑"/>
                 <a:cs typeface="微软雅黑"/>
               </a:rPr>
-              <a:t>applies_to</a:t>
-            </a:r>
-          </a:p>
-        </p:txBody>
-      </p:sp>
-      <p:sp>
-        <p:nvSpPr>
-          <p:cNvPr id="27" name="TextBox 26"/>
+              <a:t>author</a:t>
+            </a:r>
+          </a:p>
+        </p:txBody>
+      </p:sp>
+      <p:sp>
+        <p:nvSpPr>
+          <p:cNvPr id="28" name="TextBox 27"/>
           <p:cNvSpPr txBox="1"/>
           <p:nvPr/>
         </p:nvSpPr>
         <p:spPr>
           <a:xfrm>
-            <a:off x="5980175" y="4425696"/>
+            <a:off x="5980175" y="2596896"/>
             <a:ext cx="5641848" cy="384048"/>
           </a:xfrm>
           <a:prstGeom prst="rect">
@@ -7588,20 +6984,20 @@
                 <a:ea typeface="微软雅黑"/>
                 <a:cs typeface="微软雅黑"/>
               </a:rPr>
-              <a:t>适用台架类型编号</a:t>
-            </a:r>
-          </a:p>
-        </p:txBody>
-      </p:sp>
-      <p:sp>
-        <p:nvSpPr>
-          <p:cNvPr id="28" name="Rectangle 27"/>
+              <a:t>责任人，判据谁定的</a:t>
+            </a:r>
+          </a:p>
+        </p:txBody>
+      </p:sp>
+      <p:sp>
+        <p:nvSpPr>
+          <p:cNvPr id="29" name="Rectangle 28"/>
           <p:cNvSpPr/>
           <p:nvPr/>
         </p:nvSpPr>
         <p:spPr>
           <a:xfrm>
-            <a:off x="3968496" y="4773168"/>
+            <a:off x="3968496" y="2944368"/>
             <a:ext cx="7653527" cy="6350"/>
           </a:xfrm>
           <a:prstGeom prst="rect">
@@ -7615,20 +7011,6 @@
           </a:ln>
           <a:effectLst/>
         </p:spPr>
-        <p:style>
-          <a:lnRef idx="1">
-            <a:schemeClr val="accent1"/>
-          </a:lnRef>
-          <a:fillRef idx="3">
-            <a:schemeClr val="accent1"/>
-          </a:fillRef>
-          <a:effectRef idx="2">
-            <a:schemeClr val="accent1"/>
-          </a:effectRef>
-          <a:fontRef idx="minor">
-            <a:schemeClr val="lt1"/>
-          </a:fontRef>
-        </p:style>
         <p:txBody>
           <a:bodyPr rtlCol="0" anchor="ctr"/>
           <a:lstStyle/>
@@ -7639,14 +7021,14 @@
       </p:sp>
       <p:sp>
         <p:nvSpPr>
-          <p:cNvPr id="29" name="TextBox 28"/>
+          <p:cNvPr id="30" name="TextBox 29"/>
           <p:cNvSpPr txBox="1"/>
           <p:nvPr/>
         </p:nvSpPr>
         <p:spPr>
           <a:xfrm>
-            <a:off x="566928" y="5577840"/>
-            <a:ext cx="11055096" cy="365760"/>
+            <a:off x="3968496" y="3054096"/>
+            <a:ext cx="1920240" cy="384048"/>
           </a:xfrm>
           <a:prstGeom prst="rect">
             <a:avLst/>
@@ -7665,7 +7047,48 @@
               </a:spcAft>
             </a:pPr>
             <a:r>
-              <a:rPr sz="1150" b="0">
+              <a:rPr sz="1350" b="1">
+                <a:solidFill>
+                  <a:srgbClr val="002FA7"/>
+                </a:solidFill>
+                <a:latin typeface="微软雅黑"/>
+                <a:ea typeface="微软雅黑"/>
+                <a:cs typeface="微软雅黑"/>
+              </a:rPr>
+              <a:t>created_at</a:t>
+            </a:r>
+          </a:p>
+        </p:txBody>
+      </p:sp>
+      <p:sp>
+        <p:nvSpPr>
+          <p:cNvPr id="31" name="TextBox 30"/>
+          <p:cNvSpPr txBox="1"/>
+          <p:nvPr/>
+        </p:nvSpPr>
+        <p:spPr>
+          <a:xfrm>
+            <a:off x="5980175" y="3054096"/>
+            <a:ext cx="5641848" cy="384048"/>
+          </a:xfrm>
+          <a:prstGeom prst="rect">
+            <a:avLst/>
+          </a:prstGeom>
+          <a:noFill/>
+        </p:spPr>
+        <p:txBody>
+          <a:bodyPr wrap="square" lIns="0" rIns="0" tIns="0" bIns="0" anchor="t">
+            <a:spAutoFit/>
+          </a:bodyPr>
+          <a:lstStyle/>
+          <a:p>
+            <a:pPr algn="l">
+              <a:spcAft>
+                <a:spcPts val="0"/>
+              </a:spcAft>
+            </a:pPr>
+            <a:r>
+              <a:rPr sz="1350" b="0">
                 <a:solidFill>
                   <a:srgbClr val="1A1A1A"/>
                 </a:solidFill>
@@ -7673,8 +7096,374 @@
                 <a:ea typeface="微软雅黑"/>
                 <a:cs typeface="微软雅黑"/>
               </a:rPr>
-              <a:t>只有 released 状态允许用于正式生产运行；草稿与评审中的基线不参与生产。</a:t>
-            </a:r>
+              <a:t>基线建立日期（YYYY-MM-DD）</a:t>
+            </a:r>
+          </a:p>
+        </p:txBody>
+      </p:sp>
+      <p:sp>
+        <p:nvSpPr>
+          <p:cNvPr id="32" name="Rectangle 31"/>
+          <p:cNvSpPr/>
+          <p:nvPr/>
+        </p:nvSpPr>
+        <p:spPr>
+          <a:xfrm>
+            <a:off x="3968496" y="3401568"/>
+            <a:ext cx="7653527" cy="6350"/>
+          </a:xfrm>
+          <a:prstGeom prst="rect">
+            <a:avLst/>
+          </a:prstGeom>
+          <a:solidFill>
+            <a:srgbClr val="D9D5CF"/>
+          </a:solidFill>
+          <a:ln>
+            <a:noFill/>
+          </a:ln>
+          <a:effectLst/>
+        </p:spPr>
+        <p:txBody>
+          <a:bodyPr rtlCol="0" anchor="ctr"/>
+          <a:lstStyle/>
+          <a:p>
+            <a:pPr algn="ctr"/>
+          </a:p>
+        </p:txBody>
+      </p:sp>
+      <p:sp>
+        <p:nvSpPr>
+          <p:cNvPr id="33" name="TextBox 32"/>
+          <p:cNvSpPr txBox="1"/>
+          <p:nvPr/>
+        </p:nvSpPr>
+        <p:spPr>
+          <a:xfrm>
+            <a:off x="3968496" y="3511296"/>
+            <a:ext cx="1920240" cy="384048"/>
+          </a:xfrm>
+          <a:prstGeom prst="rect">
+            <a:avLst/>
+          </a:prstGeom>
+          <a:noFill/>
+        </p:spPr>
+        <p:txBody>
+          <a:bodyPr wrap="square" lIns="0" rIns="0" tIns="0" bIns="0" anchor="t">
+            <a:spAutoFit/>
+          </a:bodyPr>
+          <a:lstStyle/>
+          <a:p>
+            <a:pPr algn="l">
+              <a:spcAft>
+                <a:spcPts val="0"/>
+              </a:spcAft>
+            </a:pPr>
+            <a:r>
+              <a:rPr sz="1350" b="1">
+                <a:solidFill>
+                  <a:srgbClr val="002FA7"/>
+                </a:solidFill>
+                <a:latin typeface="微软雅黑"/>
+                <a:ea typeface="微软雅黑"/>
+                <a:cs typeface="微软雅黑"/>
+              </a:rPr>
+              <a:t>id</a:t>
+            </a:r>
+          </a:p>
+        </p:txBody>
+      </p:sp>
+      <p:sp>
+        <p:nvSpPr>
+          <p:cNvPr id="34" name="TextBox 33"/>
+          <p:cNvSpPr txBox="1"/>
+          <p:nvPr/>
+        </p:nvSpPr>
+        <p:spPr>
+          <a:xfrm>
+            <a:off x="5980175" y="3511296"/>
+            <a:ext cx="5641848" cy="384048"/>
+          </a:xfrm>
+          <a:prstGeom prst="rect">
+            <a:avLst/>
+          </a:prstGeom>
+          <a:noFill/>
+        </p:spPr>
+        <p:txBody>
+          <a:bodyPr wrap="square" lIns="0" rIns="0" tIns="0" bIns="0" anchor="t">
+            <a:spAutoFit/>
+          </a:bodyPr>
+          <a:lstStyle/>
+          <a:p>
+            <a:pPr algn="l">
+              <a:spcAft>
+                <a:spcPts val="0"/>
+              </a:spcAft>
+            </a:pPr>
+            <a:r>
+              <a:rPr sz="1350" b="0">
+                <a:solidFill>
+                  <a:srgbClr val="1A1A1A"/>
+                </a:solidFill>
+                <a:latin typeface="微软雅黑"/>
+                <a:ea typeface="微软雅黑"/>
+                <a:cs typeface="微软雅黑"/>
+              </a:rPr>
+              <a:t>基线编号：运行、报告、记录引用它的稳定键</a:t>
+            </a:r>
+          </a:p>
+        </p:txBody>
+      </p:sp>
+      <p:sp>
+        <p:nvSpPr>
+          <p:cNvPr id="35" name="Rectangle 34"/>
+          <p:cNvSpPr/>
+          <p:nvPr/>
+        </p:nvSpPr>
+        <p:spPr>
+          <a:xfrm>
+            <a:off x="3968496" y="3858768"/>
+            <a:ext cx="7653527" cy="6350"/>
+          </a:xfrm>
+          <a:prstGeom prst="rect">
+            <a:avLst/>
+          </a:prstGeom>
+          <a:solidFill>
+            <a:srgbClr val="D9D5CF"/>
+          </a:solidFill>
+          <a:ln>
+            <a:noFill/>
+          </a:ln>
+          <a:effectLst/>
+        </p:spPr>
+        <p:txBody>
+          <a:bodyPr rtlCol="0" anchor="ctr"/>
+          <a:lstStyle/>
+          <a:p>
+            <a:pPr algn="ctr"/>
+          </a:p>
+        </p:txBody>
+      </p:sp>
+      <p:sp>
+        <p:nvSpPr>
+          <p:cNvPr id="36" name="TextBox 35"/>
+          <p:cNvSpPr txBox="1"/>
+          <p:nvPr/>
+        </p:nvSpPr>
+        <p:spPr>
+          <a:xfrm>
+            <a:off x="3968496" y="3968496"/>
+            <a:ext cx="1920240" cy="384048"/>
+          </a:xfrm>
+          <a:prstGeom prst="rect">
+            <a:avLst/>
+          </a:prstGeom>
+          <a:noFill/>
+        </p:spPr>
+        <p:txBody>
+          <a:bodyPr wrap="square" lIns="0" rIns="0" tIns="0" bIns="0" anchor="t">
+            <a:spAutoFit/>
+          </a:bodyPr>
+          <a:lstStyle/>
+          <a:p>
+            <a:pPr algn="l">
+              <a:spcAft>
+                <a:spcPts val="0"/>
+              </a:spcAft>
+            </a:pPr>
+            <a:r>
+              <a:rPr sz="1350" b="1">
+                <a:solidFill>
+                  <a:srgbClr val="002FA7"/>
+                </a:solidFill>
+                <a:latin typeface="微软雅黑"/>
+                <a:ea typeface="微软雅黑"/>
+                <a:cs typeface="微软雅黑"/>
+              </a:rPr>
+              <a:t>name</a:t>
+            </a:r>
+          </a:p>
+        </p:txBody>
+      </p:sp>
+      <p:sp>
+        <p:nvSpPr>
+          <p:cNvPr id="37" name="TextBox 36"/>
+          <p:cNvSpPr txBox="1"/>
+          <p:nvPr/>
+        </p:nvSpPr>
+        <p:spPr>
+          <a:xfrm>
+            <a:off x="5980175" y="3968496"/>
+            <a:ext cx="5641848" cy="384048"/>
+          </a:xfrm>
+          <a:prstGeom prst="rect">
+            <a:avLst/>
+          </a:prstGeom>
+          <a:noFill/>
+        </p:spPr>
+        <p:txBody>
+          <a:bodyPr wrap="square" lIns="0" rIns="0" tIns="0" bIns="0" anchor="t">
+            <a:spAutoFit/>
+          </a:bodyPr>
+          <a:lstStyle/>
+          <a:p>
+            <a:pPr algn="l">
+              <a:spcAft>
+                <a:spcPts val="0"/>
+              </a:spcAft>
+            </a:pPr>
+            <a:r>
+              <a:rPr sz="1350" b="0">
+                <a:solidFill>
+                  <a:srgbClr val="1A1A1A"/>
+                </a:solidFill>
+                <a:latin typeface="微软雅黑"/>
+                <a:ea typeface="微软雅黑"/>
+                <a:cs typeface="微软雅黑"/>
+              </a:rPr>
+              <a:t>基线名称：报告标题与列表展示用</a:t>
+            </a:r>
+          </a:p>
+        </p:txBody>
+      </p:sp>
+      <p:sp>
+        <p:nvSpPr>
+          <p:cNvPr id="38" name="Rectangle 37"/>
+          <p:cNvSpPr/>
+          <p:nvPr/>
+        </p:nvSpPr>
+        <p:spPr>
+          <a:xfrm>
+            <a:off x="3968496" y="4315968"/>
+            <a:ext cx="7653527" cy="6350"/>
+          </a:xfrm>
+          <a:prstGeom prst="rect">
+            <a:avLst/>
+          </a:prstGeom>
+          <a:solidFill>
+            <a:srgbClr val="D9D5CF"/>
+          </a:solidFill>
+          <a:ln>
+            <a:noFill/>
+          </a:ln>
+          <a:effectLst/>
+        </p:spPr>
+        <p:txBody>
+          <a:bodyPr rtlCol="0" anchor="ctr"/>
+          <a:lstStyle/>
+          <a:p>
+            <a:pPr algn="ctr"/>
+          </a:p>
+        </p:txBody>
+      </p:sp>
+      <p:sp>
+        <p:nvSpPr>
+          <p:cNvPr id="39" name="TextBox 38"/>
+          <p:cNvSpPr txBox="1"/>
+          <p:nvPr/>
+        </p:nvSpPr>
+        <p:spPr>
+          <a:xfrm>
+            <a:off x="3968496" y="4425696"/>
+            <a:ext cx="1920240" cy="384048"/>
+          </a:xfrm>
+          <a:prstGeom prst="rect">
+            <a:avLst/>
+          </a:prstGeom>
+          <a:noFill/>
+        </p:spPr>
+        <p:txBody>
+          <a:bodyPr wrap="square" lIns="0" rIns="0" tIns="0" bIns="0" anchor="t">
+            <a:spAutoFit/>
+          </a:bodyPr>
+          <a:lstStyle/>
+          <a:p>
+            <a:pPr algn="l">
+              <a:spcAft>
+                <a:spcPts val="0"/>
+              </a:spcAft>
+            </a:pPr>
+            <a:r>
+              <a:rPr sz="1350" b="1">
+                <a:solidFill>
+                  <a:srgbClr val="002FA7"/>
+                </a:solidFill>
+                <a:latin typeface="微软雅黑"/>
+                <a:ea typeface="微软雅黑"/>
+                <a:cs typeface="微软雅黑"/>
+              </a:rPr>
+              <a:t>applies_to</a:t>
+            </a:r>
+          </a:p>
+        </p:txBody>
+      </p:sp>
+      <p:sp>
+        <p:nvSpPr>
+          <p:cNvPr id="40" name="TextBox 39"/>
+          <p:cNvSpPr txBox="1"/>
+          <p:nvPr/>
+        </p:nvSpPr>
+        <p:spPr>
+          <a:xfrm>
+            <a:off x="5980175" y="4425696"/>
+            <a:ext cx="5641848" cy="384048"/>
+          </a:xfrm>
+          <a:prstGeom prst="rect">
+            <a:avLst/>
+          </a:prstGeom>
+          <a:noFill/>
+        </p:spPr>
+        <p:txBody>
+          <a:bodyPr wrap="square" lIns="0" rIns="0" tIns="0" bIns="0" anchor="t">
+            <a:spAutoFit/>
+          </a:bodyPr>
+          <a:lstStyle/>
+          <a:p>
+            <a:pPr algn="l">
+              <a:spcAft>
+                <a:spcPts val="0"/>
+              </a:spcAft>
+            </a:pPr>
+            <a:r>
+              <a:rPr sz="1350" b="0">
+                <a:solidFill>
+                  <a:srgbClr val="1A1A1A"/>
+                </a:solidFill>
+                <a:latin typeface="微软雅黑"/>
+                <a:ea typeface="微软雅黑"/>
+                <a:cs typeface="微软雅黑"/>
+              </a:rPr>
+              <a:t>适用台架类型编号</a:t>
+            </a:r>
+          </a:p>
+        </p:txBody>
+      </p:sp>
+      <p:sp>
+        <p:nvSpPr>
+          <p:cNvPr id="41" name="Rectangle 40"/>
+          <p:cNvSpPr/>
+          <p:nvPr/>
+        </p:nvSpPr>
+        <p:spPr>
+          <a:xfrm>
+            <a:off x="3968496" y="4773168"/>
+            <a:ext cx="7653527" cy="6350"/>
+          </a:xfrm>
+          <a:prstGeom prst="rect">
+            <a:avLst/>
+          </a:prstGeom>
+          <a:solidFill>
+            <a:srgbClr val="D9D5CF"/>
+          </a:solidFill>
+          <a:ln>
+            <a:noFill/>
+          </a:ln>
+          <a:effectLst/>
+        </p:spPr>
+        <p:txBody>
+          <a:bodyPr rtlCol="0" anchor="ctr"/>
+          <a:lstStyle/>
+          <a:p>
+            <a:pPr algn="ctr"/>
           </a:p>
         </p:txBody>
       </p:sp>
@@ -7704,8 +7493,8 @@
         </p:nvSpPr>
         <p:spPr>
           <a:xfrm>
-            <a:off x="566928" y="420624"/>
-            <a:ext cx="11055096" cy="274320"/>
+            <a:off x="566928" y="384048"/>
+            <a:ext cx="11055096" cy="365760"/>
           </a:xfrm>
           <a:prstGeom prst="rect">
             <a:avLst/>
@@ -7724,7 +7513,7 @@
               </a:spcAft>
             </a:pPr>
             <a:r>
-              <a:rPr sz="1600" b="1">
+              <a:rPr sz="1800" b="1">
                 <a:solidFill>
                   <a:srgbClr val="9B1C1C"/>
                 </a:solidFill>
@@ -7732,7 +7521,7 @@
                 <a:ea typeface="微软雅黑"/>
                 <a:cs typeface="微软雅黑"/>
               </a:rPr>
-              <a:t>adaptation · PN 白名单与多路 SN 信号源匹配</a:t>
+              <a:t>adaptation · 一拖多测量与件号白名单</a:t>
             </a:r>
           </a:p>
         </p:txBody>
@@ -7759,20 +7548,6 @@
           </a:ln>
           <a:effectLst/>
         </p:spPr>
-        <p:style>
-          <a:lnRef idx="1">
-            <a:schemeClr val="accent1"/>
-          </a:lnRef>
-          <a:fillRef idx="3">
-            <a:schemeClr val="accent1"/>
-          </a:fillRef>
-          <a:effectRef idx="2">
-            <a:schemeClr val="accent1"/>
-          </a:effectRef>
-          <a:fontRef idx="minor">
-            <a:schemeClr val="lt1"/>
-          </a:fontRef>
-        </p:style>
         <p:txBody>
           <a:bodyPr rtlCol="0" anchor="ctr" wrap="square" tIns="36576" bIns="36576"/>
           <a:lstStyle/>
@@ -7791,7 +7566,7 @@
                 <a:ea typeface="微软雅黑"/>
                 <a:cs typeface="微软雅黑"/>
               </a:rPr>
-              <a:t>这台 UUT 能不能用这份基线测；多路 SN 并行时，每个 SN 采到的数据属于哪个信号源</a:t>
+              <a:t>这份基线适配哪些件号；一次同时测几个 SN；某个 SN 的信号走哪几路通道</a:t>
             </a:r>
           </a:p>
         </p:txBody>
@@ -7818,20 +7593,6 @@
           </a:ln>
           <a:effectLst/>
         </p:spPr>
-        <p:style>
-          <a:lnRef idx="1">
-            <a:schemeClr val="accent1"/>
-          </a:lnRef>
-          <a:fillRef idx="3">
-            <a:schemeClr val="accent1"/>
-          </a:fillRef>
-          <a:effectRef idx="2">
-            <a:schemeClr val="accent1"/>
-          </a:effectRef>
-          <a:fontRef idx="minor">
-            <a:schemeClr val="lt1"/>
-          </a:fontRef>
-        </p:style>
         <p:txBody>
           <a:bodyPr rtlCol="0" anchor="ctr"/>
           <a:lstStyle/>
@@ -7903,20 +7664,6 @@
           </a:ln>
           <a:effectLst/>
         </p:spPr>
-        <p:style>
-          <a:lnRef idx="1">
-            <a:schemeClr val="accent1"/>
-          </a:lnRef>
-          <a:fillRef idx="3">
-            <a:schemeClr val="accent1"/>
-          </a:fillRef>
-          <a:effectRef idx="2">
-            <a:schemeClr val="accent1"/>
-          </a:effectRef>
-          <a:fontRef idx="minor">
-            <a:schemeClr val="lt1"/>
-          </a:fontRef>
-        </p:style>
         <p:txBody>
           <a:bodyPr rtlCol="0" anchor="ctr" wrap="square" tIns="36576" bIns="36576"/>
           <a:lstStyle/>
@@ -8003,20 +7750,6 @@
           </a:ln>
           <a:effectLst/>
         </p:spPr>
-        <p:style>
-          <a:lnRef idx="1">
-            <a:schemeClr val="accent1"/>
-          </a:lnRef>
-          <a:fillRef idx="3">
-            <a:schemeClr val="accent1"/>
-          </a:fillRef>
-          <a:effectRef idx="2">
-            <a:schemeClr val="accent1"/>
-          </a:effectRef>
-          <a:fontRef idx="minor">
-            <a:schemeClr val="lt1"/>
-          </a:fontRef>
-        </p:style>
         <p:txBody>
           <a:bodyPr rtlCol="0" anchor="ctr" wrap="square" tIns="36576" bIns="36576"/>
           <a:lstStyle/>
@@ -8103,20 +7836,6 @@
           </a:ln>
           <a:effectLst/>
         </p:spPr>
-        <p:style>
-          <a:lnRef idx="1">
-            <a:schemeClr val="accent1"/>
-          </a:lnRef>
-          <a:fillRef idx="3">
-            <a:schemeClr val="accent1"/>
-          </a:fillRef>
-          <a:effectRef idx="2">
-            <a:schemeClr val="accent1"/>
-          </a:effectRef>
-          <a:fontRef idx="minor">
-            <a:schemeClr val="lt1"/>
-          </a:fontRef>
-        </p:style>
         <p:txBody>
           <a:bodyPr rtlCol="0" anchor="ctr" wrap="square" tIns="36576" bIns="36576"/>
           <a:lstStyle/>
@@ -8157,27 +7876,11 @@
           <a:solidFill>
             <a:srgbClr val="EAF0F9"/>
           </a:solidFill>
-          <a:ln w="9525">
-            <a:solidFill>
-              <a:srgbClr val="002FA7"/>
-            </a:solidFill>
+          <a:ln>
+            <a:noFill/>
           </a:ln>
           <a:effectLst/>
         </p:spPr>
-        <p:style>
-          <a:lnRef idx="1">
-            <a:schemeClr val="accent1"/>
-          </a:lnRef>
-          <a:fillRef idx="3">
-            <a:schemeClr val="accent1"/>
-          </a:fillRef>
-          <a:effectRef idx="2">
-            <a:schemeClr val="accent1"/>
-          </a:effectRef>
-          <a:fontRef idx="minor">
-            <a:schemeClr val="lt1"/>
-          </a:fontRef>
-        </p:style>
         <p:txBody>
           <a:bodyPr rtlCol="0" anchor="ctr" wrap="square" tIns="36576" bIns="36576"/>
           <a:lstStyle/>
@@ -8305,20 +8008,6 @@
           </a:ln>
           <a:effectLst/>
         </p:spPr>
-        <p:style>
-          <a:lnRef idx="1">
-            <a:schemeClr val="accent1"/>
-          </a:lnRef>
-          <a:fillRef idx="3">
-            <a:schemeClr val="accent1"/>
-          </a:fillRef>
-          <a:effectRef idx="2">
-            <a:schemeClr val="accent1"/>
-          </a:effectRef>
-          <a:fontRef idx="minor">
-            <a:schemeClr val="lt1"/>
-          </a:fontRef>
-        </p:style>
         <p:txBody>
           <a:bodyPr rtlCol="0" anchor="ctr"/>
           <a:lstStyle/>
@@ -8431,20 +8120,6 @@
           </a:ln>
           <a:effectLst/>
         </p:spPr>
-        <p:style>
-          <a:lnRef idx="1">
-            <a:schemeClr val="accent1"/>
-          </a:lnRef>
-          <a:fillRef idx="3">
-            <a:schemeClr val="accent1"/>
-          </a:fillRef>
-          <a:effectRef idx="2">
-            <a:schemeClr val="accent1"/>
-          </a:effectRef>
-          <a:fontRef idx="minor">
-            <a:schemeClr val="lt1"/>
-          </a:fontRef>
-        </p:style>
         <p:txBody>
           <a:bodyPr rtlCol="0" anchor="ctr"/>
           <a:lstStyle/>
@@ -8557,20 +8232,6 @@
           </a:ln>
           <a:effectLst/>
         </p:spPr>
-        <p:style>
-          <a:lnRef idx="1">
-            <a:schemeClr val="accent1"/>
-          </a:lnRef>
-          <a:fillRef idx="3">
-            <a:schemeClr val="accent1"/>
-          </a:fillRef>
-          <a:effectRef idx="2">
-            <a:schemeClr val="accent1"/>
-          </a:effectRef>
-          <a:fontRef idx="minor">
-            <a:schemeClr val="lt1"/>
-          </a:fontRef>
-        </p:style>
         <p:txBody>
           <a:bodyPr rtlCol="0" anchor="ctr"/>
           <a:lstStyle/>
@@ -8587,8 +8248,8 @@
         </p:nvSpPr>
         <p:spPr>
           <a:xfrm>
-            <a:off x="566928" y="5614416"/>
-            <a:ext cx="4754880" cy="548640"/>
+            <a:off x="5870448" y="1591056"/>
+            <a:ext cx="5751576" cy="256032"/>
           </a:xfrm>
           <a:prstGeom prst="rect">
             <a:avLst/>
@@ -8607,47 +8268,6 @@
               </a:spcAft>
             </a:pPr>
             <a:r>
-              <a:rPr sz="1150" b="0">
-                <a:solidFill>
-                  <a:srgbClr val="1A1A1A"/>
-                </a:solidFill>
-                <a:latin typeface="微软雅黑"/>
-                <a:ea typeface="微软雅黑"/>
-                <a:cs typeface="微软雅黑"/>
-              </a:rPr>
-              <a:t>白名单规模小时内联在清单里便于评审；件号成百上千时放 resource/，清单只留引用。</a:t>
-            </a:r>
-          </a:p>
-        </p:txBody>
-      </p:sp>
-      <p:sp>
-        <p:nvSpPr>
-          <p:cNvPr id="22" name="TextBox 21"/>
-          <p:cNvSpPr txBox="1"/>
-          <p:nvPr/>
-        </p:nvSpPr>
-        <p:spPr>
-          <a:xfrm>
-            <a:off x="5870448" y="1591056"/>
-            <a:ext cx="5751576" cy="256032"/>
-          </a:xfrm>
-          <a:prstGeom prst="rect">
-            <a:avLst/>
-          </a:prstGeom>
-          <a:noFill/>
-        </p:spPr>
-        <p:txBody>
-          <a:bodyPr wrap="square" lIns="0" rIns="0" tIns="0" bIns="0" anchor="t">
-            <a:spAutoFit/>
-          </a:bodyPr>
-          <a:lstStyle/>
-          <a:p>
-            <a:pPr algn="l">
-              <a:spcAft>
-                <a:spcPts val="0"/>
-              </a:spcAft>
-            </a:pPr>
-            <a:r>
               <a:rPr sz="1350" b="1">
                 <a:solidFill>
                   <a:srgbClr val="002FA7"/>
@@ -8656,14 +8276,14 @@
                 <a:ea typeface="微软雅黑"/>
                 <a:cs typeface="微软雅黑"/>
               </a:rPr>
-              <a:t>多路 SN 与信号源匹配</a:t>
+              <a:t>一拖多：同时测几个 SN</a:t>
             </a:r>
           </a:p>
         </p:txBody>
       </p:sp>
       <p:pic>
         <p:nvPicPr>
-          <p:cNvPr id="23" name="Picture 22" descr="tps-slot-source-match.png"/>
+          <p:cNvPr id="22" name="Picture 21" descr="tps-slot-source-match.png"/>
           <p:cNvPicPr>
             <a:picLocks noChangeAspect="1"/>
           </p:cNvPicPr>
@@ -8677,7 +8297,7 @@
         </p:blipFill>
         <p:spPr>
           <a:xfrm>
-            <a:off x="5870448" y="1901952"/>
+            <a:off x="5870448" y="1883664"/>
             <a:ext cx="5751576" cy="3450946"/>
           </a:xfrm>
           <a:prstGeom prst="rect">
@@ -8687,14 +8307,14 @@
       </p:pic>
       <p:sp>
         <p:nvSpPr>
-          <p:cNvPr id="24" name="TextBox 23"/>
+          <p:cNvPr id="23" name="TextBox 22"/>
           <p:cNvSpPr txBox="1"/>
           <p:nvPr/>
         </p:nvSpPr>
         <p:spPr>
           <a:xfrm>
-            <a:off x="5870448" y="5669280"/>
-            <a:ext cx="1554480" cy="237744"/>
+            <a:off x="5870448" y="5449824"/>
+            <a:ext cx="1481328" cy="201167"/>
           </a:xfrm>
           <a:prstGeom prst="rect">
             <a:avLst/>
@@ -8713,7 +8333,7 @@
               </a:spcAft>
             </a:pPr>
             <a:r>
-              <a:rPr sz="1200" b="1">
+              <a:rPr sz="1150" b="1">
                 <a:solidFill>
                   <a:srgbClr val="002FA7"/>
                 </a:solidFill>
@@ -8728,14 +8348,14 @@
       </p:sp>
       <p:sp>
         <p:nvSpPr>
-          <p:cNvPr id="25" name="TextBox 24"/>
+          <p:cNvPr id="24" name="TextBox 23"/>
           <p:cNvSpPr txBox="1"/>
           <p:nvPr/>
         </p:nvSpPr>
         <p:spPr>
           <a:xfrm>
-            <a:off x="7516367" y="5669280"/>
-            <a:ext cx="4105656" cy="237744"/>
+            <a:off x="7443215" y="5449824"/>
+            <a:ext cx="4178808" cy="201167"/>
           </a:xfrm>
           <a:prstGeom prst="rect">
             <a:avLst/>
@@ -8754,7 +8374,7 @@
               </a:spcAft>
             </a:pPr>
             <a:r>
-              <a:rPr sz="1200" b="0">
+              <a:rPr sz="1150" b="0">
                 <a:solidFill>
                   <a:srgbClr val="1A1A1A"/>
                 </a:solidFill>
@@ -8762,20 +8382,20 @@
                 <a:ea typeface="微软雅黑"/>
                 <a:cs typeface="微软雅黑"/>
               </a:rPr>
-              <a:t>并行路数</a:t>
-            </a:r>
-          </a:p>
-        </p:txBody>
-      </p:sp>
-      <p:sp>
-        <p:nvSpPr>
-          <p:cNvPr id="26" name="Rectangle 25"/>
+              <a:t>输入数量上限：一次最多同时测几个 SN</a:t>
+            </a:r>
+          </a:p>
+        </p:txBody>
+      </p:sp>
+      <p:sp>
+        <p:nvSpPr>
+          <p:cNvPr id="25" name="Rectangle 24"/>
           <p:cNvSpPr/>
           <p:nvPr/>
         </p:nvSpPr>
         <p:spPr>
           <a:xfrm>
-            <a:off x="5870448" y="5870448"/>
+            <a:off x="5870448" y="5614416"/>
             <a:ext cx="5751576" cy="6350"/>
           </a:xfrm>
           <a:prstGeom prst="rect">
@@ -8789,20 +8409,6 @@
           </a:ln>
           <a:effectLst/>
         </p:spPr>
-        <p:style>
-          <a:lnRef idx="1">
-            <a:schemeClr val="accent1"/>
-          </a:lnRef>
-          <a:fillRef idx="3">
-            <a:schemeClr val="accent1"/>
-          </a:fillRef>
-          <a:effectRef idx="2">
-            <a:schemeClr val="accent1"/>
-          </a:effectRef>
-          <a:fontRef idx="minor">
-            <a:schemeClr val="lt1"/>
-          </a:fontRef>
-        </p:style>
         <p:txBody>
           <a:bodyPr rtlCol="0" anchor="ctr"/>
           <a:lstStyle/>
@@ -8813,14 +8419,14 @@
       </p:sp>
       <p:sp>
         <p:nvSpPr>
-          <p:cNvPr id="27" name="TextBox 26"/>
+          <p:cNvPr id="26" name="TextBox 25"/>
           <p:cNvSpPr txBox="1"/>
           <p:nvPr/>
         </p:nvSpPr>
         <p:spPr>
           <a:xfrm>
-            <a:off x="5870448" y="5980176"/>
-            <a:ext cx="1554480" cy="237744"/>
+            <a:off x="5870448" y="5724144"/>
+            <a:ext cx="1481328" cy="201167"/>
           </a:xfrm>
           <a:prstGeom prst="rect">
             <a:avLst/>
@@ -8839,7 +8445,7 @@
               </a:spcAft>
             </a:pPr>
             <a:r>
-              <a:rPr sz="1200" b="1">
+              <a:rPr sz="1150" b="1">
                 <a:solidFill>
                   <a:srgbClr val="002FA7"/>
                 </a:solidFill>
@@ -8847,21 +8453,21 @@
                 <a:ea typeface="微软雅黑"/>
                 <a:cs typeface="微软雅黑"/>
               </a:rPr>
-              <a:t>signal_source</a:t>
-            </a:r>
-          </a:p>
-        </p:txBody>
-      </p:sp>
-      <p:sp>
-        <p:nvSpPr>
-          <p:cNvPr id="28" name="TextBox 27"/>
+              <a:t>required</a:t>
+            </a:r>
+          </a:p>
+        </p:txBody>
+      </p:sp>
+      <p:sp>
+        <p:nvSpPr>
+          <p:cNvPr id="27" name="TextBox 26"/>
           <p:cNvSpPr txBox="1"/>
           <p:nvPr/>
         </p:nvSpPr>
         <p:spPr>
           <a:xfrm>
-            <a:off x="7516367" y="5980176"/>
-            <a:ext cx="4105656" cy="237744"/>
+            <a:off x="7443215" y="5724144"/>
+            <a:ext cx="4178808" cy="201167"/>
           </a:xfrm>
           <a:prstGeom prst="rect">
             <a:avLst/>
@@ -8880,7 +8486,7 @@
               </a:spcAft>
             </a:pPr>
             <a:r>
-              <a:rPr sz="1200" b="0">
+              <a:rPr sz="1150" b="0">
                 <a:solidFill>
                   <a:srgbClr val="1A1A1A"/>
                 </a:solidFill>
@@ -8888,20 +8494,20 @@
                 <a:ea typeface="微软雅黑"/>
                 <a:cs typeface="微软雅黑"/>
               </a:rPr>
-              <a:t>该位号数据所属信号源</a:t>
-            </a:r>
-          </a:p>
-        </p:txBody>
-      </p:sp>
-      <p:sp>
-        <p:nvSpPr>
-          <p:cNvPr id="29" name="Rectangle 28"/>
+              <a:t>最少路数，缺省 1 —— 少扫一两个 SN 也照常测</a:t>
+            </a:r>
+          </a:p>
+        </p:txBody>
+      </p:sp>
+      <p:sp>
+        <p:nvSpPr>
+          <p:cNvPr id="28" name="Rectangle 27"/>
           <p:cNvSpPr/>
           <p:nvPr/>
         </p:nvSpPr>
         <p:spPr>
           <a:xfrm>
-            <a:off x="5870448" y="6181344"/>
+            <a:off x="5870448" y="5888736"/>
             <a:ext cx="5751576" cy="6350"/>
           </a:xfrm>
           <a:prstGeom prst="rect">
@@ -8915,20 +8521,6 @@
           </a:ln>
           <a:effectLst/>
         </p:spPr>
-        <p:style>
-          <a:lnRef idx="1">
-            <a:schemeClr val="accent1"/>
-          </a:lnRef>
-          <a:fillRef idx="3">
-            <a:schemeClr val="accent1"/>
-          </a:fillRef>
-          <a:effectRef idx="2">
-            <a:schemeClr val="accent1"/>
-          </a:effectRef>
-          <a:fontRef idx="minor">
-            <a:schemeClr val="lt1"/>
-          </a:fontRef>
-        </p:style>
         <p:txBody>
           <a:bodyPr rtlCol="0" anchor="ctr"/>
           <a:lstStyle/>
@@ -8939,14 +8531,14 @@
       </p:sp>
       <p:sp>
         <p:nvSpPr>
-          <p:cNvPr id="30" name="TextBox 29"/>
+          <p:cNvPr id="29" name="TextBox 28"/>
           <p:cNvSpPr txBox="1"/>
           <p:nvPr/>
         </p:nvSpPr>
         <p:spPr>
           <a:xfrm>
-            <a:off x="5870448" y="6291072"/>
-            <a:ext cx="1554480" cy="237744"/>
+            <a:off x="5870448" y="5998464"/>
+            <a:ext cx="1481328" cy="201167"/>
           </a:xfrm>
           <a:prstGeom prst="rect">
             <a:avLst/>
@@ -8965,7 +8557,7 @@
               </a:spcAft>
             </a:pPr>
             <a:r>
-              <a:rPr sz="1200" b="1">
+              <a:rPr sz="1150" b="1">
                 <a:solidFill>
                   <a:srgbClr val="002FA7"/>
                 </a:solidFill>
@@ -8973,21 +8565,21 @@
                 <a:ea typeface="微软雅黑"/>
                 <a:cs typeface="微软雅黑"/>
               </a:rPr>
-              <a:t>source_channel</a:t>
-            </a:r>
-          </a:p>
-        </p:txBody>
-      </p:sp>
-      <p:sp>
-        <p:nvSpPr>
-          <p:cNvPr id="31" name="TextBox 30"/>
+              <a:t>slots[].sn</a:t>
+            </a:r>
+          </a:p>
+        </p:txBody>
+      </p:sp>
+      <p:sp>
+        <p:nvSpPr>
+          <p:cNvPr id="30" name="TextBox 29"/>
           <p:cNvSpPr txBox="1"/>
           <p:nvPr/>
         </p:nvSpPr>
         <p:spPr>
           <a:xfrm>
-            <a:off x="7516367" y="6291072"/>
-            <a:ext cx="4105656" cy="237744"/>
+            <a:off x="7443215" y="5998464"/>
+            <a:ext cx="4178808" cy="201167"/>
           </a:xfrm>
           <a:prstGeom prst="rect">
             <a:avLst/>
@@ -9006,7 +8598,7 @@
               </a:spcAft>
             </a:pPr>
             <a:r>
-              <a:rPr sz="1200" b="0">
+              <a:rPr sz="1150" b="0">
                 <a:solidFill>
                   <a:srgbClr val="1A1A1A"/>
                 </a:solidFill>
@@ -9014,20 +8606,20 @@
                 <a:ea typeface="微软雅黑"/>
                 <a:cs typeface="微软雅黑"/>
               </a:rPr>
-              <a:t>信号源上的物理输出口，位号之间不共用</a:t>
-            </a:r>
-          </a:p>
-        </p:txBody>
-      </p:sp>
-      <p:sp>
-        <p:nvSpPr>
-          <p:cNvPr id="32" name="Rectangle 31"/>
+              <a:t>指定该 SN 走哪组信号通道</a:t>
+            </a:r>
+          </a:p>
+        </p:txBody>
+      </p:sp>
+      <p:sp>
+        <p:nvSpPr>
+          <p:cNvPr id="31" name="Rectangle 30"/>
           <p:cNvSpPr/>
           <p:nvPr/>
         </p:nvSpPr>
         <p:spPr>
           <a:xfrm>
-            <a:off x="5870448" y="6492240"/>
+            <a:off x="5870448" y="6163055"/>
             <a:ext cx="5751576" cy="6350"/>
           </a:xfrm>
           <a:prstGeom prst="rect">
@@ -9041,20 +8633,118 @@
           </a:ln>
           <a:effectLst/>
         </p:spPr>
-        <p:style>
-          <a:lnRef idx="1">
-            <a:schemeClr val="accent1"/>
-          </a:lnRef>
-          <a:fillRef idx="3">
-            <a:schemeClr val="accent1"/>
-          </a:fillRef>
-          <a:effectRef idx="2">
-            <a:schemeClr val="accent1"/>
-          </a:effectRef>
-          <a:fontRef idx="minor">
-            <a:schemeClr val="lt1"/>
-          </a:fontRef>
-        </p:style>
+        <p:txBody>
+          <a:bodyPr rtlCol="0" anchor="ctr"/>
+          <a:lstStyle/>
+          <a:p>
+            <a:pPr algn="ctr"/>
+          </a:p>
+        </p:txBody>
+      </p:sp>
+      <p:sp>
+        <p:nvSpPr>
+          <p:cNvPr id="32" name="TextBox 31"/>
+          <p:cNvSpPr txBox="1"/>
+          <p:nvPr/>
+        </p:nvSpPr>
+        <p:spPr>
+          <a:xfrm>
+            <a:off x="5870448" y="6272783"/>
+            <a:ext cx="1481328" cy="201167"/>
+          </a:xfrm>
+          <a:prstGeom prst="rect">
+            <a:avLst/>
+          </a:prstGeom>
+          <a:noFill/>
+        </p:spPr>
+        <p:txBody>
+          <a:bodyPr wrap="square" lIns="0" rIns="0" tIns="0" bIns="0" anchor="t">
+            <a:spAutoFit/>
+          </a:bodyPr>
+          <a:lstStyle/>
+          <a:p>
+            <a:pPr algn="l">
+              <a:spcAft>
+                <a:spcPts val="0"/>
+              </a:spcAft>
+            </a:pPr>
+            <a:r>
+              <a:rPr sz="1150" b="1">
+                <a:solidFill>
+                  <a:srgbClr val="002FA7"/>
+                </a:solidFill>
+                <a:latin typeface="微软雅黑"/>
+                <a:ea typeface="微软雅黑"/>
+                <a:cs typeface="微软雅黑"/>
+              </a:rPr>
+              <a:t>slots[].inputs[]</a:t>
+            </a:r>
+          </a:p>
+        </p:txBody>
+      </p:sp>
+      <p:sp>
+        <p:nvSpPr>
+          <p:cNvPr id="33" name="TextBox 32"/>
+          <p:cNvSpPr txBox="1"/>
+          <p:nvPr/>
+        </p:nvSpPr>
+        <p:spPr>
+          <a:xfrm>
+            <a:off x="7443215" y="6272783"/>
+            <a:ext cx="4178808" cy="201167"/>
+          </a:xfrm>
+          <a:prstGeom prst="rect">
+            <a:avLst/>
+          </a:prstGeom>
+          <a:noFill/>
+        </p:spPr>
+        <p:txBody>
+          <a:bodyPr wrap="square" lIns="0" rIns="0" tIns="0" bIns="0" anchor="t">
+            <a:spAutoFit/>
+          </a:bodyPr>
+          <a:lstStyle/>
+          <a:p>
+            <a:pPr algn="l">
+              <a:spcAft>
+                <a:spcPts val="0"/>
+              </a:spcAft>
+            </a:pPr>
+            <a:r>
+              <a:rPr sz="1150" b="0">
+                <a:solidFill>
+                  <a:srgbClr val="1A1A1A"/>
+                </a:solidFill>
+                <a:latin typeface="微软雅黑"/>
+                <a:ea typeface="微软雅黑"/>
+                <a:cs typeface="微软雅黑"/>
+              </a:rPr>
+              <a:t>该 SN 的一组输入：信号源 · 通道</a:t>
+            </a:r>
+          </a:p>
+        </p:txBody>
+      </p:sp>
+      <p:sp>
+        <p:nvSpPr>
+          <p:cNvPr id="34" name="Rectangle 33"/>
+          <p:cNvSpPr/>
+          <p:nvPr/>
+        </p:nvSpPr>
+        <p:spPr>
+          <a:xfrm>
+            <a:off x="5870448" y="6437375"/>
+            <a:ext cx="5751576" cy="6350"/>
+          </a:xfrm>
+          <a:prstGeom prst="rect">
+            <a:avLst/>
+          </a:prstGeom>
+          <a:solidFill>
+            <a:srgbClr val="D9D5CF"/>
+          </a:solidFill>
+          <a:ln>
+            <a:noFill/>
+          </a:ln>
+          <a:effectLst/>
+        </p:spPr>
         <p:txBody>
           <a:bodyPr rtlCol="0" anchor="ctr"/>
           <a:lstStyle/>
@@ -9089,8 +8779,8 @@
         </p:nvSpPr>
         <p:spPr>
           <a:xfrm>
-            <a:off x="566928" y="420624"/>
-            <a:ext cx="11055096" cy="274320"/>
+            <a:off x="566928" y="384048"/>
+            <a:ext cx="11055096" cy="365760"/>
           </a:xfrm>
           <a:prstGeom prst="rect">
             <a:avLst/>
@@ -9109,7 +8799,7 @@
               </a:spcAft>
             </a:pPr>
             <a:r>
-              <a:rPr sz="1600" b="1">
+              <a:rPr sz="1800" b="1">
                 <a:solidFill>
                   <a:srgbClr val="9B1C1C"/>
                 </a:solidFill>
@@ -9144,20 +8834,6 @@
           </a:ln>
           <a:effectLst/>
         </p:spPr>
-        <p:style>
-          <a:lnRef idx="1">
-            <a:schemeClr val="accent1"/>
-          </a:lnRef>
-          <a:fillRef idx="3">
-            <a:schemeClr val="accent1"/>
-          </a:fillRef>
-          <a:effectRef idx="2">
-            <a:schemeClr val="accent1"/>
-          </a:effectRef>
-          <a:fontRef idx="minor">
-            <a:schemeClr val="lt1"/>
-          </a:fontRef>
-        </p:style>
         <p:txBody>
           <a:bodyPr rtlCol="0" anchor="ctr" wrap="square" tIns="36576" bIns="36576"/>
           <a:lstStyle/>
@@ -9203,20 +8879,6 @@
           </a:ln>
           <a:effectLst/>
         </p:spPr>
-        <p:style>
-          <a:lnRef idx="1">
-            <a:schemeClr val="accent1"/>
-          </a:lnRef>
-          <a:fillRef idx="3">
-            <a:schemeClr val="accent1"/>
-          </a:fillRef>
-          <a:effectRef idx="2">
-            <a:schemeClr val="accent1"/>
-          </a:effectRef>
-          <a:fontRef idx="minor">
-            <a:schemeClr val="lt1"/>
-          </a:fontRef>
-        </p:style>
         <p:txBody>
           <a:bodyPr rtlCol="0" anchor="ctr"/>
           <a:lstStyle/>
@@ -9329,20 +8991,6 @@
           </a:ln>
           <a:effectLst/>
         </p:spPr>
-        <p:style>
-          <a:lnRef idx="1">
-            <a:schemeClr val="accent1"/>
-          </a:lnRef>
-          <a:fillRef idx="3">
-            <a:schemeClr val="accent1"/>
-          </a:fillRef>
-          <a:effectRef idx="2">
-            <a:schemeClr val="accent1"/>
-          </a:effectRef>
-          <a:fontRef idx="minor">
-            <a:schemeClr val="lt1"/>
-          </a:fontRef>
-        </p:style>
         <p:txBody>
           <a:bodyPr rtlCol="0" anchor="ctr"/>
           <a:lstStyle/>
@@ -9455,20 +9103,6 @@
           </a:ln>
           <a:effectLst/>
         </p:spPr>
-        <p:style>
-          <a:lnRef idx="1">
-            <a:schemeClr val="accent1"/>
-          </a:lnRef>
-          <a:fillRef idx="3">
-            <a:schemeClr val="accent1"/>
-          </a:fillRef>
-          <a:effectRef idx="2">
-            <a:schemeClr val="accent1"/>
-          </a:effectRef>
-          <a:fontRef idx="minor">
-            <a:schemeClr val="lt1"/>
-          </a:fontRef>
-        </p:style>
         <p:txBody>
           <a:bodyPr rtlCol="0" anchor="ctr"/>
           <a:lstStyle/>
@@ -9581,20 +9215,6 @@
           </a:ln>
           <a:effectLst/>
         </p:spPr>
-        <p:style>
-          <a:lnRef idx="1">
-            <a:schemeClr val="accent1"/>
-          </a:lnRef>
-          <a:fillRef idx="3">
-            <a:schemeClr val="accent1"/>
-          </a:fillRef>
-          <a:effectRef idx="2">
-            <a:schemeClr val="accent1"/>
-          </a:effectRef>
-          <a:fontRef idx="minor">
-            <a:schemeClr val="lt1"/>
-          </a:fontRef>
-        </p:style>
         <p:txBody>
           <a:bodyPr rtlCol="0" anchor="ctr"/>
           <a:lstStyle/>
@@ -9625,20 +9245,6 @@
           </a:ln>
           <a:effectLst/>
         </p:spPr>
-        <p:style>
-          <a:lnRef idx="1">
-            <a:schemeClr val="accent1"/>
-          </a:lnRef>
-          <a:fillRef idx="3">
-            <a:schemeClr val="accent1"/>
-          </a:fillRef>
-          <a:effectRef idx="2">
-            <a:schemeClr val="accent1"/>
-          </a:effectRef>
-          <a:fontRef idx="minor">
-            <a:schemeClr val="lt1"/>
-          </a:fontRef>
-        </p:style>
         <p:txBody>
           <a:bodyPr rtlCol="0" anchor="ctr" wrap="square" tIns="36576" bIns="36576"/>
           <a:lstStyle/>
@@ -9702,20 +9308,6 @@
           </a:ln>
           <a:effectLst/>
         </p:spPr>
-        <p:style>
-          <a:lnRef idx="1">
-            <a:schemeClr val="accent1"/>
-          </a:lnRef>
-          <a:fillRef idx="3">
-            <a:schemeClr val="accent1"/>
-          </a:fillRef>
-          <a:effectRef idx="2">
-            <a:schemeClr val="accent1"/>
-          </a:effectRef>
-          <a:fontRef idx="minor">
-            <a:schemeClr val="lt1"/>
-          </a:fontRef>
-        </p:style>
         <p:txBody>
           <a:bodyPr rtlCol="0" anchor="ctr" wrap="square" tIns="36576" bIns="36576"/>
           <a:lstStyle/>
@@ -9802,20 +9394,6 @@
           </a:ln>
           <a:effectLst/>
         </p:spPr>
-        <p:style>
-          <a:lnRef idx="1">
-            <a:schemeClr val="accent1"/>
-          </a:lnRef>
-          <a:fillRef idx="3">
-            <a:schemeClr val="accent1"/>
-          </a:fillRef>
-          <a:effectRef idx="2">
-            <a:schemeClr val="accent1"/>
-          </a:effectRef>
-          <a:fontRef idx="minor">
-            <a:schemeClr val="lt1"/>
-          </a:fontRef>
-        </p:style>
         <p:txBody>
           <a:bodyPr rtlCol="0" anchor="ctr" wrap="square" tIns="36576" bIns="36576"/>
           <a:lstStyle/>
@@ -9920,20 +9498,6 @@
           </a:ln>
           <a:effectLst/>
         </p:spPr>
-        <p:style>
-          <a:lnRef idx="1">
-            <a:schemeClr val="accent1"/>
-          </a:lnRef>
-          <a:fillRef idx="3">
-            <a:schemeClr val="accent1"/>
-          </a:fillRef>
-          <a:effectRef idx="2">
-            <a:schemeClr val="accent1"/>
-          </a:effectRef>
-          <a:fontRef idx="minor">
-            <a:schemeClr val="lt1"/>
-          </a:fontRef>
-        </p:style>
         <p:txBody>
           <a:bodyPr rtlCol="0" anchor="ctr" wrap="square" tIns="36576" bIns="36576"/>
           <a:lstStyle/>
@@ -9953,47 +9517,6 @@
                 <a:cs typeface="微软雅黑"/>
               </a:rPr>
               <a:t>设备实例（连接已就绪）</a:t>
-            </a:r>
-          </a:p>
-        </p:txBody>
-      </p:sp>
-      <p:sp>
-        <p:nvSpPr>
-          <p:cNvPr id="20" name="TextBox 19"/>
-          <p:cNvSpPr txBox="1"/>
-          <p:nvPr/>
-        </p:nvSpPr>
-        <p:spPr>
-          <a:xfrm>
-            <a:off x="566928" y="5779008"/>
-            <a:ext cx="11055096" cy="365760"/>
-          </a:xfrm>
-          <a:prstGeom prst="rect">
-            <a:avLst/>
-          </a:prstGeom>
-          <a:noFill/>
-        </p:spPr>
-        <p:txBody>
-          <a:bodyPr wrap="square" lIns="0" rIns="0" tIns="0" bIns="0" anchor="t">
-            <a:spAutoFit/>
-          </a:bodyPr>
-          <a:lstStyle/>
-          <a:p>
-            <a:pPr algn="l">
-              <a:spcAft>
-                <a:spcPts val="0"/>
-              </a:spcAft>
-            </a:pPr>
-            <a:r>
-              <a:rPr sz="1150" b="0">
-                <a:solidFill>
-                  <a:srgbClr val="1A1A1A"/>
-                </a:solidFill>
-                <a:latin typeface="微软雅黑"/>
-                <a:ea typeface="微软雅黑"/>
-                <a:cs typeface="微软雅黑"/>
-              </a:rPr>
-              <a:t>解析失败只记录告警，不阻断整套流程的启动；真正需要设备时由用例判定该步失败。</a:t>
             </a:r>
           </a:p>
         </p:txBody>
@@ -10024,8 +9547,8 @@
         </p:nvSpPr>
         <p:spPr>
           <a:xfrm>
-            <a:off x="566928" y="420624"/>
-            <a:ext cx="11055096" cy="274320"/>
+            <a:off x="566928" y="384048"/>
+            <a:ext cx="11055096" cy="365760"/>
           </a:xfrm>
           <a:prstGeom prst="rect">
             <a:avLst/>
@@ -10044,7 +9567,7 @@
               </a:spcAft>
             </a:pPr>
             <a:r>
-              <a:rPr sz="1600" b="1">
+              <a:rPr sz="1800" b="1">
                 <a:solidFill>
                   <a:srgbClr val="9B1C1C"/>
                 </a:solidFill>
@@ -10079,20 +9602,6 @@
           </a:ln>
           <a:effectLst/>
         </p:spPr>
-        <p:style>
-          <a:lnRef idx="1">
-            <a:schemeClr val="accent1"/>
-          </a:lnRef>
-          <a:fillRef idx="3">
-            <a:schemeClr val="accent1"/>
-          </a:fillRef>
-          <a:effectRef idx="2">
-            <a:schemeClr val="accent1"/>
-          </a:effectRef>
-          <a:fontRef idx="minor">
-            <a:schemeClr val="lt1"/>
-          </a:fontRef>
-        </p:style>
         <p:txBody>
           <a:bodyPr rtlCol="0" anchor="ctr" wrap="square" tIns="36576" bIns="36576"/>
           <a:lstStyle/>
@@ -10138,20 +9647,6 @@
           </a:ln>
           <a:effectLst/>
         </p:spPr>
-        <p:style>
-          <a:lnRef idx="1">
-            <a:schemeClr val="accent1"/>
-          </a:lnRef>
-          <a:fillRef idx="3">
-            <a:schemeClr val="accent1"/>
-          </a:fillRef>
-          <a:effectRef idx="2">
-            <a:schemeClr val="accent1"/>
-          </a:effectRef>
-          <a:fontRef idx="minor">
-            <a:schemeClr val="lt1"/>
-          </a:fontRef>
-        </p:style>
         <p:txBody>
           <a:bodyPr rtlCol="0" anchor="ctr"/>
           <a:lstStyle/>
@@ -10182,20 +9677,6 @@
           </a:ln>
           <a:effectLst/>
         </p:spPr>
-        <p:style>
-          <a:lnRef idx="1">
-            <a:schemeClr val="accent1"/>
-          </a:lnRef>
-          <a:fillRef idx="3">
-            <a:schemeClr val="accent1"/>
-          </a:fillRef>
-          <a:effectRef idx="2">
-            <a:schemeClr val="accent1"/>
-          </a:effectRef>
-          <a:fontRef idx="minor">
-            <a:schemeClr val="lt1"/>
-          </a:fontRef>
-        </p:style>
         <p:txBody>
           <a:bodyPr rtlCol="0" anchor="ctr" wrap="square" lIns="128016" rIns="128016" tIns="36576" bIns="36576"/>
           <a:lstStyle/>
@@ -10277,20 +9758,6 @@
           </a:ln>
           <a:effectLst/>
         </p:spPr>
-        <p:style>
-          <a:lnRef idx="1">
-            <a:schemeClr val="accent1"/>
-          </a:lnRef>
-          <a:fillRef idx="3">
-            <a:schemeClr val="accent1"/>
-          </a:fillRef>
-          <a:effectRef idx="2">
-            <a:schemeClr val="accent1"/>
-          </a:effectRef>
-          <a:fontRef idx="minor">
-            <a:schemeClr val="lt1"/>
-          </a:fontRef>
-        </p:style>
         <p:txBody>
           <a:bodyPr rtlCol="0" anchor="ctr" wrap="square" lIns="128016" rIns="128016" tIns="36576" bIns="36576"/>
           <a:lstStyle/>
@@ -10372,20 +9839,6 @@
           </a:ln>
           <a:effectLst/>
         </p:spPr>
-        <p:style>
-          <a:lnRef idx="1">
-            <a:schemeClr val="accent1"/>
-          </a:lnRef>
-          <a:fillRef idx="3">
-            <a:schemeClr val="accent1"/>
-          </a:fillRef>
-          <a:effectRef idx="2">
-            <a:schemeClr val="accent1"/>
-          </a:effectRef>
-          <a:fontRef idx="minor">
-            <a:schemeClr val="lt1"/>
-          </a:fontRef>
-        </p:style>
         <p:txBody>
           <a:bodyPr rtlCol="0" anchor="ctr" wrap="square" lIns="128016" rIns="128016" tIns="36576" bIns="36576"/>
           <a:lstStyle/>
@@ -10467,20 +9920,6 @@
           </a:ln>
           <a:effectLst/>
         </p:spPr>
-        <p:style>
-          <a:lnRef idx="1">
-            <a:schemeClr val="accent1"/>
-          </a:lnRef>
-          <a:fillRef idx="3">
-            <a:schemeClr val="accent1"/>
-          </a:fillRef>
-          <a:effectRef idx="2">
-            <a:schemeClr val="accent1"/>
-          </a:effectRef>
-          <a:fontRef idx="minor">
-            <a:schemeClr val="lt1"/>
-          </a:fontRef>
-        </p:style>
         <p:txBody>
           <a:bodyPr rtlCol="0" anchor="ctr" wrap="square" lIns="128016" rIns="128016" tIns="36576" bIns="36576"/>
           <a:lstStyle/>
@@ -10562,20 +10001,6 @@
           </a:ln>
           <a:effectLst/>
         </p:spPr>
-        <p:style>
-          <a:lnRef idx="1">
-            <a:schemeClr val="accent1"/>
-          </a:lnRef>
-          <a:fillRef idx="3">
-            <a:schemeClr val="accent1"/>
-          </a:fillRef>
-          <a:effectRef idx="2">
-            <a:schemeClr val="accent1"/>
-          </a:effectRef>
-          <a:fontRef idx="minor">
-            <a:schemeClr val="lt1"/>
-          </a:fontRef>
-        </p:style>
         <p:txBody>
           <a:bodyPr rtlCol="0" anchor="ctr" wrap="square" lIns="128016" rIns="128016" tIns="36576" bIns="36576"/>
           <a:lstStyle/>
@@ -10657,20 +10082,6 @@
           </a:ln>
           <a:effectLst/>
         </p:spPr>
-        <p:style>
-          <a:lnRef idx="1">
-            <a:schemeClr val="accent1"/>
-          </a:lnRef>
-          <a:fillRef idx="3">
-            <a:schemeClr val="accent1"/>
-          </a:fillRef>
-          <a:effectRef idx="2">
-            <a:schemeClr val="accent1"/>
-          </a:effectRef>
-          <a:fontRef idx="minor">
-            <a:schemeClr val="lt1"/>
-          </a:fontRef>
-        </p:style>
         <p:txBody>
           <a:bodyPr rtlCol="0" anchor="ctr" wrap="square" lIns="128016" rIns="128016" tIns="36576" bIns="36576"/>
           <a:lstStyle/>
@@ -10752,20 +10163,6 @@
           </a:ln>
           <a:effectLst/>
         </p:spPr>
-        <p:style>
-          <a:lnRef idx="1">
-            <a:schemeClr val="accent1"/>
-          </a:lnRef>
-          <a:fillRef idx="3">
-            <a:schemeClr val="accent1"/>
-          </a:fillRef>
-          <a:effectRef idx="2">
-            <a:schemeClr val="accent1"/>
-          </a:effectRef>
-          <a:fontRef idx="minor">
-            <a:schemeClr val="lt1"/>
-          </a:fontRef>
-        </p:style>
         <p:txBody>
           <a:bodyPr rtlCol="0" anchor="ctr" wrap="square" tIns="36576" bIns="36576"/>
           <a:lstStyle/>
@@ -10869,8 +10266,8 @@
         </p:nvSpPr>
         <p:spPr>
           <a:xfrm>
-            <a:off x="566928" y="420624"/>
-            <a:ext cx="11055096" cy="274320"/>
+            <a:off x="566928" y="384048"/>
+            <a:ext cx="11055096" cy="365760"/>
           </a:xfrm>
           <a:prstGeom prst="rect">
             <a:avLst/>
@@ -10889,7 +10286,7 @@
               </a:spcAft>
             </a:pPr>
             <a:r>
-              <a:rPr sz="1600" b="1">
+              <a:rPr sz="1800" b="1">
                 <a:solidFill>
                   <a:srgbClr val="9B1C1C"/>
                 </a:solidFill>
@@ -10924,20 +10321,6 @@
           </a:ln>
           <a:effectLst/>
         </p:spPr>
-        <p:style>
-          <a:lnRef idx="1">
-            <a:schemeClr val="accent1"/>
-          </a:lnRef>
-          <a:fillRef idx="3">
-            <a:schemeClr val="accent1"/>
-          </a:fillRef>
-          <a:effectRef idx="2">
-            <a:schemeClr val="accent1"/>
-          </a:effectRef>
-          <a:fontRef idx="minor">
-            <a:schemeClr val="lt1"/>
-          </a:fontRef>
-        </p:style>
         <p:txBody>
           <a:bodyPr rtlCol="0" anchor="ctr" wrap="square" tIns="36576" bIns="36576"/>
           <a:lstStyle/>
@@ -10983,20 +10366,6 @@
           </a:ln>
           <a:effectLst/>
         </p:spPr>
-        <p:style>
-          <a:lnRef idx="1">
-            <a:schemeClr val="accent1"/>
-          </a:lnRef>
-          <a:fillRef idx="3">
-            <a:schemeClr val="accent1"/>
-          </a:fillRef>
-          <a:effectRef idx="2">
-            <a:schemeClr val="accent1"/>
-          </a:effectRef>
-          <a:fontRef idx="minor">
-            <a:schemeClr val="lt1"/>
-          </a:fontRef>
-        </p:style>
         <p:txBody>
           <a:bodyPr rtlCol="0" anchor="ctr"/>
           <a:lstStyle/>
@@ -11027,20 +10396,6 @@
           </a:ln>
           <a:effectLst/>
         </p:spPr>
-        <p:style>
-          <a:lnRef idx="1">
-            <a:schemeClr val="accent1"/>
-          </a:lnRef>
-          <a:fillRef idx="3">
-            <a:schemeClr val="accent1"/>
-          </a:fillRef>
-          <a:effectRef idx="2">
-            <a:schemeClr val="accent1"/>
-          </a:effectRef>
-          <a:fontRef idx="minor">
-            <a:schemeClr val="lt1"/>
-          </a:fontRef>
-        </p:style>
         <p:txBody>
           <a:bodyPr rtlCol="0" anchor="ctr" wrap="square" tIns="36576" bIns="36576"/>
           <a:lstStyle/>
@@ -11086,20 +10441,6 @@
           </a:ln>
           <a:effectLst/>
         </p:spPr>
-        <p:style>
-          <a:lnRef idx="1">
-            <a:schemeClr val="accent1"/>
-          </a:lnRef>
-          <a:fillRef idx="3">
-            <a:schemeClr val="accent1"/>
-          </a:fillRef>
-          <a:effectRef idx="2">
-            <a:schemeClr val="accent1"/>
-          </a:effectRef>
-          <a:fontRef idx="minor">
-            <a:schemeClr val="lt1"/>
-          </a:fontRef>
-        </p:style>
         <p:txBody>
           <a:bodyPr rtlCol="0" anchor="ctr"/>
           <a:lstStyle/>
@@ -11130,20 +10471,6 @@
           </a:ln>
           <a:effectLst/>
         </p:spPr>
-        <p:style>
-          <a:lnRef idx="1">
-            <a:schemeClr val="accent1"/>
-          </a:lnRef>
-          <a:fillRef idx="3">
-            <a:schemeClr val="accent1"/>
-          </a:fillRef>
-          <a:effectRef idx="2">
-            <a:schemeClr val="accent1"/>
-          </a:effectRef>
-          <a:fontRef idx="minor">
-            <a:schemeClr val="lt1"/>
-          </a:fontRef>
-        </p:style>
         <p:txBody>
           <a:bodyPr rtlCol="0" anchor="ctr" wrap="square" tIns="36576" bIns="36576"/>
           <a:lstStyle/>
@@ -11189,20 +10516,6 @@
           </a:ln>
           <a:effectLst/>
         </p:spPr>
-        <p:style>
-          <a:lnRef idx="1">
-            <a:schemeClr val="accent1"/>
-          </a:lnRef>
-          <a:fillRef idx="3">
-            <a:schemeClr val="accent1"/>
-          </a:fillRef>
-          <a:effectRef idx="2">
-            <a:schemeClr val="accent1"/>
-          </a:effectRef>
-          <a:fontRef idx="minor">
-            <a:schemeClr val="lt1"/>
-          </a:fontRef>
-        </p:style>
         <p:txBody>
           <a:bodyPr rtlCol="0" anchor="ctr"/>
           <a:lstStyle/>
@@ -11233,20 +10546,6 @@
           </a:ln>
           <a:effectLst/>
         </p:spPr>
-        <p:style>
-          <a:lnRef idx="1">
-            <a:schemeClr val="accent1"/>
-          </a:lnRef>
-          <a:fillRef idx="3">
-            <a:schemeClr val="accent1"/>
-          </a:fillRef>
-          <a:effectRef idx="2">
-            <a:schemeClr val="accent1"/>
-          </a:effectRef>
-          <a:fontRef idx="minor">
-            <a:schemeClr val="lt1"/>
-          </a:fontRef>
-        </p:style>
         <p:txBody>
           <a:bodyPr rtlCol="0" anchor="ctr" wrap="square" tIns="36576" bIns="36576"/>
           <a:lstStyle/>
@@ -11333,20 +10632,6 @@
           </a:ln>
           <a:effectLst/>
         </p:spPr>
-        <p:style>
-          <a:lnRef idx="1">
-            <a:schemeClr val="accent1"/>
-          </a:lnRef>
-          <a:fillRef idx="3">
-            <a:schemeClr val="accent1"/>
-          </a:fillRef>
-          <a:effectRef idx="2">
-            <a:schemeClr val="accent1"/>
-          </a:effectRef>
-          <a:fontRef idx="minor">
-            <a:schemeClr val="lt1"/>
-          </a:fontRef>
-        </p:style>
         <p:txBody>
           <a:bodyPr rtlCol="0" anchor="ctr" wrap="square" tIns="36576" bIns="36576"/>
           <a:lstStyle/>
@@ -11392,20 +10677,6 @@
           </a:ln>
           <a:effectLst/>
         </p:spPr>
-        <p:style>
-          <a:lnRef idx="1">
-            <a:schemeClr val="accent1"/>
-          </a:lnRef>
-          <a:fillRef idx="3">
-            <a:schemeClr val="accent1"/>
-          </a:fillRef>
-          <a:effectRef idx="2">
-            <a:schemeClr val="accent1"/>
-          </a:effectRef>
-          <a:fontRef idx="minor">
-            <a:schemeClr val="lt1"/>
-          </a:fontRef>
-        </p:style>
         <p:txBody>
           <a:bodyPr rtlCol="0" anchor="ctr"/>
           <a:lstStyle/>
@@ -11436,20 +10707,6 @@
           </a:ln>
           <a:effectLst/>
         </p:spPr>
-        <p:style>
-          <a:lnRef idx="1">
-            <a:schemeClr val="accent1"/>
-          </a:lnRef>
-          <a:fillRef idx="3">
-            <a:schemeClr val="accent1"/>
-          </a:fillRef>
-          <a:effectRef idx="2">
-            <a:schemeClr val="accent1"/>
-          </a:effectRef>
-          <a:fontRef idx="minor">
-            <a:schemeClr val="lt1"/>
-          </a:fontRef>
-        </p:style>
         <p:txBody>
           <a:bodyPr rtlCol="0" anchor="ctr" wrap="square" tIns="36576" bIns="36576"/>
           <a:lstStyle/>
@@ -11495,20 +10752,6 @@
           </a:ln>
           <a:effectLst/>
         </p:spPr>
-        <p:style>
-          <a:lnRef idx="1">
-            <a:schemeClr val="accent1"/>
-          </a:lnRef>
-          <a:fillRef idx="3">
-            <a:schemeClr val="accent1"/>
-          </a:fillRef>
-          <a:effectRef idx="2">
-            <a:schemeClr val="accent1"/>
-          </a:effectRef>
-          <a:fontRef idx="minor">
-            <a:schemeClr val="lt1"/>
-          </a:fontRef>
-        </p:style>
         <p:txBody>
           <a:bodyPr rtlCol="0" anchor="ctr"/>
           <a:lstStyle/>
@@ -11539,20 +10782,6 @@
           </a:ln>
           <a:effectLst/>
         </p:spPr>
-        <p:style>
-          <a:lnRef idx="1">
-            <a:schemeClr val="accent1"/>
-          </a:lnRef>
-          <a:fillRef idx="3">
-            <a:schemeClr val="accent1"/>
-          </a:fillRef>
-          <a:effectRef idx="2">
-            <a:schemeClr val="accent1"/>
-          </a:effectRef>
-          <a:fontRef idx="minor">
-            <a:schemeClr val="lt1"/>
-          </a:fontRef>
-        </p:style>
         <p:txBody>
           <a:bodyPr rtlCol="0" anchor="ctr" wrap="square" tIns="36576" bIns="36576"/>
           <a:lstStyle/>
@@ -11762,20 +10991,6 @@
           </a:ln>
           <a:effectLst/>
         </p:spPr>
-        <p:style>
-          <a:lnRef idx="1">
-            <a:schemeClr val="accent1"/>
-          </a:lnRef>
-          <a:fillRef idx="3">
-            <a:schemeClr val="accent1"/>
-          </a:fillRef>
-          <a:effectRef idx="2">
-            <a:schemeClr val="accent1"/>
-          </a:effectRef>
-          <a:fontRef idx="minor">
-            <a:schemeClr val="lt1"/>
-          </a:fontRef>
-        </p:style>
         <p:txBody>
           <a:bodyPr rtlCol="0" anchor="ctr"/>
           <a:lstStyle/>
@@ -11888,20 +11103,6 @@
           </a:ln>
           <a:effectLst/>
         </p:spPr>
-        <p:style>
-          <a:lnRef idx="1">
-            <a:schemeClr val="accent1"/>
-          </a:lnRef>
-          <a:fillRef idx="3">
-            <a:schemeClr val="accent1"/>
-          </a:fillRef>
-          <a:effectRef idx="2">
-            <a:schemeClr val="accent1"/>
-          </a:effectRef>
-          <a:fontRef idx="minor">
-            <a:schemeClr val="lt1"/>
-          </a:fontRef>
-        </p:style>
         <p:txBody>
           <a:bodyPr rtlCol="0" anchor="ctr"/>
           <a:lstStyle/>
@@ -12014,20 +11215,6 @@
           </a:ln>
           <a:effectLst/>
         </p:spPr>
-        <p:style>
-          <a:lnRef idx="1">
-            <a:schemeClr val="accent1"/>
-          </a:lnRef>
-          <a:fillRef idx="3">
-            <a:schemeClr val="accent1"/>
-          </a:fillRef>
-          <a:effectRef idx="2">
-            <a:schemeClr val="accent1"/>
-          </a:effectRef>
-          <a:fontRef idx="minor">
-            <a:schemeClr val="lt1"/>
-          </a:fontRef>
-        </p:style>
         <p:txBody>
           <a:bodyPr rtlCol="0" anchor="ctr"/>
           <a:lstStyle/>
@@ -12140,20 +11327,6 @@
           </a:ln>
           <a:effectLst/>
         </p:spPr>
-        <p:style>
-          <a:lnRef idx="1">
-            <a:schemeClr val="accent1"/>
-          </a:lnRef>
-          <a:fillRef idx="3">
-            <a:schemeClr val="accent1"/>
-          </a:fillRef>
-          <a:effectRef idx="2">
-            <a:schemeClr val="accent1"/>
-          </a:effectRef>
-          <a:fontRef idx="minor">
-            <a:schemeClr val="lt1"/>
-          </a:fontRef>
-        </p:style>
         <p:txBody>
           <a:bodyPr rtlCol="0" anchor="ctr"/>
           <a:lstStyle/>
@@ -12266,20 +11439,6 @@
           </a:ln>
           <a:effectLst/>
         </p:spPr>
-        <p:style>
-          <a:lnRef idx="1">
-            <a:schemeClr val="accent1"/>
-          </a:lnRef>
-          <a:fillRef idx="3">
-            <a:schemeClr val="accent1"/>
-          </a:fillRef>
-          <a:effectRef idx="2">
-            <a:schemeClr val="accent1"/>
-          </a:effectRef>
-          <a:fontRef idx="minor">
-            <a:schemeClr val="lt1"/>
-          </a:fontRef>
-        </p:style>
         <p:txBody>
           <a:bodyPr rtlCol="0" anchor="ctr"/>
           <a:lstStyle/>
@@ -12392,20 +11551,6 @@
           </a:ln>
           <a:effectLst/>
         </p:spPr>
-        <p:style>
-          <a:lnRef idx="1">
-            <a:schemeClr val="accent1"/>
-          </a:lnRef>
-          <a:fillRef idx="3">
-            <a:schemeClr val="accent1"/>
-          </a:fillRef>
-          <a:effectRef idx="2">
-            <a:schemeClr val="accent1"/>
-          </a:effectRef>
-          <a:fontRef idx="minor">
-            <a:schemeClr val="lt1"/>
-          </a:fontRef>
-        </p:style>
         <p:txBody>
           <a:bodyPr rtlCol="0" anchor="ctr"/>
           <a:lstStyle/>
@@ -12518,20 +11663,6 @@
           </a:ln>
           <a:effectLst/>
         </p:spPr>
-        <p:style>
-          <a:lnRef idx="1">
-            <a:schemeClr val="accent1"/>
-          </a:lnRef>
-          <a:fillRef idx="3">
-            <a:schemeClr val="accent1"/>
-          </a:fillRef>
-          <a:effectRef idx="2">
-            <a:schemeClr val="accent1"/>
-          </a:effectRef>
-          <a:fontRef idx="minor">
-            <a:schemeClr val="lt1"/>
-          </a:fontRef>
-        </p:style>
         <p:txBody>
           <a:bodyPr rtlCol="0" anchor="ctr"/>
           <a:lstStyle/>
@@ -12603,20 +11734,6 @@
           </a:ln>
           <a:effectLst/>
         </p:spPr>
-        <p:style>
-          <a:lnRef idx="1">
-            <a:schemeClr val="accent1"/>
-          </a:lnRef>
-          <a:fillRef idx="3">
-            <a:schemeClr val="accent1"/>
-          </a:fillRef>
-          <a:effectRef idx="2">
-            <a:schemeClr val="accent1"/>
-          </a:effectRef>
-          <a:fontRef idx="minor">
-            <a:schemeClr val="lt1"/>
-          </a:fontRef>
-        </p:style>
         <p:txBody>
           <a:bodyPr rtlCol="0" anchor="ctr" wrap="square" tIns="36576" bIns="36576"/>
           <a:lstStyle/>
@@ -12721,20 +11838,6 @@
           </a:ln>
           <a:effectLst/>
         </p:spPr>
-        <p:style>
-          <a:lnRef idx="1">
-            <a:schemeClr val="accent1"/>
-          </a:lnRef>
-          <a:fillRef idx="3">
-            <a:schemeClr val="accent1"/>
-          </a:fillRef>
-          <a:effectRef idx="2">
-            <a:schemeClr val="accent1"/>
-          </a:effectRef>
-          <a:fontRef idx="minor">
-            <a:schemeClr val="lt1"/>
-          </a:fontRef>
-        </p:style>
         <p:txBody>
           <a:bodyPr rtlCol="0" anchor="ctr" wrap="square" tIns="36576" bIns="36576"/>
           <a:lstStyle/>
@@ -12811,27 +11914,11 @@
           <a:solidFill>
             <a:srgbClr val="EAF0F9"/>
           </a:solidFill>
-          <a:ln w="9525">
-            <a:solidFill>
-              <a:srgbClr val="002FA7"/>
-            </a:solidFill>
+          <a:ln>
+            <a:noFill/>
           </a:ln>
           <a:effectLst/>
         </p:spPr>
-        <p:style>
-          <a:lnRef idx="1">
-            <a:schemeClr val="accent1"/>
-          </a:lnRef>
-          <a:fillRef idx="3">
-            <a:schemeClr val="accent1"/>
-          </a:fillRef>
-          <a:effectRef idx="2">
-            <a:schemeClr val="accent1"/>
-          </a:effectRef>
-          <a:fontRef idx="minor">
-            <a:schemeClr val="lt1"/>
-          </a:fontRef>
-        </p:style>
         <p:txBody>
           <a:bodyPr rtlCol="0" anchor="ctr" wrap="square" tIns="36576" bIns="36576"/>
           <a:lstStyle/>
@@ -12890,27 +11977,11 @@
           <a:solidFill>
             <a:srgbClr val="EAF0F9"/>
           </a:solidFill>
-          <a:ln w="9525">
-            <a:solidFill>
-              <a:srgbClr val="002FA7"/>
-            </a:solidFill>
+          <a:ln>
+            <a:noFill/>
           </a:ln>
           <a:effectLst/>
         </p:spPr>
-        <p:style>
-          <a:lnRef idx="1">
-            <a:schemeClr val="accent1"/>
-          </a:lnRef>
-          <a:fillRef idx="3">
-            <a:schemeClr val="accent1"/>
-          </a:fillRef>
-          <a:effectRef idx="2">
-            <a:schemeClr val="accent1"/>
-          </a:effectRef>
-          <a:fontRef idx="minor">
-            <a:schemeClr val="lt1"/>
-          </a:fontRef>
-        </p:style>
         <p:txBody>
           <a:bodyPr rtlCol="0" anchor="ctr" wrap="square" tIns="36576" bIns="36576"/>
           <a:lstStyle/>
@@ -12948,47 +12019,6 @@
                 <a:cs typeface="微软雅黑"/>
               </a:rPr>
               <a:t>停止本轮，转收尾与报告</a:t>
-            </a:r>
-          </a:p>
-        </p:txBody>
-      </p:sp>
-      <p:sp>
-        <p:nvSpPr>
-          <p:cNvPr id="45" name="TextBox 44"/>
-          <p:cNvSpPr txBox="1"/>
-          <p:nvPr/>
-        </p:nvSpPr>
-        <p:spPr>
-          <a:xfrm>
-            <a:off x="6272784" y="5358384"/>
-            <a:ext cx="5349240" cy="566928"/>
-          </a:xfrm>
-          <a:prstGeom prst="rect">
-            <a:avLst/>
-          </a:prstGeom>
-          <a:noFill/>
-        </p:spPr>
-        <p:txBody>
-          <a:bodyPr wrap="square" lIns="0" rIns="0" tIns="0" bIns="0" anchor="t">
-            <a:spAutoFit/>
-          </a:bodyPr>
-          <a:lstStyle/>
-          <a:p>
-            <a:pPr algn="l">
-              <a:spcAft>
-                <a:spcPts val="0"/>
-              </a:spcAft>
-            </a:pPr>
-            <a:r>
-              <a:rPr sz="1150" b="0">
-                <a:solidFill>
-                  <a:srgbClr val="1A1A1A"/>
-                </a:solidFill>
-                <a:latin typeface="微软雅黑"/>
-                <a:ea typeface="微软雅黑"/>
-                <a:cs typeface="微软雅黑"/>
-              </a:rPr>
-              <a:t>需要操作员判断的步骤（外观检查、装夹确认、人工上下料）都用这一种类型表达；弹窗内容不写进清单，由用例按名称从 resource/ 取，改文案与示意图不动清单。</a:t>
             </a:r>
           </a:p>
         </p:txBody>
@@ -13019,8 +12049,8 @@
         </p:nvSpPr>
         <p:spPr>
           <a:xfrm>
-            <a:off x="566928" y="420624"/>
-            <a:ext cx="11055096" cy="274320"/>
+            <a:off x="566928" y="384048"/>
+            <a:ext cx="11055096" cy="365760"/>
           </a:xfrm>
           <a:prstGeom prst="rect">
             <a:avLst/>
@@ -13039,7 +12069,7 @@
               </a:spcAft>
             </a:pPr>
             <a:r>
-              <a:rPr sz="1600" b="1">
+              <a:rPr sz="1800" b="1">
                 <a:solidFill>
                   <a:srgbClr val="9B1C1C"/>
                 </a:solidFill>
@@ -13074,20 +12104,6 @@
           </a:ln>
           <a:effectLst/>
         </p:spPr>
-        <p:style>
-          <a:lnRef idx="1">
-            <a:schemeClr val="accent1"/>
-          </a:lnRef>
-          <a:fillRef idx="3">
-            <a:schemeClr val="accent1"/>
-          </a:fillRef>
-          <a:effectRef idx="2">
-            <a:schemeClr val="accent1"/>
-          </a:effectRef>
-          <a:fontRef idx="minor">
-            <a:schemeClr val="lt1"/>
-          </a:fontRef>
-        </p:style>
         <p:txBody>
           <a:bodyPr rtlCol="0" anchor="ctr" wrap="square" tIns="36576" bIns="36576"/>
           <a:lstStyle/>
@@ -13133,20 +12149,6 @@
           </a:ln>
           <a:effectLst/>
         </p:spPr>
-        <p:style>
-          <a:lnRef idx="1">
-            <a:schemeClr val="accent1"/>
-          </a:lnRef>
-          <a:fillRef idx="3">
-            <a:schemeClr val="accent1"/>
-          </a:fillRef>
-          <a:effectRef idx="2">
-            <a:schemeClr val="accent1"/>
-          </a:effectRef>
-          <a:fontRef idx="minor">
-            <a:schemeClr val="lt1"/>
-          </a:fontRef>
-        </p:style>
         <p:txBody>
           <a:bodyPr rtlCol="0" anchor="ctr"/>
           <a:lstStyle/>
@@ -13218,20 +12220,6 @@
           </a:ln>
           <a:effectLst/>
         </p:spPr>
-        <p:style>
-          <a:lnRef idx="1">
-            <a:schemeClr val="accent1"/>
-          </a:lnRef>
-          <a:fillRef idx="3">
-            <a:schemeClr val="accent1"/>
-          </a:fillRef>
-          <a:effectRef idx="2">
-            <a:schemeClr val="accent1"/>
-          </a:effectRef>
-          <a:fontRef idx="minor">
-            <a:schemeClr val="lt1"/>
-          </a:fontRef>
-        </p:style>
         <p:txBody>
           <a:bodyPr rtlCol="0" anchor="ctr" wrap="square" tIns="36576" bIns="36576"/>
           <a:lstStyle/>
@@ -13372,20 +12360,6 @@
           </a:ln>
           <a:effectLst/>
         </p:spPr>
-        <p:style>
-          <a:lnRef idx="1">
-            <a:schemeClr val="accent1"/>
-          </a:lnRef>
-          <a:fillRef idx="3">
-            <a:schemeClr val="accent1"/>
-          </a:fillRef>
-          <a:effectRef idx="2">
-            <a:schemeClr val="accent1"/>
-          </a:effectRef>
-          <a:fontRef idx="minor">
-            <a:schemeClr val="lt1"/>
-          </a:fontRef>
-        </p:style>
         <p:txBody>
           <a:bodyPr rtlCol="0" anchor="ctr" wrap="square" lIns="36576" rIns="36576" tIns="36576" bIns="36576"/>
           <a:lstStyle/>
@@ -13432,20 +12406,6 @@
           </a:ln>
           <a:effectLst/>
         </p:spPr>
-        <p:style>
-          <a:lnRef idx="1">
-            <a:schemeClr val="accent1"/>
-          </a:lnRef>
-          <a:fillRef idx="3">
-            <a:schemeClr val="accent1"/>
-          </a:fillRef>
-          <a:effectRef idx="2">
-            <a:schemeClr val="accent1"/>
-          </a:effectRef>
-          <a:fontRef idx="minor">
-            <a:schemeClr val="lt1"/>
-          </a:fontRef>
-        </p:style>
         <p:txBody>
           <a:bodyPr rtlCol="0" anchor="ctr"/>
           <a:lstStyle/>
@@ -13471,27 +12431,11 @@
           <a:solidFill>
             <a:srgbClr val="EAF0F9"/>
           </a:solidFill>
-          <a:ln w="9525">
-            <a:solidFill>
-              <a:srgbClr val="002FA7"/>
-            </a:solidFill>
+          <a:ln>
+            <a:noFill/>
           </a:ln>
           <a:effectLst/>
         </p:spPr>
-        <p:style>
-          <a:lnRef idx="1">
-            <a:schemeClr val="accent1"/>
-          </a:lnRef>
-          <a:fillRef idx="3">
-            <a:schemeClr val="accent1"/>
-          </a:fillRef>
-          <a:effectRef idx="2">
-            <a:schemeClr val="accent1"/>
-          </a:effectRef>
-          <a:fontRef idx="minor">
-            <a:schemeClr val="lt1"/>
-          </a:fontRef>
-        </p:style>
         <p:txBody>
           <a:bodyPr rtlCol="0" anchor="ctr" wrap="square" lIns="36576" rIns="36576" tIns="36576" bIns="36576"/>
           <a:lstStyle/>
@@ -13538,20 +12482,6 @@
           </a:ln>
           <a:effectLst/>
         </p:spPr>
-        <p:style>
-          <a:lnRef idx="1">
-            <a:schemeClr val="accent1"/>
-          </a:lnRef>
-          <a:fillRef idx="3">
-            <a:schemeClr val="accent1"/>
-          </a:fillRef>
-          <a:effectRef idx="2">
-            <a:schemeClr val="accent1"/>
-          </a:effectRef>
-          <a:fontRef idx="minor">
-            <a:schemeClr val="lt1"/>
-          </a:fontRef>
-        </p:style>
         <p:txBody>
           <a:bodyPr rtlCol="0" anchor="ctr"/>
           <a:lstStyle/>
@@ -13582,20 +12512,6 @@
           </a:ln>
           <a:effectLst/>
         </p:spPr>
-        <p:style>
-          <a:lnRef idx="1">
-            <a:schemeClr val="accent1"/>
-          </a:lnRef>
-          <a:fillRef idx="3">
-            <a:schemeClr val="accent1"/>
-          </a:fillRef>
-          <a:effectRef idx="2">
-            <a:schemeClr val="accent1"/>
-          </a:effectRef>
-          <a:fontRef idx="minor">
-            <a:schemeClr val="lt1"/>
-          </a:fontRef>
-        </p:style>
         <p:txBody>
           <a:bodyPr rtlCol="0" anchor="ctr" wrap="square" lIns="36576" rIns="36576" tIns="36576" bIns="36576"/>
           <a:lstStyle/>
@@ -13641,20 +12557,6 @@
           </a:ln>
           <a:effectLst/>
         </p:spPr>
-        <p:style>
-          <a:lnRef idx="1">
-            <a:schemeClr val="accent1"/>
-          </a:lnRef>
-          <a:fillRef idx="3">
-            <a:schemeClr val="accent1"/>
-          </a:fillRef>
-          <a:effectRef idx="2">
-            <a:schemeClr val="accent1"/>
-          </a:effectRef>
-          <a:fontRef idx="minor">
-            <a:schemeClr val="lt1"/>
-          </a:fontRef>
-        </p:style>
         <p:txBody>
           <a:bodyPr rtlCol="0" anchor="ctr"/>
           <a:lstStyle/>
@@ -13685,20 +12587,6 @@
           </a:ln>
           <a:effectLst/>
         </p:spPr>
-        <p:style>
-          <a:lnRef idx="1">
-            <a:schemeClr val="accent1"/>
-          </a:lnRef>
-          <a:fillRef idx="3">
-            <a:schemeClr val="accent1"/>
-          </a:fillRef>
-          <a:effectRef idx="2">
-            <a:schemeClr val="accent1"/>
-          </a:effectRef>
-          <a:fontRef idx="minor">
-            <a:schemeClr val="lt1"/>
-          </a:fontRef>
-        </p:style>
         <p:txBody>
           <a:bodyPr rtlCol="0" anchor="ctr" wrap="square" lIns="36576" rIns="36576" tIns="36576" bIns="36576"/>
           <a:lstStyle/>
@@ -13908,20 +12796,6 @@
           </a:ln>
           <a:effectLst/>
         </p:spPr>
-        <p:style>
-          <a:lnRef idx="1">
-            <a:schemeClr val="accent1"/>
-          </a:lnRef>
-          <a:fillRef idx="3">
-            <a:schemeClr val="accent1"/>
-          </a:fillRef>
-          <a:effectRef idx="2">
-            <a:schemeClr val="accent1"/>
-          </a:effectRef>
-          <a:fontRef idx="minor">
-            <a:schemeClr val="lt1"/>
-          </a:fontRef>
-        </p:style>
         <p:txBody>
           <a:bodyPr rtlCol="0" anchor="ctr"/>
           <a:lstStyle/>
@@ -14034,20 +12908,6 @@
           </a:ln>
           <a:effectLst/>
         </p:spPr>
-        <p:style>
-          <a:lnRef idx="1">
-            <a:schemeClr val="accent1"/>
-          </a:lnRef>
-          <a:fillRef idx="3">
-            <a:schemeClr val="accent1"/>
-          </a:fillRef>
-          <a:effectRef idx="2">
-            <a:schemeClr val="accent1"/>
-          </a:effectRef>
-          <a:fontRef idx="minor">
-            <a:schemeClr val="lt1"/>
-          </a:fontRef>
-        </p:style>
         <p:txBody>
           <a:bodyPr rtlCol="0" anchor="ctr"/>
           <a:lstStyle/>
@@ -14160,20 +13020,6 @@
           </a:ln>
           <a:effectLst/>
         </p:spPr>
-        <p:style>
-          <a:lnRef idx="1">
-            <a:schemeClr val="accent1"/>
-          </a:lnRef>
-          <a:fillRef idx="3">
-            <a:schemeClr val="accent1"/>
-          </a:fillRef>
-          <a:effectRef idx="2">
-            <a:schemeClr val="accent1"/>
-          </a:effectRef>
-          <a:fontRef idx="minor">
-            <a:schemeClr val="lt1"/>
-          </a:fontRef>
-        </p:style>
         <p:txBody>
           <a:bodyPr rtlCol="0" anchor="ctr"/>
           <a:lstStyle/>
@@ -14240,27 +13086,11 @@
           <a:solidFill>
             <a:srgbClr val="EAF0F9"/>
           </a:solidFill>
-          <a:ln w="9525">
-            <a:solidFill>
-              <a:srgbClr val="002FA7"/>
-            </a:solidFill>
+          <a:ln>
+            <a:noFill/>
           </a:ln>
           <a:effectLst/>
         </p:spPr>
-        <p:style>
-          <a:lnRef idx="1">
-            <a:schemeClr val="accent1"/>
-          </a:lnRef>
-          <a:fillRef idx="3">
-            <a:schemeClr val="accent1"/>
-          </a:fillRef>
-          <a:effectRef idx="2">
-            <a:schemeClr val="accent1"/>
-          </a:effectRef>
-          <a:fontRef idx="minor">
-            <a:schemeClr val="lt1"/>
-          </a:fontRef>
-        </p:style>
         <p:txBody>
           <a:bodyPr rtlCol="0" anchor="ctr" wrap="square" tIns="36576" bIns="36576"/>
           <a:lstStyle/>
@@ -14319,27 +13149,11 @@
           <a:solidFill>
             <a:srgbClr val="EAF0F9"/>
           </a:solidFill>
-          <a:ln w="9525">
-            <a:solidFill>
-              <a:srgbClr val="002FA7"/>
-            </a:solidFill>
+          <a:ln>
+            <a:noFill/>
           </a:ln>
           <a:effectLst/>
         </p:spPr>
-        <p:style>
-          <a:lnRef idx="1">
-            <a:schemeClr val="accent1"/>
-          </a:lnRef>
-          <a:fillRef idx="3">
-            <a:schemeClr val="accent1"/>
-          </a:fillRef>
-          <a:effectRef idx="2">
-            <a:schemeClr val="accent1"/>
-          </a:effectRef>
-          <a:fontRef idx="minor">
-            <a:schemeClr val="lt1"/>
-          </a:fontRef>
-        </p:style>
         <p:txBody>
           <a:bodyPr rtlCol="0" anchor="ctr" wrap="square" tIns="36576" bIns="36576"/>
           <a:lstStyle/>
@@ -14403,20 +13217,6 @@
           </a:ln>
           <a:effectLst/>
         </p:spPr>
-        <p:style>
-          <a:lnRef idx="1">
-            <a:schemeClr val="accent1"/>
-          </a:lnRef>
-          <a:fillRef idx="3">
-            <a:schemeClr val="accent1"/>
-          </a:fillRef>
-          <a:effectRef idx="2">
-            <a:schemeClr val="accent1"/>
-          </a:effectRef>
-          <a:fontRef idx="minor">
-            <a:schemeClr val="lt1"/>
-          </a:fontRef>
-        </p:style>
         <p:txBody>
           <a:bodyPr rtlCol="0" anchor="ctr" wrap="square" lIns="73152" rIns="73152" tIns="36576" bIns="36576"/>
           <a:lstStyle/>
@@ -14480,20 +13280,6 @@
           </a:ln>
           <a:effectLst/>
         </p:spPr>
-        <p:style>
-          <a:lnRef idx="1">
-            <a:schemeClr val="accent1"/>
-          </a:lnRef>
-          <a:fillRef idx="3">
-            <a:schemeClr val="accent1"/>
-          </a:fillRef>
-          <a:effectRef idx="2">
-            <a:schemeClr val="accent1"/>
-          </a:effectRef>
-          <a:fontRef idx="minor">
-            <a:schemeClr val="lt1"/>
-          </a:fontRef>
-        </p:style>
         <p:txBody>
           <a:bodyPr rtlCol="0" anchor="ctr" wrap="square" lIns="73152" rIns="73152" tIns="36576" bIns="36576"/>
           <a:lstStyle/>
@@ -14557,20 +13343,6 @@
           </a:ln>
           <a:effectLst/>
         </p:spPr>
-        <p:style>
-          <a:lnRef idx="1">
-            <a:schemeClr val="accent1"/>
-          </a:lnRef>
-          <a:fillRef idx="3">
-            <a:schemeClr val="accent1"/>
-          </a:fillRef>
-          <a:effectRef idx="2">
-            <a:schemeClr val="accent1"/>
-          </a:effectRef>
-          <a:fontRef idx="minor">
-            <a:schemeClr val="lt1"/>
-          </a:fontRef>
-        </p:style>
         <p:txBody>
           <a:bodyPr rtlCol="0" anchor="ctr" wrap="square" lIns="73152" rIns="73152" tIns="36576" bIns="36576"/>
           <a:lstStyle/>
